--- a/Unit 3/Mobile_Architecture_updated.pptx
+++ b/Unit 3/Mobile_Architecture_updated.pptx
@@ -11,16 +11,16 @@
     <p:sldId id="256" r:id="rId2"/>
     <p:sldId id="257" r:id="rId3"/>
     <p:sldId id="258" r:id="rId4"/>
-    <p:sldId id="259" r:id="rId5"/>
+    <p:sldId id="302" r:id="rId5"/>
     <p:sldId id="260" r:id="rId6"/>
     <p:sldId id="261" r:id="rId7"/>
     <p:sldId id="262" r:id="rId8"/>
-    <p:sldId id="264" r:id="rId9"/>
+    <p:sldId id="303" r:id="rId9"/>
     <p:sldId id="265" r:id="rId10"/>
     <p:sldId id="266" r:id="rId11"/>
     <p:sldId id="267" r:id="rId12"/>
     <p:sldId id="268" r:id="rId13"/>
-    <p:sldId id="269" r:id="rId14"/>
+    <p:sldId id="304" r:id="rId14"/>
     <p:sldId id="270" r:id="rId15"/>
     <p:sldId id="271" r:id="rId16"/>
     <p:sldId id="272" r:id="rId17"/>
@@ -29,22 +29,22 @@
     <p:sldId id="275" r:id="rId20"/>
     <p:sldId id="276" r:id="rId21"/>
     <p:sldId id="277" r:id="rId22"/>
-    <p:sldId id="278" r:id="rId23"/>
+    <p:sldId id="305" r:id="rId23"/>
     <p:sldId id="279" r:id="rId24"/>
     <p:sldId id="280" r:id="rId25"/>
     <p:sldId id="281" r:id="rId26"/>
-    <p:sldId id="282" r:id="rId27"/>
+    <p:sldId id="306" r:id="rId27"/>
     <p:sldId id="283" r:id="rId28"/>
     <p:sldId id="284" r:id="rId29"/>
     <p:sldId id="285" r:id="rId30"/>
     <p:sldId id="286" r:id="rId31"/>
     <p:sldId id="287" r:id="rId32"/>
-    <p:sldId id="288" r:id="rId33"/>
+    <p:sldId id="307" r:id="rId33"/>
     <p:sldId id="289" r:id="rId34"/>
     <p:sldId id="290" r:id="rId35"/>
     <p:sldId id="291" r:id="rId36"/>
     <p:sldId id="292" r:id="rId37"/>
-    <p:sldId id="293" r:id="rId38"/>
+    <p:sldId id="308" r:id="rId38"/>
     <p:sldId id="294" r:id="rId39"/>
     <p:sldId id="295" r:id="rId40"/>
     <p:sldId id="296" r:id="rId41"/>
@@ -252,7 +252,7 @@
           <a:p>
             <a:fld id="{4E1A7DB6-BE64-4632-8A2A-9A5C0D85E694}" type="datetimeFigureOut">
               <a:rPr lang="en-US" smtClean="0"/>
-              <a:t>8/29/2026</a:t>
+              <a:t>10/3/2026</a:t>
             </a:fld>
             <a:endParaRPr lang="en-US"/>
           </a:p>
@@ -668,7 +668,7 @@
           <a:p>
             <a:fld id="{71639BF5-02A2-48D1-85F5-565CF7556D54}" type="slidenum">
               <a:rPr lang="en-US" smtClean="0"/>
-              <a:t>11</a:t>
+              <a:t>10</a:t>
             </a:fld>
             <a:endParaRPr lang="en-US"/>
           </a:p>
@@ -677,7 +677,7 @@
     </p:spTree>
     <p:extLst>
       <p:ext uri="{BB962C8B-B14F-4D97-AF65-F5344CB8AC3E}">
-        <p14:creationId xmlns:p14="http://schemas.microsoft.com/office/powerpoint/2010/main" val="3261745759"/>
+        <p14:creationId xmlns:p14="http://schemas.microsoft.com/office/powerpoint/2010/main" val="2415003512"/>
       </p:ext>
     </p:extLst>
   </p:cSld>
@@ -731,10 +731,6 @@
           <a:bodyPr/>
           <a:lstStyle/>
           <a:p>
-            <a:pPr marL="628650" lvl="1" indent="-171450">
-              <a:buFont typeface="Arial" panose="020B0604020202020204" pitchFamily="34" charset="0"/>
-              <a:buChar char="•"/>
-            </a:pPr>
             <a:endParaRPr lang="en-US" dirty="0"/>
           </a:p>
         </p:txBody>
@@ -756,7 +752,7 @@
           <a:p>
             <a:fld id="{71639BF5-02A2-48D1-85F5-565CF7556D54}" type="slidenum">
               <a:rPr lang="en-US" smtClean="0"/>
-              <a:t>12</a:t>
+              <a:t>11</a:t>
             </a:fld>
             <a:endParaRPr lang="en-US"/>
           </a:p>
@@ -765,7 +761,7 @@
     </p:spTree>
     <p:extLst>
       <p:ext uri="{BB962C8B-B14F-4D97-AF65-F5344CB8AC3E}">
-        <p14:creationId xmlns:p14="http://schemas.microsoft.com/office/powerpoint/2010/main" val="426952056"/>
+        <p14:creationId xmlns:p14="http://schemas.microsoft.com/office/powerpoint/2010/main" val="3261745759"/>
       </p:ext>
     </p:extLst>
   </p:cSld>
@@ -819,22 +815,9 @@
           <a:bodyPr/>
           <a:lstStyle/>
           <a:p>
-            <a:pPr marL="0" marR="0" lvl="0" indent="0" algn="l" defTabSz="914400" rtl="0" eaLnBrk="1" fontAlgn="auto" latinLnBrk="0" hangingPunct="1">
-              <a:lnSpc>
-                <a:spcPct val="100000"/>
-              </a:lnSpc>
-              <a:spcBef>
-                <a:spcPts val="0"/>
-              </a:spcBef>
-              <a:spcAft>
-                <a:spcPts val="0"/>
-              </a:spcAft>
-              <a:buClrTx/>
-              <a:buSzTx/>
-              <a:buFontTx/>
-              <a:buNone/>
-              <a:tabLst/>
-              <a:defRPr/>
+            <a:pPr marL="628650" lvl="1" indent="-171450">
+              <a:buFont typeface="Arial" panose="020B0604020202020204" pitchFamily="34" charset="0"/>
+              <a:buChar char="•"/>
             </a:pPr>
             <a:endParaRPr lang="en-US" dirty="0"/>
           </a:p>
@@ -857,7 +840,7 @@
           <a:p>
             <a:fld id="{71639BF5-02A2-48D1-85F5-565CF7556D54}" type="slidenum">
               <a:rPr lang="en-US" smtClean="0"/>
-              <a:t>14</a:t>
+              <a:t>12</a:t>
             </a:fld>
             <a:endParaRPr lang="en-US"/>
           </a:p>
@@ -866,7 +849,7 @@
     </p:spTree>
     <p:extLst>
       <p:ext uri="{BB962C8B-B14F-4D97-AF65-F5344CB8AC3E}">
-        <p14:creationId xmlns:p14="http://schemas.microsoft.com/office/powerpoint/2010/main" val="3632005428"/>
+        <p14:creationId xmlns:p14="http://schemas.microsoft.com/office/powerpoint/2010/main" val="426952056"/>
       </p:ext>
     </p:extLst>
   </p:cSld>
@@ -881,7 +864,13 @@
   <p:cSld>
     <p:spTree>
       <p:nvGrpSpPr>
-        <p:cNvPr id="1" name=""/>
+        <p:cNvPr id="1" name="">
+          <a:extLst>
+            <a:ext uri="{FF2B5EF4-FFF2-40B4-BE49-F238E27FC236}">
+              <a16:creationId xmlns:a16="http://schemas.microsoft.com/office/drawing/2014/main" id="{347FE45D-E729-E8C3-A182-0F0530285FE0}"/>
+            </a:ext>
+          </a:extLst>
+        </p:cNvPr>
         <p:cNvGrpSpPr/>
         <p:nvPr/>
       </p:nvGrpSpPr>
@@ -895,7 +884,13 @@
       </p:grpSpPr>
       <p:sp>
         <p:nvSpPr>
-          <p:cNvPr id="2" name="Slide Image Placeholder 1"/>
+          <p:cNvPr id="2" name="Slide Image Placeholder 1">
+            <a:extLst>
+              <a:ext uri="{FF2B5EF4-FFF2-40B4-BE49-F238E27FC236}">
+                <a16:creationId xmlns:a16="http://schemas.microsoft.com/office/drawing/2014/main" id="{4102F4BF-A23F-B625-485C-D5210C0AF242}"/>
+              </a:ext>
+            </a:extLst>
+          </p:cNvPr>
           <p:cNvSpPr>
             <a:spLocks noGrp="1" noRot="1" noChangeAspect="1"/>
           </p:cNvSpPr>
@@ -907,7 +902,13 @@
       </p:sp>
       <p:sp>
         <p:nvSpPr>
-          <p:cNvPr id="3" name="Notes Placeholder 2"/>
+          <p:cNvPr id="3" name="Notes Placeholder 2">
+            <a:extLst>
+              <a:ext uri="{FF2B5EF4-FFF2-40B4-BE49-F238E27FC236}">
+                <a16:creationId xmlns:a16="http://schemas.microsoft.com/office/drawing/2014/main" id="{A02B5022-7DB0-1543-06B8-D29DE7ABFA78}"/>
+              </a:ext>
+            </a:extLst>
+          </p:cNvPr>
           <p:cNvSpPr>
             <a:spLocks noGrp="1"/>
           </p:cNvSpPr>
@@ -920,18 +921,24 @@
           <a:bodyPr/>
           <a:lstStyle/>
           <a:p>
-            <a:endParaRPr lang="en-US" dirty="0"/>
-          </a:p>
-        </p:txBody>
-      </p:sp>
-      <p:sp>
-        <p:nvSpPr>
-          <p:cNvPr id="4" name="Slide Number Placeholder 3"/>
+            <a:endParaRPr lang="en-CA" dirty="0"/>
+          </a:p>
+        </p:txBody>
+      </p:sp>
+      <p:sp>
+        <p:nvSpPr>
+          <p:cNvPr id="4" name="Slide Number Placeholder 3">
+            <a:extLst>
+              <a:ext uri="{FF2B5EF4-FFF2-40B4-BE49-F238E27FC236}">
+                <a16:creationId xmlns:a16="http://schemas.microsoft.com/office/drawing/2014/main" id="{4D21D9E3-A3B6-B0F5-5B58-1A308F36E900}"/>
+              </a:ext>
+            </a:extLst>
+          </p:cNvPr>
           <p:cNvSpPr>
             <a:spLocks noGrp="1"/>
           </p:cNvSpPr>
           <p:nvPr>
-            <p:ph type="sldNum" sz="quarter" idx="5"/>
+            <p:ph type="sldNum" sz="quarter" idx="10"/>
           </p:nvPr>
         </p:nvSpPr>
         <p:spPr/>
@@ -939,9 +946,9 @@
           <a:bodyPr/>
           <a:lstStyle/>
           <a:p>
-            <a:fld id="{71639BF5-02A2-48D1-85F5-565CF7556D54}" type="slidenum">
-              <a:rPr lang="en-US" smtClean="0"/>
-              <a:t>15</a:t>
+            <a:fld id="{F7021451-1387-4CA6-816F-3879F97B5CBC}" type="slidenum">
+              <a:rPr lang="en-US"/>
+              <a:t>13</a:t>
             </a:fld>
             <a:endParaRPr lang="en-US"/>
           </a:p>
@@ -950,7 +957,7 @@
     </p:spTree>
     <p:extLst>
       <p:ext uri="{BB962C8B-B14F-4D97-AF65-F5344CB8AC3E}">
-        <p14:creationId xmlns:p14="http://schemas.microsoft.com/office/powerpoint/2010/main" val="386541950"/>
+        <p14:creationId xmlns:p14="http://schemas.microsoft.com/office/powerpoint/2010/main" val="3608389547"/>
       </p:ext>
     </p:extLst>
   </p:cSld>
@@ -1004,6 +1011,23 @@
           <a:bodyPr/>
           <a:lstStyle/>
           <a:p>
+            <a:pPr marL="0" marR="0" lvl="0" indent="0" algn="l" defTabSz="914400" rtl="0" eaLnBrk="1" fontAlgn="auto" latinLnBrk="0" hangingPunct="1">
+              <a:lnSpc>
+                <a:spcPct val="100000"/>
+              </a:lnSpc>
+              <a:spcBef>
+                <a:spcPts val="0"/>
+              </a:spcBef>
+              <a:spcAft>
+                <a:spcPts val="0"/>
+              </a:spcAft>
+              <a:buClrTx/>
+              <a:buSzTx/>
+              <a:buFontTx/>
+              <a:buNone/>
+              <a:tabLst/>
+              <a:defRPr/>
+            </a:pPr>
             <a:endParaRPr lang="en-US" dirty="0"/>
           </a:p>
         </p:txBody>
@@ -1025,7 +1049,7 @@
           <a:p>
             <a:fld id="{71639BF5-02A2-48D1-85F5-565CF7556D54}" type="slidenum">
               <a:rPr lang="en-US" smtClean="0"/>
-              <a:t>16</a:t>
+              <a:t>14</a:t>
             </a:fld>
             <a:endParaRPr lang="en-US"/>
           </a:p>
@@ -1034,7 +1058,7 @@
     </p:spTree>
     <p:extLst>
       <p:ext uri="{BB962C8B-B14F-4D97-AF65-F5344CB8AC3E}">
-        <p14:creationId xmlns:p14="http://schemas.microsoft.com/office/powerpoint/2010/main" val="2899731297"/>
+        <p14:creationId xmlns:p14="http://schemas.microsoft.com/office/powerpoint/2010/main" val="3632005428"/>
       </p:ext>
     </p:extLst>
   </p:cSld>
@@ -1088,10 +1112,6 @@
           <a:bodyPr/>
           <a:lstStyle/>
           <a:p>
-            <a:pPr marL="171450" indent="-171450">
-              <a:buFont typeface="Arial" panose="020B0604020202020204" pitchFamily="34" charset="0"/>
-              <a:buChar char="•"/>
-            </a:pPr>
             <a:endParaRPr lang="en-US" dirty="0"/>
           </a:p>
         </p:txBody>
@@ -1113,7 +1133,7 @@
           <a:p>
             <a:fld id="{71639BF5-02A2-48D1-85F5-565CF7556D54}" type="slidenum">
               <a:rPr lang="en-US" smtClean="0"/>
-              <a:t>17</a:t>
+              <a:t>15</a:t>
             </a:fld>
             <a:endParaRPr lang="en-US"/>
           </a:p>
@@ -1122,7 +1142,7 @@
     </p:spTree>
     <p:extLst>
       <p:ext uri="{BB962C8B-B14F-4D97-AF65-F5344CB8AC3E}">
-        <p14:creationId xmlns:p14="http://schemas.microsoft.com/office/powerpoint/2010/main" val="3495264069"/>
+        <p14:creationId xmlns:p14="http://schemas.microsoft.com/office/powerpoint/2010/main" val="386541950"/>
       </p:ext>
     </p:extLst>
   </p:cSld>
@@ -1197,7 +1217,7 @@
           <a:p>
             <a:fld id="{71639BF5-02A2-48D1-85F5-565CF7556D54}" type="slidenum">
               <a:rPr lang="en-US" smtClean="0"/>
-              <a:t>18</a:t>
+              <a:t>16</a:t>
             </a:fld>
             <a:endParaRPr lang="en-US"/>
           </a:p>
@@ -1206,7 +1226,7 @@
     </p:spTree>
     <p:extLst>
       <p:ext uri="{BB962C8B-B14F-4D97-AF65-F5344CB8AC3E}">
-        <p14:creationId xmlns:p14="http://schemas.microsoft.com/office/powerpoint/2010/main" val="2286573130"/>
+        <p14:creationId xmlns:p14="http://schemas.microsoft.com/office/powerpoint/2010/main" val="2899731297"/>
       </p:ext>
     </p:extLst>
   </p:cSld>
@@ -1260,7 +1280,7 @@
           <a:bodyPr/>
           <a:lstStyle/>
           <a:p>
-            <a:pPr marL="628650" lvl="1" indent="-171450">
+            <a:pPr marL="171450" indent="-171450">
               <a:buFont typeface="Arial" panose="020B0604020202020204" pitchFamily="34" charset="0"/>
               <a:buChar char="•"/>
             </a:pPr>
@@ -1285,7 +1305,7 @@
           <a:p>
             <a:fld id="{71639BF5-02A2-48D1-85F5-565CF7556D54}" type="slidenum">
               <a:rPr lang="en-US" smtClean="0"/>
-              <a:t>19</a:t>
+              <a:t>17</a:t>
             </a:fld>
             <a:endParaRPr lang="en-US"/>
           </a:p>
@@ -1294,7 +1314,7 @@
     </p:spTree>
     <p:extLst>
       <p:ext uri="{BB962C8B-B14F-4D97-AF65-F5344CB8AC3E}">
-        <p14:creationId xmlns:p14="http://schemas.microsoft.com/office/powerpoint/2010/main" val="555698506"/>
+        <p14:creationId xmlns:p14="http://schemas.microsoft.com/office/powerpoint/2010/main" val="3495264069"/>
       </p:ext>
     </p:extLst>
   </p:cSld>
@@ -1369,7 +1389,7 @@
           <a:p>
             <a:fld id="{71639BF5-02A2-48D1-85F5-565CF7556D54}" type="slidenum">
               <a:rPr lang="en-US" smtClean="0"/>
-              <a:t>20</a:t>
+              <a:t>18</a:t>
             </a:fld>
             <a:endParaRPr lang="en-US"/>
           </a:p>
@@ -1378,7 +1398,7 @@
     </p:spTree>
     <p:extLst>
       <p:ext uri="{BB962C8B-B14F-4D97-AF65-F5344CB8AC3E}">
-        <p14:creationId xmlns:p14="http://schemas.microsoft.com/office/powerpoint/2010/main" val="1595055786"/>
+        <p14:creationId xmlns:p14="http://schemas.microsoft.com/office/powerpoint/2010/main" val="2286573130"/>
       </p:ext>
     </p:extLst>
   </p:cSld>
@@ -1457,7 +1477,7 @@
           <a:p>
             <a:fld id="{71639BF5-02A2-48D1-85F5-565CF7556D54}" type="slidenum">
               <a:rPr lang="en-US" smtClean="0"/>
-              <a:t>21</a:t>
+              <a:t>19</a:t>
             </a:fld>
             <a:endParaRPr lang="en-US"/>
           </a:p>
@@ -1466,7 +1486,7 @@
     </p:spTree>
     <p:extLst>
       <p:ext uri="{BB962C8B-B14F-4D97-AF65-F5344CB8AC3E}">
-        <p14:creationId xmlns:p14="http://schemas.microsoft.com/office/powerpoint/2010/main" val="648779858"/>
+        <p14:creationId xmlns:p14="http://schemas.microsoft.com/office/powerpoint/2010/main" val="555698506"/>
       </p:ext>
     </p:extLst>
   </p:cSld>
@@ -1608,10 +1628,6 @@
           <a:bodyPr/>
           <a:lstStyle/>
           <a:p>
-            <a:pPr marL="171450" indent="-171450">
-              <a:buFont typeface="Arial" panose="020B0604020202020204" pitchFamily="34" charset="0"/>
-              <a:buChar char="•"/>
-            </a:pPr>
             <a:endParaRPr lang="en-US" dirty="0"/>
           </a:p>
         </p:txBody>
@@ -1633,7 +1649,7 @@
           <a:p>
             <a:fld id="{71639BF5-02A2-48D1-85F5-565CF7556D54}" type="slidenum">
               <a:rPr lang="en-US" smtClean="0"/>
-              <a:t>23</a:t>
+              <a:t>20</a:t>
             </a:fld>
             <a:endParaRPr lang="en-US"/>
           </a:p>
@@ -1642,7 +1658,7 @@
     </p:spTree>
     <p:extLst>
       <p:ext uri="{BB962C8B-B14F-4D97-AF65-F5344CB8AC3E}">
-        <p14:creationId xmlns:p14="http://schemas.microsoft.com/office/powerpoint/2010/main" val="2967030200"/>
+        <p14:creationId xmlns:p14="http://schemas.microsoft.com/office/powerpoint/2010/main" val="1595055786"/>
       </p:ext>
     </p:extLst>
   </p:cSld>
@@ -1721,7 +1737,7 @@
           <a:p>
             <a:fld id="{71639BF5-02A2-48D1-85F5-565CF7556D54}" type="slidenum">
               <a:rPr lang="en-US" smtClean="0"/>
-              <a:t>24</a:t>
+              <a:t>21</a:t>
             </a:fld>
             <a:endParaRPr lang="en-US"/>
           </a:p>
@@ -1730,7 +1746,7 @@
     </p:spTree>
     <p:extLst>
       <p:ext uri="{BB962C8B-B14F-4D97-AF65-F5344CB8AC3E}">
-        <p14:creationId xmlns:p14="http://schemas.microsoft.com/office/powerpoint/2010/main" val="618381707"/>
+        <p14:creationId xmlns:p14="http://schemas.microsoft.com/office/powerpoint/2010/main" val="648779858"/>
       </p:ext>
     </p:extLst>
   </p:cSld>
@@ -1745,7 +1761,13 @@
   <p:cSld>
     <p:spTree>
       <p:nvGrpSpPr>
-        <p:cNvPr id="1" name=""/>
+        <p:cNvPr id="1" name="">
+          <a:extLst>
+            <a:ext uri="{FF2B5EF4-FFF2-40B4-BE49-F238E27FC236}">
+              <a16:creationId xmlns:a16="http://schemas.microsoft.com/office/drawing/2014/main" id="{1429EAB7-9CE5-622D-F319-A0348CB1A814}"/>
+            </a:ext>
+          </a:extLst>
+        </p:cNvPr>
         <p:cNvGrpSpPr/>
         <p:nvPr/>
       </p:nvGrpSpPr>
@@ -1759,7 +1781,13 @@
       </p:grpSpPr>
       <p:sp>
         <p:nvSpPr>
-          <p:cNvPr id="2" name="Slide Image Placeholder 1"/>
+          <p:cNvPr id="2" name="Slide Image Placeholder 1">
+            <a:extLst>
+              <a:ext uri="{FF2B5EF4-FFF2-40B4-BE49-F238E27FC236}">
+                <a16:creationId xmlns:a16="http://schemas.microsoft.com/office/drawing/2014/main" id="{725B5007-22F2-3FBC-8306-608E7469DA5E}"/>
+              </a:ext>
+            </a:extLst>
+          </p:cNvPr>
           <p:cNvSpPr>
             <a:spLocks noGrp="1" noRot="1" noChangeAspect="1"/>
           </p:cNvSpPr>
@@ -1771,7 +1799,13 @@
       </p:sp>
       <p:sp>
         <p:nvSpPr>
-          <p:cNvPr id="3" name="Notes Placeholder 2"/>
+          <p:cNvPr id="3" name="Notes Placeholder 2">
+            <a:extLst>
+              <a:ext uri="{FF2B5EF4-FFF2-40B4-BE49-F238E27FC236}">
+                <a16:creationId xmlns:a16="http://schemas.microsoft.com/office/drawing/2014/main" id="{0E9A7324-171F-05CB-102B-9C78EF893CF3}"/>
+              </a:ext>
+            </a:extLst>
+          </p:cNvPr>
           <p:cNvSpPr>
             <a:spLocks noGrp="1"/>
           </p:cNvSpPr>
@@ -1784,18 +1818,24 @@
           <a:bodyPr/>
           <a:lstStyle/>
           <a:p>
-            <a:endParaRPr lang="en-US" dirty="0"/>
-          </a:p>
-        </p:txBody>
-      </p:sp>
-      <p:sp>
-        <p:nvSpPr>
-          <p:cNvPr id="4" name="Slide Number Placeholder 3"/>
+            <a:endParaRPr lang="en-CA" dirty="0"/>
+          </a:p>
+        </p:txBody>
+      </p:sp>
+      <p:sp>
+        <p:nvSpPr>
+          <p:cNvPr id="4" name="Slide Number Placeholder 3">
+            <a:extLst>
+              <a:ext uri="{FF2B5EF4-FFF2-40B4-BE49-F238E27FC236}">
+                <a16:creationId xmlns:a16="http://schemas.microsoft.com/office/drawing/2014/main" id="{28757B23-C412-0442-7E10-070A67B18492}"/>
+              </a:ext>
+            </a:extLst>
+          </p:cNvPr>
           <p:cNvSpPr>
             <a:spLocks noGrp="1"/>
           </p:cNvSpPr>
           <p:nvPr>
-            <p:ph type="sldNum" sz="quarter" idx="5"/>
+            <p:ph type="sldNum" sz="quarter" idx="10"/>
           </p:nvPr>
         </p:nvSpPr>
         <p:spPr/>
@@ -1803,9 +1843,9 @@
           <a:bodyPr/>
           <a:lstStyle/>
           <a:p>
-            <a:fld id="{71639BF5-02A2-48D1-85F5-565CF7556D54}" type="slidenum">
-              <a:rPr lang="en-US" smtClean="0"/>
-              <a:t>25</a:t>
+            <a:fld id="{F7021451-1387-4CA6-816F-3879F97B5CBC}" type="slidenum">
+              <a:rPr lang="en-US"/>
+              <a:t>22</a:t>
             </a:fld>
             <a:endParaRPr lang="en-US"/>
           </a:p>
@@ -1814,7 +1854,7 @@
     </p:spTree>
     <p:extLst>
       <p:ext uri="{BB962C8B-B14F-4D97-AF65-F5344CB8AC3E}">
-        <p14:creationId xmlns:p14="http://schemas.microsoft.com/office/powerpoint/2010/main" val="1868856121"/>
+        <p14:creationId xmlns:p14="http://schemas.microsoft.com/office/powerpoint/2010/main" val="788058314"/>
       </p:ext>
     </p:extLst>
   </p:cSld>
@@ -1893,7 +1933,7 @@
           <a:p>
             <a:fld id="{71639BF5-02A2-48D1-85F5-565CF7556D54}" type="slidenum">
               <a:rPr lang="en-US" smtClean="0"/>
-              <a:t>27</a:t>
+              <a:t>23</a:t>
             </a:fld>
             <a:endParaRPr lang="en-US"/>
           </a:p>
@@ -1902,7 +1942,7 @@
     </p:spTree>
     <p:extLst>
       <p:ext uri="{BB962C8B-B14F-4D97-AF65-F5344CB8AC3E}">
-        <p14:creationId xmlns:p14="http://schemas.microsoft.com/office/powerpoint/2010/main" val="1691314112"/>
+        <p14:creationId xmlns:p14="http://schemas.microsoft.com/office/powerpoint/2010/main" val="2967030200"/>
       </p:ext>
     </p:extLst>
   </p:cSld>
@@ -1956,6 +1996,10 @@
           <a:bodyPr/>
           <a:lstStyle/>
           <a:p>
+            <a:pPr marL="628650" lvl="1" indent="-171450">
+              <a:buFont typeface="Arial" panose="020B0604020202020204" pitchFamily="34" charset="0"/>
+              <a:buChar char="•"/>
+            </a:pPr>
             <a:endParaRPr lang="en-US" dirty="0"/>
           </a:p>
         </p:txBody>
@@ -1977,7 +2021,7 @@
           <a:p>
             <a:fld id="{71639BF5-02A2-48D1-85F5-565CF7556D54}" type="slidenum">
               <a:rPr lang="en-US" smtClean="0"/>
-              <a:t>28</a:t>
+              <a:t>24</a:t>
             </a:fld>
             <a:endParaRPr lang="en-US"/>
           </a:p>
@@ -1986,7 +2030,7 @@
     </p:spTree>
     <p:extLst>
       <p:ext uri="{BB962C8B-B14F-4D97-AF65-F5344CB8AC3E}">
-        <p14:creationId xmlns:p14="http://schemas.microsoft.com/office/powerpoint/2010/main" val="3526536061"/>
+        <p14:creationId xmlns:p14="http://schemas.microsoft.com/office/powerpoint/2010/main" val="618381707"/>
       </p:ext>
     </p:extLst>
   </p:cSld>
@@ -2040,10 +2084,6 @@
           <a:bodyPr/>
           <a:lstStyle/>
           <a:p>
-            <a:pPr marL="628650" lvl="1" indent="-171450">
-              <a:buFont typeface="Arial" panose="020B0604020202020204" pitchFamily="34" charset="0"/>
-              <a:buChar char="•"/>
-            </a:pPr>
             <a:endParaRPr lang="en-US" dirty="0"/>
           </a:p>
         </p:txBody>
@@ -2065,7 +2105,7 @@
           <a:p>
             <a:fld id="{71639BF5-02A2-48D1-85F5-565CF7556D54}" type="slidenum">
               <a:rPr lang="en-US" smtClean="0"/>
-              <a:t>29</a:t>
+              <a:t>25</a:t>
             </a:fld>
             <a:endParaRPr lang="en-US"/>
           </a:p>
@@ -2074,7 +2114,7 @@
     </p:spTree>
     <p:extLst>
       <p:ext uri="{BB962C8B-B14F-4D97-AF65-F5344CB8AC3E}">
-        <p14:creationId xmlns:p14="http://schemas.microsoft.com/office/powerpoint/2010/main" val="3964452712"/>
+        <p14:creationId xmlns:p14="http://schemas.microsoft.com/office/powerpoint/2010/main" val="1868856121"/>
       </p:ext>
     </p:extLst>
   </p:cSld>
@@ -2089,7 +2129,13 @@
   <p:cSld>
     <p:spTree>
       <p:nvGrpSpPr>
-        <p:cNvPr id="1" name=""/>
+        <p:cNvPr id="1" name="">
+          <a:extLst>
+            <a:ext uri="{FF2B5EF4-FFF2-40B4-BE49-F238E27FC236}">
+              <a16:creationId xmlns:a16="http://schemas.microsoft.com/office/drawing/2014/main" id="{5408CCEB-41AF-BA4B-E1DD-83087554AB08}"/>
+            </a:ext>
+          </a:extLst>
+        </p:cNvPr>
         <p:cNvGrpSpPr/>
         <p:nvPr/>
       </p:nvGrpSpPr>
@@ -2103,7 +2149,13 @@
       </p:grpSpPr>
       <p:sp>
         <p:nvSpPr>
-          <p:cNvPr id="2" name="Slide Image Placeholder 1"/>
+          <p:cNvPr id="2" name="Slide Image Placeholder 1">
+            <a:extLst>
+              <a:ext uri="{FF2B5EF4-FFF2-40B4-BE49-F238E27FC236}">
+                <a16:creationId xmlns:a16="http://schemas.microsoft.com/office/drawing/2014/main" id="{1C62BC2E-3637-C874-5C9B-D2384FE3C7A9}"/>
+              </a:ext>
+            </a:extLst>
+          </p:cNvPr>
           <p:cNvSpPr>
             <a:spLocks noGrp="1" noRot="1" noChangeAspect="1"/>
           </p:cNvSpPr>
@@ -2115,7 +2167,13 @@
       </p:sp>
       <p:sp>
         <p:nvSpPr>
-          <p:cNvPr id="3" name="Notes Placeholder 2"/>
+          <p:cNvPr id="3" name="Notes Placeholder 2">
+            <a:extLst>
+              <a:ext uri="{FF2B5EF4-FFF2-40B4-BE49-F238E27FC236}">
+                <a16:creationId xmlns:a16="http://schemas.microsoft.com/office/drawing/2014/main" id="{F8138E7E-D106-141F-96E1-0AC31983824E}"/>
+              </a:ext>
+            </a:extLst>
+          </p:cNvPr>
           <p:cNvSpPr>
             <a:spLocks noGrp="1"/>
           </p:cNvSpPr>
@@ -2128,22 +2186,24 @@
           <a:bodyPr/>
           <a:lstStyle/>
           <a:p>
-            <a:pPr marL="628650" lvl="1" indent="-171450">
-              <a:buFont typeface="Arial" panose="020B0604020202020204" pitchFamily="34" charset="0"/>
-              <a:buChar char="•"/>
-            </a:pPr>
-            <a:endParaRPr lang="en-US" dirty="0"/>
-          </a:p>
-        </p:txBody>
-      </p:sp>
-      <p:sp>
-        <p:nvSpPr>
-          <p:cNvPr id="4" name="Slide Number Placeholder 3"/>
+            <a:endParaRPr lang="en-CA" dirty="0"/>
+          </a:p>
+        </p:txBody>
+      </p:sp>
+      <p:sp>
+        <p:nvSpPr>
+          <p:cNvPr id="4" name="Slide Number Placeholder 3">
+            <a:extLst>
+              <a:ext uri="{FF2B5EF4-FFF2-40B4-BE49-F238E27FC236}">
+                <a16:creationId xmlns:a16="http://schemas.microsoft.com/office/drawing/2014/main" id="{DCCA35C7-337B-1DCB-478F-03367115553B}"/>
+              </a:ext>
+            </a:extLst>
+          </p:cNvPr>
           <p:cNvSpPr>
             <a:spLocks noGrp="1"/>
           </p:cNvSpPr>
           <p:nvPr>
-            <p:ph type="sldNum" sz="quarter" idx="5"/>
+            <p:ph type="sldNum" sz="quarter" idx="10"/>
           </p:nvPr>
         </p:nvSpPr>
         <p:spPr/>
@@ -2151,9 +2211,9 @@
           <a:bodyPr/>
           <a:lstStyle/>
           <a:p>
-            <a:fld id="{71639BF5-02A2-48D1-85F5-565CF7556D54}" type="slidenum">
-              <a:rPr lang="en-US" smtClean="0"/>
-              <a:t>30</a:t>
+            <a:fld id="{F7021451-1387-4CA6-816F-3879F97B5CBC}" type="slidenum">
+              <a:rPr lang="en-US"/>
+              <a:t>26</a:t>
             </a:fld>
             <a:endParaRPr lang="en-US"/>
           </a:p>
@@ -2162,7 +2222,7 @@
     </p:spTree>
     <p:extLst>
       <p:ext uri="{BB962C8B-B14F-4D97-AF65-F5344CB8AC3E}">
-        <p14:creationId xmlns:p14="http://schemas.microsoft.com/office/powerpoint/2010/main" val="3411585501"/>
+        <p14:creationId xmlns:p14="http://schemas.microsoft.com/office/powerpoint/2010/main" val="3326323751"/>
       </p:ext>
     </p:extLst>
   </p:cSld>
@@ -2216,6 +2276,10 @@
           <a:bodyPr/>
           <a:lstStyle/>
           <a:p>
+            <a:pPr marL="171450" indent="-171450">
+              <a:buFont typeface="Arial" panose="020B0604020202020204" pitchFamily="34" charset="0"/>
+              <a:buChar char="•"/>
+            </a:pPr>
             <a:endParaRPr lang="en-US" dirty="0"/>
           </a:p>
         </p:txBody>
@@ -2237,7 +2301,7 @@
           <a:p>
             <a:fld id="{71639BF5-02A2-48D1-85F5-565CF7556D54}" type="slidenum">
               <a:rPr lang="en-US" smtClean="0"/>
-              <a:t>31</a:t>
+              <a:t>27</a:t>
             </a:fld>
             <a:endParaRPr lang="en-US"/>
           </a:p>
@@ -2246,7 +2310,7 @@
     </p:spTree>
     <p:extLst>
       <p:ext uri="{BB962C8B-B14F-4D97-AF65-F5344CB8AC3E}">
-        <p14:creationId xmlns:p14="http://schemas.microsoft.com/office/powerpoint/2010/main" val="1948038676"/>
+        <p14:creationId xmlns:p14="http://schemas.microsoft.com/office/powerpoint/2010/main" val="1691314112"/>
       </p:ext>
     </p:extLst>
   </p:cSld>
@@ -2300,10 +2364,6 @@
           <a:bodyPr/>
           <a:lstStyle/>
           <a:p>
-            <a:pPr marL="628650" lvl="1" indent="-171450">
-              <a:buFont typeface="Arial" panose="020B0604020202020204" pitchFamily="34" charset="0"/>
-              <a:buChar char="•"/>
-            </a:pPr>
             <a:endParaRPr lang="en-US" dirty="0"/>
           </a:p>
         </p:txBody>
@@ -2325,7 +2385,7 @@
           <a:p>
             <a:fld id="{71639BF5-02A2-48D1-85F5-565CF7556D54}" type="slidenum">
               <a:rPr lang="en-US" smtClean="0"/>
-              <a:t>33</a:t>
+              <a:t>28</a:t>
             </a:fld>
             <a:endParaRPr lang="en-US"/>
           </a:p>
@@ -2334,7 +2394,7 @@
     </p:spTree>
     <p:extLst>
       <p:ext uri="{BB962C8B-B14F-4D97-AF65-F5344CB8AC3E}">
-        <p14:creationId xmlns:p14="http://schemas.microsoft.com/office/powerpoint/2010/main" val="535208066"/>
+        <p14:creationId xmlns:p14="http://schemas.microsoft.com/office/powerpoint/2010/main" val="3526536061"/>
       </p:ext>
     </p:extLst>
   </p:cSld>
@@ -2388,6 +2448,10 @@
           <a:bodyPr/>
           <a:lstStyle/>
           <a:p>
+            <a:pPr marL="628650" lvl="1" indent="-171450">
+              <a:buFont typeface="Arial" panose="020B0604020202020204" pitchFamily="34" charset="0"/>
+              <a:buChar char="•"/>
+            </a:pPr>
             <a:endParaRPr lang="en-US" dirty="0"/>
           </a:p>
         </p:txBody>
@@ -2409,7 +2473,7 @@
           <a:p>
             <a:fld id="{71639BF5-02A2-48D1-85F5-565CF7556D54}" type="slidenum">
               <a:rPr lang="en-US" smtClean="0"/>
-              <a:t>34</a:t>
+              <a:t>29</a:t>
             </a:fld>
             <a:endParaRPr lang="en-US"/>
           </a:p>
@@ -2418,7 +2482,7 @@
     </p:spTree>
     <p:extLst>
       <p:ext uri="{BB962C8B-B14F-4D97-AF65-F5344CB8AC3E}">
-        <p14:creationId xmlns:p14="http://schemas.microsoft.com/office/powerpoint/2010/main" val="937100298"/>
+        <p14:creationId xmlns:p14="http://schemas.microsoft.com/office/powerpoint/2010/main" val="3964452712"/>
       </p:ext>
     </p:extLst>
   </p:cSld>
@@ -2556,6 +2620,10 @@
           <a:bodyPr/>
           <a:lstStyle/>
           <a:p>
+            <a:pPr marL="628650" lvl="1" indent="-171450">
+              <a:buFont typeface="Arial" panose="020B0604020202020204" pitchFamily="34" charset="0"/>
+              <a:buChar char="•"/>
+            </a:pPr>
             <a:endParaRPr lang="en-US" dirty="0"/>
           </a:p>
         </p:txBody>
@@ -2577,7 +2645,7 @@
           <a:p>
             <a:fld id="{71639BF5-02A2-48D1-85F5-565CF7556D54}" type="slidenum">
               <a:rPr lang="en-US" smtClean="0"/>
-              <a:t>35</a:t>
+              <a:t>30</a:t>
             </a:fld>
             <a:endParaRPr lang="en-US"/>
           </a:p>
@@ -2586,7 +2654,7 @@
     </p:spTree>
     <p:extLst>
       <p:ext uri="{BB962C8B-B14F-4D97-AF65-F5344CB8AC3E}">
-        <p14:creationId xmlns:p14="http://schemas.microsoft.com/office/powerpoint/2010/main" val="2167451186"/>
+        <p14:creationId xmlns:p14="http://schemas.microsoft.com/office/powerpoint/2010/main" val="3411585501"/>
       </p:ext>
     </p:extLst>
   </p:cSld>
@@ -2640,10 +2708,6 @@
           <a:bodyPr/>
           <a:lstStyle/>
           <a:p>
-            <a:pPr marL="628650" lvl="1" indent="-171450">
-              <a:buFont typeface="Arial" panose="020B0604020202020204" pitchFamily="34" charset="0"/>
-              <a:buChar char="•"/>
-            </a:pPr>
             <a:endParaRPr lang="en-US" dirty="0"/>
           </a:p>
         </p:txBody>
@@ -2665,7 +2729,7 @@
           <a:p>
             <a:fld id="{71639BF5-02A2-48D1-85F5-565CF7556D54}" type="slidenum">
               <a:rPr lang="en-US" smtClean="0"/>
-              <a:t>36</a:t>
+              <a:t>31</a:t>
             </a:fld>
             <a:endParaRPr lang="en-US"/>
           </a:p>
@@ -2674,7 +2738,7 @@
     </p:spTree>
     <p:extLst>
       <p:ext uri="{BB962C8B-B14F-4D97-AF65-F5344CB8AC3E}">
-        <p14:creationId xmlns:p14="http://schemas.microsoft.com/office/powerpoint/2010/main" val="2229867576"/>
+        <p14:creationId xmlns:p14="http://schemas.microsoft.com/office/powerpoint/2010/main" val="1948038676"/>
       </p:ext>
     </p:extLst>
   </p:cSld>
@@ -2689,7 +2753,13 @@
   <p:cSld>
     <p:spTree>
       <p:nvGrpSpPr>
-        <p:cNvPr id="1" name=""/>
+        <p:cNvPr id="1" name="">
+          <a:extLst>
+            <a:ext uri="{FF2B5EF4-FFF2-40B4-BE49-F238E27FC236}">
+              <a16:creationId xmlns:a16="http://schemas.microsoft.com/office/drawing/2014/main" id="{8B22C3F9-2A9E-30C5-1032-FCBA902EA065}"/>
+            </a:ext>
+          </a:extLst>
+        </p:cNvPr>
         <p:cNvGrpSpPr/>
         <p:nvPr/>
       </p:nvGrpSpPr>
@@ -2703,7 +2773,13 @@
       </p:grpSpPr>
       <p:sp>
         <p:nvSpPr>
-          <p:cNvPr id="2" name="Slide Image Placeholder 1"/>
+          <p:cNvPr id="2" name="Slide Image Placeholder 1">
+            <a:extLst>
+              <a:ext uri="{FF2B5EF4-FFF2-40B4-BE49-F238E27FC236}">
+                <a16:creationId xmlns:a16="http://schemas.microsoft.com/office/drawing/2014/main" id="{36A3626D-5DCE-0B76-C2C7-DB4F951A1B42}"/>
+              </a:ext>
+            </a:extLst>
+          </p:cNvPr>
           <p:cNvSpPr>
             <a:spLocks noGrp="1" noRot="1" noChangeAspect="1"/>
           </p:cNvSpPr>
@@ -2715,7 +2791,13 @@
       </p:sp>
       <p:sp>
         <p:nvSpPr>
-          <p:cNvPr id="3" name="Notes Placeholder 2"/>
+          <p:cNvPr id="3" name="Notes Placeholder 2">
+            <a:extLst>
+              <a:ext uri="{FF2B5EF4-FFF2-40B4-BE49-F238E27FC236}">
+                <a16:creationId xmlns:a16="http://schemas.microsoft.com/office/drawing/2014/main" id="{0128229F-5547-82A2-E090-5FD79D0722F8}"/>
+              </a:ext>
+            </a:extLst>
+          </p:cNvPr>
           <p:cNvSpPr>
             <a:spLocks noGrp="1"/>
           </p:cNvSpPr>
@@ -2728,18 +2810,24 @@
           <a:bodyPr/>
           <a:lstStyle/>
           <a:p>
-            <a:endParaRPr lang="en-US" dirty="0"/>
-          </a:p>
-        </p:txBody>
-      </p:sp>
-      <p:sp>
-        <p:nvSpPr>
-          <p:cNvPr id="4" name="Slide Number Placeholder 3"/>
+            <a:endParaRPr lang="en-CA" dirty="0"/>
+          </a:p>
+        </p:txBody>
+      </p:sp>
+      <p:sp>
+        <p:nvSpPr>
+          <p:cNvPr id="4" name="Slide Number Placeholder 3">
+            <a:extLst>
+              <a:ext uri="{FF2B5EF4-FFF2-40B4-BE49-F238E27FC236}">
+                <a16:creationId xmlns:a16="http://schemas.microsoft.com/office/drawing/2014/main" id="{ECDD00A8-66CC-D651-4F99-A26B1EA0B652}"/>
+              </a:ext>
+            </a:extLst>
+          </p:cNvPr>
           <p:cNvSpPr>
             <a:spLocks noGrp="1"/>
           </p:cNvSpPr>
           <p:nvPr>
-            <p:ph type="sldNum" sz="quarter" idx="5"/>
+            <p:ph type="sldNum" sz="quarter" idx="10"/>
           </p:nvPr>
         </p:nvSpPr>
         <p:spPr/>
@@ -2747,9 +2835,9 @@
           <a:bodyPr/>
           <a:lstStyle/>
           <a:p>
-            <a:fld id="{71639BF5-02A2-48D1-85F5-565CF7556D54}" type="slidenum">
-              <a:rPr lang="en-US" smtClean="0"/>
-              <a:t>38</a:t>
+            <a:fld id="{F7021451-1387-4CA6-816F-3879F97B5CBC}" type="slidenum">
+              <a:rPr lang="en-US"/>
+              <a:t>32</a:t>
             </a:fld>
             <a:endParaRPr lang="en-US"/>
           </a:p>
@@ -2758,7 +2846,7 @@
     </p:spTree>
     <p:extLst>
       <p:ext uri="{BB962C8B-B14F-4D97-AF65-F5344CB8AC3E}">
-        <p14:creationId xmlns:p14="http://schemas.microsoft.com/office/powerpoint/2010/main" val="1998685945"/>
+        <p14:creationId xmlns:p14="http://schemas.microsoft.com/office/powerpoint/2010/main" val="839329532"/>
       </p:ext>
     </p:extLst>
   </p:cSld>
@@ -2812,6 +2900,10 @@
           <a:bodyPr/>
           <a:lstStyle/>
           <a:p>
+            <a:pPr marL="628650" lvl="1" indent="-171450">
+              <a:buFont typeface="Arial" panose="020B0604020202020204" pitchFamily="34" charset="0"/>
+              <a:buChar char="•"/>
+            </a:pPr>
             <a:endParaRPr lang="en-US" dirty="0"/>
           </a:p>
         </p:txBody>
@@ -2833,7 +2925,7 @@
           <a:p>
             <a:fld id="{71639BF5-02A2-48D1-85F5-565CF7556D54}" type="slidenum">
               <a:rPr lang="en-US" smtClean="0"/>
-              <a:t>39</a:t>
+              <a:t>33</a:t>
             </a:fld>
             <a:endParaRPr lang="en-US"/>
           </a:p>
@@ -2842,7 +2934,7 @@
     </p:spTree>
     <p:extLst>
       <p:ext uri="{BB962C8B-B14F-4D97-AF65-F5344CB8AC3E}">
-        <p14:creationId xmlns:p14="http://schemas.microsoft.com/office/powerpoint/2010/main" val="1297553374"/>
+        <p14:creationId xmlns:p14="http://schemas.microsoft.com/office/powerpoint/2010/main" val="535208066"/>
       </p:ext>
     </p:extLst>
   </p:cSld>
@@ -2917,7 +3009,7 @@
           <a:p>
             <a:fld id="{71639BF5-02A2-48D1-85F5-565CF7556D54}" type="slidenum">
               <a:rPr lang="en-US" smtClean="0"/>
-              <a:t>40</a:t>
+              <a:t>34</a:t>
             </a:fld>
             <a:endParaRPr lang="en-US"/>
           </a:p>
@@ -2926,7 +3018,7 @@
     </p:spTree>
     <p:extLst>
       <p:ext uri="{BB962C8B-B14F-4D97-AF65-F5344CB8AC3E}">
-        <p14:creationId xmlns:p14="http://schemas.microsoft.com/office/powerpoint/2010/main" val="647838536"/>
+        <p14:creationId xmlns:p14="http://schemas.microsoft.com/office/powerpoint/2010/main" val="937100298"/>
       </p:ext>
     </p:extLst>
   </p:cSld>
@@ -2980,10 +3072,6 @@
           <a:bodyPr/>
           <a:lstStyle/>
           <a:p>
-            <a:pPr marL="628650" lvl="1" indent="-171450">
-              <a:buFont typeface="Arial" panose="020B0604020202020204" pitchFamily="34" charset="0"/>
-              <a:buChar char="•"/>
-            </a:pPr>
             <a:endParaRPr lang="en-US" dirty="0"/>
           </a:p>
         </p:txBody>
@@ -3005,7 +3093,7 @@
           <a:p>
             <a:fld id="{71639BF5-02A2-48D1-85F5-565CF7556D54}" type="slidenum">
               <a:rPr lang="en-US" smtClean="0"/>
-              <a:t>41</a:t>
+              <a:t>35</a:t>
             </a:fld>
             <a:endParaRPr lang="en-US"/>
           </a:p>
@@ -3014,7 +3102,7 @@
     </p:spTree>
     <p:extLst>
       <p:ext uri="{BB962C8B-B14F-4D97-AF65-F5344CB8AC3E}">
-        <p14:creationId xmlns:p14="http://schemas.microsoft.com/office/powerpoint/2010/main" val="2271984630"/>
+        <p14:creationId xmlns:p14="http://schemas.microsoft.com/office/powerpoint/2010/main" val="2167451186"/>
       </p:ext>
     </p:extLst>
   </p:cSld>
@@ -3068,6 +3156,10 @@
           <a:bodyPr/>
           <a:lstStyle/>
           <a:p>
+            <a:pPr marL="628650" lvl="1" indent="-171450">
+              <a:buFont typeface="Arial" panose="020B0604020202020204" pitchFamily="34" charset="0"/>
+              <a:buChar char="•"/>
+            </a:pPr>
             <a:endParaRPr lang="en-US" dirty="0"/>
           </a:p>
         </p:txBody>
@@ -3089,7 +3181,7 @@
           <a:p>
             <a:fld id="{71639BF5-02A2-48D1-85F5-565CF7556D54}" type="slidenum">
               <a:rPr lang="en-US" smtClean="0"/>
-              <a:t>42</a:t>
+              <a:t>36</a:t>
             </a:fld>
             <a:endParaRPr lang="en-US"/>
           </a:p>
@@ -3098,7 +3190,7 @@
     </p:spTree>
     <p:extLst>
       <p:ext uri="{BB962C8B-B14F-4D97-AF65-F5344CB8AC3E}">
-        <p14:creationId xmlns:p14="http://schemas.microsoft.com/office/powerpoint/2010/main" val="2871034578"/>
+        <p14:creationId xmlns:p14="http://schemas.microsoft.com/office/powerpoint/2010/main" val="2229867576"/>
       </p:ext>
     </p:extLst>
   </p:cSld>
@@ -3113,7 +3205,13 @@
   <p:cSld>
     <p:spTree>
       <p:nvGrpSpPr>
-        <p:cNvPr id="1" name=""/>
+        <p:cNvPr id="1" name="">
+          <a:extLst>
+            <a:ext uri="{FF2B5EF4-FFF2-40B4-BE49-F238E27FC236}">
+              <a16:creationId xmlns:a16="http://schemas.microsoft.com/office/drawing/2014/main" id="{9CC79BD7-F41C-95AC-2C93-9F3368CF790B}"/>
+            </a:ext>
+          </a:extLst>
+        </p:cNvPr>
         <p:cNvGrpSpPr/>
         <p:nvPr/>
       </p:nvGrpSpPr>
@@ -3127,7 +3225,13 @@
       </p:grpSpPr>
       <p:sp>
         <p:nvSpPr>
-          <p:cNvPr id="2" name="Slide Image Placeholder 1"/>
+          <p:cNvPr id="2" name="Slide Image Placeholder 1">
+            <a:extLst>
+              <a:ext uri="{FF2B5EF4-FFF2-40B4-BE49-F238E27FC236}">
+                <a16:creationId xmlns:a16="http://schemas.microsoft.com/office/drawing/2014/main" id="{ACFDEFF7-11D0-E081-9809-6A541B614B7F}"/>
+              </a:ext>
+            </a:extLst>
+          </p:cNvPr>
           <p:cNvSpPr>
             <a:spLocks noGrp="1" noRot="1" noChangeAspect="1"/>
           </p:cNvSpPr>
@@ -3139,7 +3243,13 @@
       </p:sp>
       <p:sp>
         <p:nvSpPr>
-          <p:cNvPr id="3" name="Notes Placeholder 2"/>
+          <p:cNvPr id="3" name="Notes Placeholder 2">
+            <a:extLst>
+              <a:ext uri="{FF2B5EF4-FFF2-40B4-BE49-F238E27FC236}">
+                <a16:creationId xmlns:a16="http://schemas.microsoft.com/office/drawing/2014/main" id="{FEB9E069-74D2-FD35-7389-F93DEBD54776}"/>
+              </a:ext>
+            </a:extLst>
+          </p:cNvPr>
           <p:cNvSpPr>
             <a:spLocks noGrp="1"/>
           </p:cNvSpPr>
@@ -3152,22 +3262,24 @@
           <a:bodyPr/>
           <a:lstStyle/>
           <a:p>
-            <a:pPr marL="628650" lvl="1" indent="-171450">
-              <a:buFont typeface="Arial" panose="020B0604020202020204" pitchFamily="34" charset="0"/>
-              <a:buChar char="•"/>
-            </a:pPr>
-            <a:endParaRPr lang="en-US" dirty="0"/>
-          </a:p>
-        </p:txBody>
-      </p:sp>
-      <p:sp>
-        <p:nvSpPr>
-          <p:cNvPr id="4" name="Slide Number Placeholder 3"/>
+            <a:endParaRPr lang="en-CA" dirty="0"/>
+          </a:p>
+        </p:txBody>
+      </p:sp>
+      <p:sp>
+        <p:nvSpPr>
+          <p:cNvPr id="4" name="Slide Number Placeholder 3">
+            <a:extLst>
+              <a:ext uri="{FF2B5EF4-FFF2-40B4-BE49-F238E27FC236}">
+                <a16:creationId xmlns:a16="http://schemas.microsoft.com/office/drawing/2014/main" id="{C43CD138-D59D-6C97-C42E-7D40DFED3254}"/>
+              </a:ext>
+            </a:extLst>
+          </p:cNvPr>
           <p:cNvSpPr>
             <a:spLocks noGrp="1"/>
           </p:cNvSpPr>
           <p:nvPr>
-            <p:ph type="sldNum" sz="quarter" idx="5"/>
+            <p:ph type="sldNum" sz="quarter" idx="10"/>
           </p:nvPr>
         </p:nvSpPr>
         <p:spPr/>
@@ -3175,9 +3287,9 @@
           <a:bodyPr/>
           <a:lstStyle/>
           <a:p>
-            <a:fld id="{71639BF5-02A2-48D1-85F5-565CF7556D54}" type="slidenum">
-              <a:rPr lang="en-US" smtClean="0"/>
-              <a:t>43</a:t>
+            <a:fld id="{F7021451-1387-4CA6-816F-3879F97B5CBC}" type="slidenum">
+              <a:rPr lang="en-US"/>
+              <a:t>37</a:t>
             </a:fld>
             <a:endParaRPr lang="en-US"/>
           </a:p>
@@ -3186,7 +3298,7 @@
     </p:spTree>
     <p:extLst>
       <p:ext uri="{BB962C8B-B14F-4D97-AF65-F5344CB8AC3E}">
-        <p14:creationId xmlns:p14="http://schemas.microsoft.com/office/powerpoint/2010/main" val="1786757653"/>
+        <p14:creationId xmlns:p14="http://schemas.microsoft.com/office/powerpoint/2010/main" val="4203398426"/>
       </p:ext>
     </p:extLst>
   </p:cSld>
@@ -3261,7 +3373,7 @@
           <a:p>
             <a:fld id="{71639BF5-02A2-48D1-85F5-565CF7556D54}" type="slidenum">
               <a:rPr lang="en-US" smtClean="0"/>
-              <a:t>44</a:t>
+              <a:t>38</a:t>
             </a:fld>
             <a:endParaRPr lang="en-US"/>
           </a:p>
@@ -3270,7 +3382,91 @@
     </p:spTree>
     <p:extLst>
       <p:ext uri="{BB962C8B-B14F-4D97-AF65-F5344CB8AC3E}">
-        <p14:creationId xmlns:p14="http://schemas.microsoft.com/office/powerpoint/2010/main" val="153224959"/>
+        <p14:creationId xmlns:p14="http://schemas.microsoft.com/office/powerpoint/2010/main" val="1998685945"/>
+      </p:ext>
+    </p:extLst>
+  </p:cSld>
+  <p:clrMapOvr>
+    <a:masterClrMapping/>
+  </p:clrMapOvr>
+</p:notes>
+</file>
+
+<file path=ppt/notesSlides/notesSlide39.xml><?xml version="1.0" encoding="utf-8"?>
+<p:notes xmlns:a="http://schemas.openxmlformats.org/drawingml/2006/main" xmlns:r="http://schemas.openxmlformats.org/officeDocument/2006/relationships" xmlns:p="http://schemas.openxmlformats.org/presentationml/2006/main">
+  <p:cSld>
+    <p:spTree>
+      <p:nvGrpSpPr>
+        <p:cNvPr id="1" name=""/>
+        <p:cNvGrpSpPr/>
+        <p:nvPr/>
+      </p:nvGrpSpPr>
+      <p:grpSpPr>
+        <a:xfrm>
+          <a:off x="0" y="0"/>
+          <a:ext cx="0" cy="0"/>
+          <a:chOff x="0" y="0"/>
+          <a:chExt cx="0" cy="0"/>
+        </a:xfrm>
+      </p:grpSpPr>
+      <p:sp>
+        <p:nvSpPr>
+          <p:cNvPr id="2" name="Slide Image Placeholder 1"/>
+          <p:cNvSpPr>
+            <a:spLocks noGrp="1" noRot="1" noChangeAspect="1"/>
+          </p:cNvSpPr>
+          <p:nvPr>
+            <p:ph type="sldImg"/>
+          </p:nvPr>
+        </p:nvSpPr>
+        <p:spPr/>
+      </p:sp>
+      <p:sp>
+        <p:nvSpPr>
+          <p:cNvPr id="3" name="Notes Placeholder 2"/>
+          <p:cNvSpPr>
+            <a:spLocks noGrp="1"/>
+          </p:cNvSpPr>
+          <p:nvPr>
+            <p:ph type="body" idx="1"/>
+          </p:nvPr>
+        </p:nvSpPr>
+        <p:spPr/>
+        <p:txBody>
+          <a:bodyPr/>
+          <a:lstStyle/>
+          <a:p>
+            <a:endParaRPr lang="en-US" dirty="0"/>
+          </a:p>
+        </p:txBody>
+      </p:sp>
+      <p:sp>
+        <p:nvSpPr>
+          <p:cNvPr id="4" name="Slide Number Placeholder 3"/>
+          <p:cNvSpPr>
+            <a:spLocks noGrp="1"/>
+          </p:cNvSpPr>
+          <p:nvPr>
+            <p:ph type="sldNum" sz="quarter" idx="5"/>
+          </p:nvPr>
+        </p:nvSpPr>
+        <p:spPr/>
+        <p:txBody>
+          <a:bodyPr/>
+          <a:lstStyle/>
+          <a:p>
+            <a:fld id="{71639BF5-02A2-48D1-85F5-565CF7556D54}" type="slidenum">
+              <a:rPr lang="en-US" smtClean="0"/>
+              <a:t>39</a:t>
+            </a:fld>
+            <a:endParaRPr lang="en-US"/>
+          </a:p>
+        </p:txBody>
+      </p:sp>
+    </p:spTree>
+    <p:extLst>
+      <p:ext uri="{BB962C8B-B14F-4D97-AF65-F5344CB8AC3E}">
+        <p14:creationId xmlns:p14="http://schemas.microsoft.com/office/powerpoint/2010/main" val="1297553374"/>
       </p:ext>
     </p:extLst>
   </p:cSld>
@@ -3324,6 +3520,90 @@
           <a:bodyPr/>
           <a:lstStyle/>
           <a:p>
+            <a:endParaRPr lang="en-CA" dirty="0"/>
+          </a:p>
+        </p:txBody>
+      </p:sp>
+      <p:sp>
+        <p:nvSpPr>
+          <p:cNvPr id="4" name="Slide Number Placeholder 3"/>
+          <p:cNvSpPr>
+            <a:spLocks noGrp="1"/>
+          </p:cNvSpPr>
+          <p:nvPr>
+            <p:ph type="sldNum" sz="quarter" idx="10"/>
+          </p:nvPr>
+        </p:nvSpPr>
+        <p:spPr/>
+        <p:txBody>
+          <a:bodyPr/>
+          <a:lstStyle/>
+          <a:p>
+            <a:fld id="{F7021451-1387-4CA6-816F-3879F97B5CBC}" type="slidenum">
+              <a:rPr lang="en-US"/>
+              <a:t>4</a:t>
+            </a:fld>
+            <a:endParaRPr lang="en-US"/>
+          </a:p>
+        </p:txBody>
+      </p:sp>
+    </p:spTree>
+    <p:extLst>
+      <p:ext uri="{BB962C8B-B14F-4D97-AF65-F5344CB8AC3E}">
+        <p14:creationId xmlns:p14="http://schemas.microsoft.com/office/powerpoint/2010/main" val="1024086991"/>
+      </p:ext>
+    </p:extLst>
+  </p:cSld>
+  <p:clrMapOvr>
+    <a:masterClrMapping/>
+  </p:clrMapOvr>
+</p:notes>
+</file>
+
+<file path=ppt/notesSlides/notesSlide40.xml><?xml version="1.0" encoding="utf-8"?>
+<p:notes xmlns:a="http://schemas.openxmlformats.org/drawingml/2006/main" xmlns:r="http://schemas.openxmlformats.org/officeDocument/2006/relationships" xmlns:p="http://schemas.openxmlformats.org/presentationml/2006/main">
+  <p:cSld>
+    <p:spTree>
+      <p:nvGrpSpPr>
+        <p:cNvPr id="1" name=""/>
+        <p:cNvGrpSpPr/>
+        <p:nvPr/>
+      </p:nvGrpSpPr>
+      <p:grpSpPr>
+        <a:xfrm>
+          <a:off x="0" y="0"/>
+          <a:ext cx="0" cy="0"/>
+          <a:chOff x="0" y="0"/>
+          <a:chExt cx="0" cy="0"/>
+        </a:xfrm>
+      </p:grpSpPr>
+      <p:sp>
+        <p:nvSpPr>
+          <p:cNvPr id="2" name="Slide Image Placeholder 1"/>
+          <p:cNvSpPr>
+            <a:spLocks noGrp="1" noRot="1" noChangeAspect="1"/>
+          </p:cNvSpPr>
+          <p:nvPr>
+            <p:ph type="sldImg"/>
+          </p:nvPr>
+        </p:nvSpPr>
+        <p:spPr/>
+      </p:sp>
+      <p:sp>
+        <p:nvSpPr>
+          <p:cNvPr id="3" name="Notes Placeholder 2"/>
+          <p:cNvSpPr>
+            <a:spLocks noGrp="1"/>
+          </p:cNvSpPr>
+          <p:nvPr>
+            <p:ph type="body" idx="1"/>
+          </p:nvPr>
+        </p:nvSpPr>
+        <p:spPr/>
+        <p:txBody>
+          <a:bodyPr/>
+          <a:lstStyle/>
+          <a:p>
             <a:endParaRPr lang="en-US" dirty="0"/>
           </a:p>
         </p:txBody>
@@ -3345,7 +3625,7 @@
           <a:p>
             <a:fld id="{71639BF5-02A2-48D1-85F5-565CF7556D54}" type="slidenum">
               <a:rPr lang="en-US" smtClean="0"/>
-              <a:t>4</a:t>
+              <a:t>40</a:t>
             </a:fld>
             <a:endParaRPr lang="en-US"/>
           </a:p>
@@ -3354,7 +3634,351 @@
     </p:spTree>
     <p:extLst>
       <p:ext uri="{BB962C8B-B14F-4D97-AF65-F5344CB8AC3E}">
-        <p14:creationId xmlns:p14="http://schemas.microsoft.com/office/powerpoint/2010/main" val="2060733589"/>
+        <p14:creationId xmlns:p14="http://schemas.microsoft.com/office/powerpoint/2010/main" val="647838536"/>
+      </p:ext>
+    </p:extLst>
+  </p:cSld>
+  <p:clrMapOvr>
+    <a:masterClrMapping/>
+  </p:clrMapOvr>
+</p:notes>
+</file>
+
+<file path=ppt/notesSlides/notesSlide41.xml><?xml version="1.0" encoding="utf-8"?>
+<p:notes xmlns:a="http://schemas.openxmlformats.org/drawingml/2006/main" xmlns:r="http://schemas.openxmlformats.org/officeDocument/2006/relationships" xmlns:p="http://schemas.openxmlformats.org/presentationml/2006/main">
+  <p:cSld>
+    <p:spTree>
+      <p:nvGrpSpPr>
+        <p:cNvPr id="1" name=""/>
+        <p:cNvGrpSpPr/>
+        <p:nvPr/>
+      </p:nvGrpSpPr>
+      <p:grpSpPr>
+        <a:xfrm>
+          <a:off x="0" y="0"/>
+          <a:ext cx="0" cy="0"/>
+          <a:chOff x="0" y="0"/>
+          <a:chExt cx="0" cy="0"/>
+        </a:xfrm>
+      </p:grpSpPr>
+      <p:sp>
+        <p:nvSpPr>
+          <p:cNvPr id="2" name="Slide Image Placeholder 1"/>
+          <p:cNvSpPr>
+            <a:spLocks noGrp="1" noRot="1" noChangeAspect="1"/>
+          </p:cNvSpPr>
+          <p:nvPr>
+            <p:ph type="sldImg"/>
+          </p:nvPr>
+        </p:nvSpPr>
+        <p:spPr/>
+      </p:sp>
+      <p:sp>
+        <p:nvSpPr>
+          <p:cNvPr id="3" name="Notes Placeholder 2"/>
+          <p:cNvSpPr>
+            <a:spLocks noGrp="1"/>
+          </p:cNvSpPr>
+          <p:nvPr>
+            <p:ph type="body" idx="1"/>
+          </p:nvPr>
+        </p:nvSpPr>
+        <p:spPr/>
+        <p:txBody>
+          <a:bodyPr/>
+          <a:lstStyle/>
+          <a:p>
+            <a:pPr marL="628650" lvl="1" indent="-171450">
+              <a:buFont typeface="Arial" panose="020B0604020202020204" pitchFamily="34" charset="0"/>
+              <a:buChar char="•"/>
+            </a:pPr>
+            <a:endParaRPr lang="en-US" dirty="0"/>
+          </a:p>
+        </p:txBody>
+      </p:sp>
+      <p:sp>
+        <p:nvSpPr>
+          <p:cNvPr id="4" name="Slide Number Placeholder 3"/>
+          <p:cNvSpPr>
+            <a:spLocks noGrp="1"/>
+          </p:cNvSpPr>
+          <p:nvPr>
+            <p:ph type="sldNum" sz="quarter" idx="5"/>
+          </p:nvPr>
+        </p:nvSpPr>
+        <p:spPr/>
+        <p:txBody>
+          <a:bodyPr/>
+          <a:lstStyle/>
+          <a:p>
+            <a:fld id="{71639BF5-02A2-48D1-85F5-565CF7556D54}" type="slidenum">
+              <a:rPr lang="en-US" smtClean="0"/>
+              <a:t>41</a:t>
+            </a:fld>
+            <a:endParaRPr lang="en-US"/>
+          </a:p>
+        </p:txBody>
+      </p:sp>
+    </p:spTree>
+    <p:extLst>
+      <p:ext uri="{BB962C8B-B14F-4D97-AF65-F5344CB8AC3E}">
+        <p14:creationId xmlns:p14="http://schemas.microsoft.com/office/powerpoint/2010/main" val="2271984630"/>
+      </p:ext>
+    </p:extLst>
+  </p:cSld>
+  <p:clrMapOvr>
+    <a:masterClrMapping/>
+  </p:clrMapOvr>
+</p:notes>
+</file>
+
+<file path=ppt/notesSlides/notesSlide42.xml><?xml version="1.0" encoding="utf-8"?>
+<p:notes xmlns:a="http://schemas.openxmlformats.org/drawingml/2006/main" xmlns:r="http://schemas.openxmlformats.org/officeDocument/2006/relationships" xmlns:p="http://schemas.openxmlformats.org/presentationml/2006/main">
+  <p:cSld>
+    <p:spTree>
+      <p:nvGrpSpPr>
+        <p:cNvPr id="1" name=""/>
+        <p:cNvGrpSpPr/>
+        <p:nvPr/>
+      </p:nvGrpSpPr>
+      <p:grpSpPr>
+        <a:xfrm>
+          <a:off x="0" y="0"/>
+          <a:ext cx="0" cy="0"/>
+          <a:chOff x="0" y="0"/>
+          <a:chExt cx="0" cy="0"/>
+        </a:xfrm>
+      </p:grpSpPr>
+      <p:sp>
+        <p:nvSpPr>
+          <p:cNvPr id="2" name="Slide Image Placeholder 1"/>
+          <p:cNvSpPr>
+            <a:spLocks noGrp="1" noRot="1" noChangeAspect="1"/>
+          </p:cNvSpPr>
+          <p:nvPr>
+            <p:ph type="sldImg"/>
+          </p:nvPr>
+        </p:nvSpPr>
+        <p:spPr/>
+      </p:sp>
+      <p:sp>
+        <p:nvSpPr>
+          <p:cNvPr id="3" name="Notes Placeholder 2"/>
+          <p:cNvSpPr>
+            <a:spLocks noGrp="1"/>
+          </p:cNvSpPr>
+          <p:nvPr>
+            <p:ph type="body" idx="1"/>
+          </p:nvPr>
+        </p:nvSpPr>
+        <p:spPr/>
+        <p:txBody>
+          <a:bodyPr/>
+          <a:lstStyle/>
+          <a:p>
+            <a:endParaRPr lang="en-US" dirty="0"/>
+          </a:p>
+        </p:txBody>
+      </p:sp>
+      <p:sp>
+        <p:nvSpPr>
+          <p:cNvPr id="4" name="Slide Number Placeholder 3"/>
+          <p:cNvSpPr>
+            <a:spLocks noGrp="1"/>
+          </p:cNvSpPr>
+          <p:nvPr>
+            <p:ph type="sldNum" sz="quarter" idx="5"/>
+          </p:nvPr>
+        </p:nvSpPr>
+        <p:spPr/>
+        <p:txBody>
+          <a:bodyPr/>
+          <a:lstStyle/>
+          <a:p>
+            <a:fld id="{71639BF5-02A2-48D1-85F5-565CF7556D54}" type="slidenum">
+              <a:rPr lang="en-US" smtClean="0"/>
+              <a:t>42</a:t>
+            </a:fld>
+            <a:endParaRPr lang="en-US"/>
+          </a:p>
+        </p:txBody>
+      </p:sp>
+    </p:spTree>
+    <p:extLst>
+      <p:ext uri="{BB962C8B-B14F-4D97-AF65-F5344CB8AC3E}">
+        <p14:creationId xmlns:p14="http://schemas.microsoft.com/office/powerpoint/2010/main" val="2871034578"/>
+      </p:ext>
+    </p:extLst>
+  </p:cSld>
+  <p:clrMapOvr>
+    <a:masterClrMapping/>
+  </p:clrMapOvr>
+</p:notes>
+</file>
+
+<file path=ppt/notesSlides/notesSlide43.xml><?xml version="1.0" encoding="utf-8"?>
+<p:notes xmlns:a="http://schemas.openxmlformats.org/drawingml/2006/main" xmlns:r="http://schemas.openxmlformats.org/officeDocument/2006/relationships" xmlns:p="http://schemas.openxmlformats.org/presentationml/2006/main">
+  <p:cSld>
+    <p:spTree>
+      <p:nvGrpSpPr>
+        <p:cNvPr id="1" name=""/>
+        <p:cNvGrpSpPr/>
+        <p:nvPr/>
+      </p:nvGrpSpPr>
+      <p:grpSpPr>
+        <a:xfrm>
+          <a:off x="0" y="0"/>
+          <a:ext cx="0" cy="0"/>
+          <a:chOff x="0" y="0"/>
+          <a:chExt cx="0" cy="0"/>
+        </a:xfrm>
+      </p:grpSpPr>
+      <p:sp>
+        <p:nvSpPr>
+          <p:cNvPr id="2" name="Slide Image Placeholder 1"/>
+          <p:cNvSpPr>
+            <a:spLocks noGrp="1" noRot="1" noChangeAspect="1"/>
+          </p:cNvSpPr>
+          <p:nvPr>
+            <p:ph type="sldImg"/>
+          </p:nvPr>
+        </p:nvSpPr>
+        <p:spPr/>
+      </p:sp>
+      <p:sp>
+        <p:nvSpPr>
+          <p:cNvPr id="3" name="Notes Placeholder 2"/>
+          <p:cNvSpPr>
+            <a:spLocks noGrp="1"/>
+          </p:cNvSpPr>
+          <p:nvPr>
+            <p:ph type="body" idx="1"/>
+          </p:nvPr>
+        </p:nvSpPr>
+        <p:spPr/>
+        <p:txBody>
+          <a:bodyPr/>
+          <a:lstStyle/>
+          <a:p>
+            <a:pPr marL="628650" lvl="1" indent="-171450">
+              <a:buFont typeface="Arial" panose="020B0604020202020204" pitchFamily="34" charset="0"/>
+              <a:buChar char="•"/>
+            </a:pPr>
+            <a:endParaRPr lang="en-US" dirty="0"/>
+          </a:p>
+        </p:txBody>
+      </p:sp>
+      <p:sp>
+        <p:nvSpPr>
+          <p:cNvPr id="4" name="Slide Number Placeholder 3"/>
+          <p:cNvSpPr>
+            <a:spLocks noGrp="1"/>
+          </p:cNvSpPr>
+          <p:nvPr>
+            <p:ph type="sldNum" sz="quarter" idx="5"/>
+          </p:nvPr>
+        </p:nvSpPr>
+        <p:spPr/>
+        <p:txBody>
+          <a:bodyPr/>
+          <a:lstStyle/>
+          <a:p>
+            <a:fld id="{71639BF5-02A2-48D1-85F5-565CF7556D54}" type="slidenum">
+              <a:rPr lang="en-US" smtClean="0"/>
+              <a:t>43</a:t>
+            </a:fld>
+            <a:endParaRPr lang="en-US"/>
+          </a:p>
+        </p:txBody>
+      </p:sp>
+    </p:spTree>
+    <p:extLst>
+      <p:ext uri="{BB962C8B-B14F-4D97-AF65-F5344CB8AC3E}">
+        <p14:creationId xmlns:p14="http://schemas.microsoft.com/office/powerpoint/2010/main" val="1786757653"/>
+      </p:ext>
+    </p:extLst>
+  </p:cSld>
+  <p:clrMapOvr>
+    <a:masterClrMapping/>
+  </p:clrMapOvr>
+</p:notes>
+</file>
+
+<file path=ppt/notesSlides/notesSlide44.xml><?xml version="1.0" encoding="utf-8"?>
+<p:notes xmlns:a="http://schemas.openxmlformats.org/drawingml/2006/main" xmlns:r="http://schemas.openxmlformats.org/officeDocument/2006/relationships" xmlns:p="http://schemas.openxmlformats.org/presentationml/2006/main">
+  <p:cSld>
+    <p:spTree>
+      <p:nvGrpSpPr>
+        <p:cNvPr id="1" name=""/>
+        <p:cNvGrpSpPr/>
+        <p:nvPr/>
+      </p:nvGrpSpPr>
+      <p:grpSpPr>
+        <a:xfrm>
+          <a:off x="0" y="0"/>
+          <a:ext cx="0" cy="0"/>
+          <a:chOff x="0" y="0"/>
+          <a:chExt cx="0" cy="0"/>
+        </a:xfrm>
+      </p:grpSpPr>
+      <p:sp>
+        <p:nvSpPr>
+          <p:cNvPr id="2" name="Slide Image Placeholder 1"/>
+          <p:cNvSpPr>
+            <a:spLocks noGrp="1" noRot="1" noChangeAspect="1"/>
+          </p:cNvSpPr>
+          <p:nvPr>
+            <p:ph type="sldImg"/>
+          </p:nvPr>
+        </p:nvSpPr>
+        <p:spPr/>
+      </p:sp>
+      <p:sp>
+        <p:nvSpPr>
+          <p:cNvPr id="3" name="Notes Placeholder 2"/>
+          <p:cNvSpPr>
+            <a:spLocks noGrp="1"/>
+          </p:cNvSpPr>
+          <p:nvPr>
+            <p:ph type="body" idx="1"/>
+          </p:nvPr>
+        </p:nvSpPr>
+        <p:spPr/>
+        <p:txBody>
+          <a:bodyPr/>
+          <a:lstStyle/>
+          <a:p>
+            <a:endParaRPr lang="en-US" dirty="0"/>
+          </a:p>
+        </p:txBody>
+      </p:sp>
+      <p:sp>
+        <p:nvSpPr>
+          <p:cNvPr id="4" name="Slide Number Placeholder 3"/>
+          <p:cNvSpPr>
+            <a:spLocks noGrp="1"/>
+          </p:cNvSpPr>
+          <p:nvPr>
+            <p:ph type="sldNum" sz="quarter" idx="5"/>
+          </p:nvPr>
+        </p:nvSpPr>
+        <p:spPr/>
+        <p:txBody>
+          <a:bodyPr/>
+          <a:lstStyle/>
+          <a:p>
+            <a:fld id="{71639BF5-02A2-48D1-85F5-565CF7556D54}" type="slidenum">
+              <a:rPr lang="en-US" smtClean="0"/>
+              <a:t>44</a:t>
+            </a:fld>
+            <a:endParaRPr lang="en-US"/>
+          </a:p>
+        </p:txBody>
+      </p:sp>
+    </p:spTree>
+    <p:extLst>
+      <p:ext uri="{BB962C8B-B14F-4D97-AF65-F5344CB8AC3E}">
+        <p14:creationId xmlns:p14="http://schemas.microsoft.com/office/powerpoint/2010/main" val="153224959"/>
       </p:ext>
     </p:extLst>
   </p:cSld>
@@ -3633,7 +4257,13 @@
   <p:cSld>
     <p:spTree>
       <p:nvGrpSpPr>
-        <p:cNvPr id="1" name=""/>
+        <p:cNvPr id="1" name="">
+          <a:extLst>
+            <a:ext uri="{FF2B5EF4-FFF2-40B4-BE49-F238E27FC236}">
+              <a16:creationId xmlns:a16="http://schemas.microsoft.com/office/drawing/2014/main" id="{412B6598-7C23-CAA8-CBE0-52318D8AA749}"/>
+            </a:ext>
+          </a:extLst>
+        </p:cNvPr>
         <p:cNvGrpSpPr/>
         <p:nvPr/>
       </p:nvGrpSpPr>
@@ -3647,7 +4277,13 @@
       </p:grpSpPr>
       <p:sp>
         <p:nvSpPr>
-          <p:cNvPr id="2" name="Slide Image Placeholder 1"/>
+          <p:cNvPr id="2" name="Slide Image Placeholder 1">
+            <a:extLst>
+              <a:ext uri="{FF2B5EF4-FFF2-40B4-BE49-F238E27FC236}">
+                <a16:creationId xmlns:a16="http://schemas.microsoft.com/office/drawing/2014/main" id="{2952352A-A112-7433-1884-C22FF36B5BAF}"/>
+              </a:ext>
+            </a:extLst>
+          </p:cNvPr>
           <p:cNvSpPr>
             <a:spLocks noGrp="1" noRot="1" noChangeAspect="1"/>
           </p:cNvSpPr>
@@ -3659,7 +4295,13 @@
       </p:sp>
       <p:sp>
         <p:nvSpPr>
-          <p:cNvPr id="3" name="Notes Placeholder 2"/>
+          <p:cNvPr id="3" name="Notes Placeholder 2">
+            <a:extLst>
+              <a:ext uri="{FF2B5EF4-FFF2-40B4-BE49-F238E27FC236}">
+                <a16:creationId xmlns:a16="http://schemas.microsoft.com/office/drawing/2014/main" id="{7778158B-6840-F889-A2B7-82DBC29DCBE9}"/>
+              </a:ext>
+            </a:extLst>
+          </p:cNvPr>
           <p:cNvSpPr>
             <a:spLocks noGrp="1"/>
           </p:cNvSpPr>
@@ -3672,22 +4314,24 @@
           <a:bodyPr/>
           <a:lstStyle/>
           <a:p>
-            <a:pPr marL="171450" indent="-171450">
-              <a:buFont typeface="Arial" panose="020B0604020202020204" pitchFamily="34" charset="0"/>
-              <a:buChar char="•"/>
-            </a:pPr>
-            <a:endParaRPr lang="en-US" dirty="0"/>
-          </a:p>
-        </p:txBody>
-      </p:sp>
-      <p:sp>
-        <p:nvSpPr>
-          <p:cNvPr id="4" name="Slide Number Placeholder 3"/>
+            <a:endParaRPr lang="en-CA" dirty="0"/>
+          </a:p>
+        </p:txBody>
+      </p:sp>
+      <p:sp>
+        <p:nvSpPr>
+          <p:cNvPr id="4" name="Slide Number Placeholder 3">
+            <a:extLst>
+              <a:ext uri="{FF2B5EF4-FFF2-40B4-BE49-F238E27FC236}">
+                <a16:creationId xmlns:a16="http://schemas.microsoft.com/office/drawing/2014/main" id="{E909A30B-BBC3-92BF-4C3B-23A025AF518F}"/>
+              </a:ext>
+            </a:extLst>
+          </p:cNvPr>
           <p:cNvSpPr>
             <a:spLocks noGrp="1"/>
           </p:cNvSpPr>
           <p:nvPr>
-            <p:ph type="sldNum" sz="quarter" idx="5"/>
+            <p:ph type="sldNum" sz="quarter" idx="10"/>
           </p:nvPr>
         </p:nvSpPr>
         <p:spPr/>
@@ -3695,9 +4339,9 @@
           <a:bodyPr/>
           <a:lstStyle/>
           <a:p>
-            <a:fld id="{71639BF5-02A2-48D1-85F5-565CF7556D54}" type="slidenum">
-              <a:rPr lang="en-US" smtClean="0"/>
-              <a:t>9</a:t>
+            <a:fld id="{F7021451-1387-4CA6-816F-3879F97B5CBC}" type="slidenum">
+              <a:rPr lang="en-US"/>
+              <a:t>8</a:t>
             </a:fld>
             <a:endParaRPr lang="en-US"/>
           </a:p>
@@ -3706,7 +4350,7 @@
     </p:spTree>
     <p:extLst>
       <p:ext uri="{BB962C8B-B14F-4D97-AF65-F5344CB8AC3E}">
-        <p14:creationId xmlns:p14="http://schemas.microsoft.com/office/powerpoint/2010/main" val="226423751"/>
+        <p14:creationId xmlns:p14="http://schemas.microsoft.com/office/powerpoint/2010/main" val="1846877884"/>
       </p:ext>
     </p:extLst>
   </p:cSld>
@@ -3760,6 +4404,10 @@
           <a:bodyPr/>
           <a:lstStyle/>
           <a:p>
+            <a:pPr marL="171450" indent="-171450">
+              <a:buFont typeface="Arial" panose="020B0604020202020204" pitchFamily="34" charset="0"/>
+              <a:buChar char="•"/>
+            </a:pPr>
             <a:endParaRPr lang="en-US" dirty="0"/>
           </a:p>
         </p:txBody>
@@ -3781,7 +4429,7 @@
           <a:p>
             <a:fld id="{71639BF5-02A2-48D1-85F5-565CF7556D54}" type="slidenum">
               <a:rPr lang="en-US" smtClean="0"/>
-              <a:t>10</a:t>
+              <a:t>9</a:t>
             </a:fld>
             <a:endParaRPr lang="en-US"/>
           </a:p>
@@ -3790,7 +4438,7 @@
     </p:spTree>
     <p:extLst>
       <p:ext uri="{BB962C8B-B14F-4D97-AF65-F5344CB8AC3E}">
-        <p14:creationId xmlns:p14="http://schemas.microsoft.com/office/powerpoint/2010/main" val="2415003512"/>
+        <p14:creationId xmlns:p14="http://schemas.microsoft.com/office/powerpoint/2010/main" val="226423751"/>
       </p:ext>
     </p:extLst>
   </p:cSld>
@@ -3979,7 +4627,7 @@
           <a:p>
             <a:fld id="{5BCAD085-E8A6-8845-BD4E-CB4CCA059FC4}" type="datetimeFigureOut">
               <a:rPr lang="en-US" smtClean="0"/>
-              <a:t>8/29/2026</a:t>
+              <a:t>10/3/2026</a:t>
             </a:fld>
             <a:endParaRPr lang="en-US"/>
           </a:p>
@@ -4147,7 +4795,7 @@
           <a:p>
             <a:fld id="{5BCAD085-E8A6-8845-BD4E-CB4CCA059FC4}" type="datetimeFigureOut">
               <a:rPr lang="en-US" smtClean="0"/>
-              <a:t>8/29/2026</a:t>
+              <a:t>10/3/2026</a:t>
             </a:fld>
             <a:endParaRPr lang="en-US"/>
           </a:p>
@@ -4325,7 +4973,7 @@
           <a:p>
             <a:fld id="{5BCAD085-E8A6-8845-BD4E-CB4CCA059FC4}" type="datetimeFigureOut">
               <a:rPr lang="en-US" smtClean="0"/>
-              <a:t>8/29/2026</a:t>
+              <a:t>10/3/2026</a:t>
             </a:fld>
             <a:endParaRPr lang="en-US"/>
           </a:p>
@@ -4377,6 +5025,164 @@
     <p:extLst>
       <p:ext uri="{BB962C8B-B14F-4D97-AF65-F5344CB8AC3E}">
         <p14:creationId xmlns:p14="http://schemas.microsoft.com/office/powerpoint/2010/main" val="3612223792"/>
+      </p:ext>
+    </p:extLst>
+  </p:cSld>
+  <p:clrMapOvr>
+    <a:masterClrMapping/>
+  </p:clrMapOvr>
+</p:sldLayout>
+</file>
+
+<file path=ppt/slideLayouts/slideLayout12.xml><?xml version="1.0" encoding="utf-8"?>
+<p:sldLayout xmlns:a="http://schemas.openxmlformats.org/drawingml/2006/main" xmlns:r="http://schemas.openxmlformats.org/officeDocument/2006/relationships" xmlns:p="http://schemas.openxmlformats.org/presentationml/2006/main" userDrawn="1">
+  <p:cSld name="SAIT-Purple-Secondary-Title-Slide-Layout">
+    <p:spTree>
+      <p:nvGrpSpPr>
+        <p:cNvPr id="1" name=""/>
+        <p:cNvGrpSpPr/>
+        <p:nvPr/>
+      </p:nvGrpSpPr>
+      <p:grpSpPr>
+        <a:xfrm>
+          <a:off x="0" y="0"/>
+          <a:ext cx="0" cy="0"/>
+          <a:chOff x="0" y="0"/>
+          <a:chExt cx="0" cy="0"/>
+        </a:xfrm>
+      </p:grpSpPr>
+      <p:pic>
+        <p:nvPicPr>
+          <p:cNvPr id="4" name="Picture 3">
+            <a:extLst>
+              <a:ext uri="{FF2B5EF4-FFF2-40B4-BE49-F238E27FC236}">
+                <a16:creationId xmlns:a16="http://schemas.microsoft.com/office/drawing/2014/main" id="{2FE87770-D3D9-4C5C-92CD-924C0A0FC4FE}"/>
+              </a:ext>
+            </a:extLst>
+          </p:cNvPr>
+          <p:cNvPicPr>
+            <a:picLocks noChangeAspect="1"/>
+          </p:cNvPicPr>
+          <p:nvPr userDrawn="1"/>
+        </p:nvPicPr>
+        <p:blipFill>
+          <a:blip r:embed="rId2">
+            <a:extLst>
+              <a:ext uri="{28A0092B-C50C-407E-A947-70E740481C1C}">
+                <a14:useLocalDpi xmlns:a14="http://schemas.microsoft.com/office/drawing/2010/main" val="0"/>
+              </a:ext>
+            </a:extLst>
+          </a:blip>
+          <a:stretch>
+            <a:fillRect/>
+          </a:stretch>
+        </p:blipFill>
+        <p:spPr>
+          <a:xfrm>
+            <a:off x="0" y="0"/>
+            <a:ext cx="12188825" cy="6858000"/>
+          </a:xfrm>
+          <a:prstGeom prst="rect">
+            <a:avLst/>
+          </a:prstGeom>
+        </p:spPr>
+      </p:pic>
+      <p:sp>
+        <p:nvSpPr>
+          <p:cNvPr id="8" name="Text Placeholder 9">
+            <a:extLst>
+              <a:ext uri="{FF2B5EF4-FFF2-40B4-BE49-F238E27FC236}">
+                <a16:creationId xmlns:a16="http://schemas.microsoft.com/office/drawing/2014/main" id="{388B7614-7E88-4C6B-BB37-5515B79672F4}"/>
+              </a:ext>
+            </a:extLst>
+          </p:cNvPr>
+          <p:cNvSpPr>
+            <a:spLocks noGrp="1"/>
+          </p:cNvSpPr>
+          <p:nvPr>
+            <p:ph type="body" sz="quarter" idx="10" hasCustomPrompt="1"/>
+          </p:nvPr>
+        </p:nvSpPr>
+        <p:spPr>
+          <a:xfrm>
+            <a:off x="833749" y="2448100"/>
+            <a:ext cx="7056187" cy="980901"/>
+          </a:xfrm>
+          <a:prstGeom prst="rect">
+            <a:avLst/>
+          </a:prstGeom>
+        </p:spPr>
+        <p:txBody>
+          <a:bodyPr/>
+          <a:lstStyle>
+            <a:lvl1pPr marL="0" indent="0">
+              <a:buNone/>
+              <a:defRPr sz="4399">
+                <a:latin typeface="Titillium" panose="00000500000000000000" pitchFamily="50" charset="0"/>
+                <a:ea typeface="Verdana" panose="020B0604030504040204" pitchFamily="34" charset="0"/>
+                <a:cs typeface="Arial" panose="020B0604020202020204" pitchFamily="34" charset="0"/>
+              </a:defRPr>
+            </a:lvl1pPr>
+          </a:lstStyle>
+          <a:p>
+            <a:pPr lvl="0"/>
+            <a:r>
+              <a:rPr lang="en-US" dirty="0"/>
+              <a:t>Secondary title</a:t>
+            </a:r>
+          </a:p>
+        </p:txBody>
+      </p:sp>
+      <p:sp>
+        <p:nvSpPr>
+          <p:cNvPr id="9" name="Text Placeholder 9">
+            <a:extLst>
+              <a:ext uri="{FF2B5EF4-FFF2-40B4-BE49-F238E27FC236}">
+                <a16:creationId xmlns:a16="http://schemas.microsoft.com/office/drawing/2014/main" id="{864E6C8B-87F6-4C99-AC96-643D30EB235D}"/>
+              </a:ext>
+            </a:extLst>
+          </p:cNvPr>
+          <p:cNvSpPr>
+            <a:spLocks noGrp="1"/>
+          </p:cNvSpPr>
+          <p:nvPr>
+            <p:ph type="body" sz="quarter" idx="11" hasCustomPrompt="1"/>
+          </p:nvPr>
+        </p:nvSpPr>
+        <p:spPr>
+          <a:xfrm>
+            <a:off x="833748" y="3589715"/>
+            <a:ext cx="7056187" cy="980901"/>
+          </a:xfrm>
+          <a:prstGeom prst="rect">
+            <a:avLst/>
+          </a:prstGeom>
+        </p:spPr>
+        <p:txBody>
+          <a:bodyPr/>
+          <a:lstStyle>
+            <a:lvl1pPr marL="0" indent="0">
+              <a:buNone/>
+              <a:defRPr sz="2799">
+                <a:latin typeface="Titillium" panose="00000500000000000000" pitchFamily="50" charset="0"/>
+                <a:ea typeface="Verdana" panose="020B0604030504040204" pitchFamily="34" charset="0"/>
+                <a:cs typeface="Arial" panose="020B0604020202020204" pitchFamily="34" charset="0"/>
+              </a:defRPr>
+            </a:lvl1pPr>
+          </a:lstStyle>
+          <a:p>
+            <a:pPr lvl="0"/>
+            <a:r>
+              <a:rPr lang="en-US" dirty="0"/>
+              <a:t>Sub-title</a:t>
+            </a:r>
+          </a:p>
+        </p:txBody>
+      </p:sp>
+    </p:spTree>
+    <p:extLst>
+      <p:ext uri="{BB962C8B-B14F-4D97-AF65-F5344CB8AC3E}">
+        <p14:creationId xmlns:p14="http://schemas.microsoft.com/office/powerpoint/2010/main" val="2800947176"/>
       </p:ext>
     </p:extLst>
   </p:cSld>
@@ -4493,7 +5299,7 @@
           <a:p>
             <a:fld id="{5BCAD085-E8A6-8845-BD4E-CB4CCA059FC4}" type="datetimeFigureOut">
               <a:rPr lang="en-US" smtClean="0"/>
-              <a:t>8/29/2026</a:t>
+              <a:t>10/3/2026</a:t>
             </a:fld>
             <a:endParaRPr lang="en-US"/>
           </a:p>
@@ -4738,7 +5544,7 @@
           <a:p>
             <a:fld id="{5BCAD085-E8A6-8845-BD4E-CB4CCA059FC4}" type="datetimeFigureOut">
               <a:rPr lang="en-US" smtClean="0"/>
-              <a:t>8/29/2026</a:t>
+              <a:t>10/3/2026</a:t>
             </a:fld>
             <a:endParaRPr lang="en-US"/>
           </a:p>
@@ -5023,7 +5829,7 @@
           <a:p>
             <a:fld id="{5BCAD085-E8A6-8845-BD4E-CB4CCA059FC4}" type="datetimeFigureOut">
               <a:rPr lang="en-US" smtClean="0"/>
-              <a:t>8/29/2026</a:t>
+              <a:t>10/3/2026</a:t>
             </a:fld>
             <a:endParaRPr lang="en-US"/>
           </a:p>
@@ -5442,7 +6248,7 @@
           <a:p>
             <a:fld id="{5BCAD085-E8A6-8845-BD4E-CB4CCA059FC4}" type="datetimeFigureOut">
               <a:rPr lang="en-US" smtClean="0"/>
-              <a:t>8/29/2026</a:t>
+              <a:t>10/3/2026</a:t>
             </a:fld>
             <a:endParaRPr lang="en-US"/>
           </a:p>
@@ -5559,7 +6365,7 @@
           <a:p>
             <a:fld id="{5BCAD085-E8A6-8845-BD4E-CB4CCA059FC4}" type="datetimeFigureOut">
               <a:rPr lang="en-US" smtClean="0"/>
-              <a:t>8/29/2026</a:t>
+              <a:t>10/3/2026</a:t>
             </a:fld>
             <a:endParaRPr lang="en-US"/>
           </a:p>
@@ -5654,7 +6460,7 @@
           <a:p>
             <a:fld id="{5BCAD085-E8A6-8845-BD4E-CB4CCA059FC4}" type="datetimeFigureOut">
               <a:rPr lang="en-US" smtClean="0"/>
-              <a:t>8/29/2026</a:t>
+              <a:t>10/3/2026</a:t>
             </a:fld>
             <a:endParaRPr lang="en-US"/>
           </a:p>
@@ -5965,7 +6771,7 @@
           <a:p>
             <a:fld id="{5BCAD085-E8A6-8845-BD4E-CB4CCA059FC4}" type="datetimeFigureOut">
               <a:rPr lang="en-US" smtClean="0"/>
-              <a:t>8/29/2026</a:t>
+              <a:t>10/3/2026</a:t>
             </a:fld>
             <a:endParaRPr lang="en-US"/>
           </a:p>
@@ -6217,7 +7023,7 @@
           <a:p>
             <a:fld id="{5BCAD085-E8A6-8845-BD4E-CB4CCA059FC4}" type="datetimeFigureOut">
               <a:rPr lang="en-US" smtClean="0"/>
-              <a:t>8/29/2026</a:t>
+              <a:t>10/3/2026</a:t>
             </a:fld>
             <a:endParaRPr lang="en-US"/>
           </a:p>
@@ -6428,7 +7234,7 @@
           <a:p>
             <a:fld id="{5BCAD085-E8A6-8845-BD4E-CB4CCA059FC4}" type="datetimeFigureOut">
               <a:rPr lang="en-US" smtClean="0"/>
-              <a:t>8/29/2026</a:t>
+              <a:t>10/3/2026</a:t>
             </a:fld>
             <a:endParaRPr lang="en-US"/>
           </a:p>
@@ -6532,6 +7338,7 @@
     <p:sldLayoutId id="2147483657" r:id="rId9"/>
     <p:sldLayoutId id="2147483658" r:id="rId10"/>
     <p:sldLayoutId id="2147483659" r:id="rId11"/>
+    <p:sldLayoutId id="2147483660" r:id="rId12"/>
   </p:sldLayoutIdLst>
   <p:txStyles>
     <p:titleStyle>
@@ -7548,8 +8355,8 @@
         </p:nvSpPr>
         <p:spPr>
           <a:xfrm>
-            <a:off x="457200" y="2402691"/>
-            <a:ext cx="5486400" cy="3931920"/>
+            <a:off x="457200" y="2402690"/>
+            <a:ext cx="5486400" cy="4107837"/>
           </a:xfrm>
           <a:prstGeom prst="roundRect">
             <a:avLst/>
@@ -7938,8 +8745,8 @@
         </p:nvSpPr>
         <p:spPr>
           <a:xfrm>
-            <a:off x="6263640" y="2402691"/>
-            <a:ext cx="5486400" cy="3931920"/>
+            <a:off x="6263640" y="2402690"/>
+            <a:ext cx="5486400" cy="4107837"/>
           </a:xfrm>
           <a:prstGeom prst="roundRect">
             <a:avLst/>
@@ -8298,8 +9105,8 @@
         </p:nvSpPr>
         <p:spPr>
           <a:xfrm>
-            <a:off x="10515600" y="6510528"/>
-            <a:ext cx="1280160" cy="274320"/>
+            <a:off x="10515600" y="6582720"/>
+            <a:ext cx="1280160" cy="230832"/>
           </a:xfrm>
           <a:prstGeom prst="rect">
             <a:avLst/>
@@ -8314,9 +9121,9 @@
           <a:p>
             <a:pPr algn="r"/>
             <a:r>
-              <a:rPr sz="900" b="0" i="0">
-                <a:solidFill>
-                  <a:srgbClr val="6B7280"/>
+              <a:rPr sz="900" b="1" i="0" dirty="0">
+                <a:solidFill>
+                  <a:srgbClr val="FFC000"/>
                 </a:solidFill>
               </a:rPr>
               <a:t>11 / 46</a:t>
@@ -9141,10 +9948,18 @@
             <a:r>
               <a:rPr sz="2400" b="1" dirty="0">
                 <a:solidFill>
-                  <a:srgbClr val="111827"/>
-                </a:solidFill>
-              </a:rPr>
-              <a:t>Rule of thumb: if knowing it would let someone cheat or steal, it belongs on the server - not in the app.</a:t>
+                  <a:srgbClr val="FF0000"/>
+                </a:solidFill>
+              </a:rPr>
+              <a:t>Rule of thumb: </a:t>
+            </a:r>
+            <a:r>
+              <a:rPr sz="2400" b="1" dirty="0">
+                <a:solidFill>
+                  <a:srgbClr val="1527D7"/>
+                </a:solidFill>
+              </a:rPr>
+              <a:t>if knowing it would let someone cheat or steal, it belongs on the server - not in the app.</a:t>
             </a:r>
           </a:p>
         </p:txBody>
@@ -9157,8 +9972,8 @@
         </p:nvSpPr>
         <p:spPr>
           <a:xfrm>
-            <a:off x="10515600" y="6510528"/>
-            <a:ext cx="1280160" cy="274320"/>
+            <a:off x="10840454" y="6558656"/>
+            <a:ext cx="1280160" cy="230832"/>
           </a:xfrm>
           <a:prstGeom prst="rect">
             <a:avLst/>
@@ -9173,9 +9988,9 @@
           <a:p>
             <a:pPr algn="r"/>
             <a:r>
-              <a:rPr sz="900" b="0" i="0">
-                <a:solidFill>
-                  <a:srgbClr val="6B7280"/>
+              <a:rPr sz="900" b="1" i="0" dirty="0">
+                <a:solidFill>
+                  <a:srgbClr val="FFC000"/>
                 </a:solidFill>
               </a:rPr>
               <a:t>12 / 46</a:t>
@@ -10765,9 +11580,9 @@
           <a:p>
             <a:pPr algn="r"/>
             <a:r>
-              <a:rPr sz="1100" b="0" i="0">
-                <a:solidFill>
-                  <a:srgbClr val="6B7280"/>
+              <a:rPr sz="1100" b="1" i="0" dirty="0">
+                <a:solidFill>
+                  <a:srgbClr val="FFC000"/>
                 </a:solidFill>
               </a:rPr>
               <a:t>13 / 46</a:t>
@@ -10786,57 +11601,57 @@
 <file path=ppt/slides/slide13.xml><?xml version="1.0" encoding="utf-8"?>
 <p:sld xmlns:a="http://schemas.openxmlformats.org/drawingml/2006/main" xmlns:r="http://schemas.openxmlformats.org/officeDocument/2006/relationships" xmlns:p="http://schemas.openxmlformats.org/presentationml/2006/main">
   <p:cSld>
-    <p:bg>
-      <p:bgPr>
-        <a:solidFill>
-          <a:srgbClr val="2563EB"/>
-        </a:solidFill>
-        <a:effectLst/>
-      </p:bgPr>
-    </p:bg>
     <p:spTree>
       <p:nvGrpSpPr>
-        <p:cNvPr id="1" name=""/>
+        <p:cNvPr id="1" name="">
+          <a:extLst>
+            <a:ext uri="{FF2B5EF4-FFF2-40B4-BE49-F238E27FC236}">
+              <a16:creationId xmlns:a16="http://schemas.microsoft.com/office/drawing/2014/main" id="{F13C68CC-3BB5-6743-95FE-CC87F15D8F19}"/>
+            </a:ext>
+          </a:extLst>
+        </p:cNvPr>
         <p:cNvGrpSpPr/>
         <p:nvPr/>
       </p:nvGrpSpPr>
       <p:grpSpPr>
         <a:xfrm>
           <a:off x="0" y="0"/>
-          <a:ext cx="0" cy="0"/>
+          <a:ext cx="1" cy="1"/>
           <a:chOff x="0" y="0"/>
-          <a:chExt cx="0" cy="0"/>
+          <a:chExt cx="1" cy="1"/>
         </a:xfrm>
       </p:grpSpPr>
       <p:sp>
         <p:nvSpPr>
-          <p:cNvPr id="3" name="TextBox 2"/>
-          <p:cNvSpPr txBox="1"/>
-          <p:nvPr/>
-        </p:nvSpPr>
-        <p:spPr>
-          <a:xfrm>
-            <a:off x="1" y="2100390"/>
-            <a:ext cx="12188824" cy="1015663"/>
-          </a:xfrm>
-          <a:prstGeom prst="rect">
-            <a:avLst/>
-          </a:prstGeom>
-          <a:noFill/>
-        </p:spPr>
-        <p:txBody>
-          <a:bodyPr wrap="square">
-            <a:spAutoFit/>
+          <p:cNvPr id="4" name="Text Placeholder 3">
+            <a:extLst>
+              <a:ext uri="{FF2B5EF4-FFF2-40B4-BE49-F238E27FC236}">
+                <a16:creationId xmlns:a16="http://schemas.microsoft.com/office/drawing/2014/main" id="{56FC02D0-D9A6-4AAA-1ECC-831DF45BF7E8}"/>
+              </a:ext>
+            </a:extLst>
+          </p:cNvPr>
+          <p:cNvSpPr>
+            <a:spLocks noGrp="1"/>
+          </p:cNvSpPr>
+          <p:nvPr>
+            <p:ph type="body" sz="quarter" idx="10"/>
+          </p:nvPr>
+        </p:nvSpPr>
+        <p:spPr>
+          <a:xfrm>
+            <a:off x="833750" y="2448100"/>
+            <a:ext cx="6072018" cy="980901"/>
+          </a:xfrm>
+        </p:spPr>
+        <p:txBody>
+          <a:bodyPr>
+            <a:normAutofit/>
           </a:bodyPr>
           <a:lstStyle/>
           <a:p>
             <a:pPr algn="ctr"/>
             <a:r>
-              <a:rPr sz="6000" b="1" i="0" dirty="0">
-                <a:solidFill>
-                  <a:srgbClr val="FFFFFF"/>
-                </a:solidFill>
-              </a:rPr>
+              <a:rPr lang="en-US" sz="4800" b="1" dirty="0"/>
               <a:t>Architecture Diagrams</a:t>
             </a:r>
           </a:p>
@@ -10844,14 +11659,20 @@
       </p:sp>
       <p:sp>
         <p:nvSpPr>
-          <p:cNvPr id="4" name="TextBox 3"/>
-          <p:cNvSpPr txBox="1"/>
-          <p:nvPr/>
-        </p:nvSpPr>
-        <p:spPr>
-          <a:xfrm>
-            <a:off x="1" y="3380549"/>
-            <a:ext cx="12188824" cy="523220"/>
+          <p:cNvPr id="3" name="TextBox 2">
+            <a:extLst>
+              <a:ext uri="{FF2B5EF4-FFF2-40B4-BE49-F238E27FC236}">
+                <a16:creationId xmlns:a16="http://schemas.microsoft.com/office/drawing/2014/main" id="{325BE340-1F89-98F3-53F3-6F085B59C3FF}"/>
+              </a:ext>
+            </a:extLst>
+          </p:cNvPr>
+          <p:cNvSpPr txBox="1"/>
+          <p:nvPr/>
+        </p:nvSpPr>
+        <p:spPr>
+          <a:xfrm>
+            <a:off x="833748" y="3410831"/>
+            <a:ext cx="6072019" cy="954107"/>
           </a:xfrm>
           <a:prstGeom prst="rect">
             <a:avLst/>
@@ -10866,9 +11687,9 @@
           <a:p>
             <a:pPr algn="ctr"/>
             <a:r>
-              <a:rPr sz="2800" b="0" i="0" dirty="0">
-                <a:solidFill>
-                  <a:srgbClr val="BFDBFF"/>
+              <a:rPr lang="en-US" sz="2800" b="1" dirty="0">
+                <a:solidFill>
+                  <a:srgbClr val="1527D7"/>
                 </a:solidFill>
               </a:rPr>
               <a:t>Part 3 . How to draw what's in your head so others can see it</a:t>
@@ -10877,6 +11698,11 @@
         </p:txBody>
       </p:sp>
     </p:spTree>
+    <p:extLst>
+      <p:ext uri="{BB962C8B-B14F-4D97-AF65-F5344CB8AC3E}">
+        <p14:creationId xmlns:p14="http://schemas.microsoft.com/office/powerpoint/2010/main" val="845481369"/>
+      </p:ext>
+    </p:extLst>
   </p:cSld>
   <p:clrMapOvr>
     <a:masterClrMapping/>
@@ -11717,7 +12543,7 @@
         <p:spPr>
           <a:xfrm>
             <a:off x="10515600" y="6510528"/>
-            <a:ext cx="1280160" cy="274320"/>
+            <a:ext cx="1280160" cy="230832"/>
           </a:xfrm>
           <a:prstGeom prst="rect">
             <a:avLst/>
@@ -11732,9 +12558,9 @@
           <a:p>
             <a:pPr algn="r"/>
             <a:r>
-              <a:rPr sz="900" b="0" i="0">
-                <a:solidFill>
-                  <a:srgbClr val="6B7280"/>
+              <a:rPr sz="900" b="1" i="0" dirty="0">
+                <a:solidFill>
+                  <a:srgbClr val="FFC000"/>
                 </a:solidFill>
               </a:rPr>
               <a:t>15 / 46</a:t>
@@ -12727,7 +13553,7 @@
         <p:spPr>
           <a:xfrm>
             <a:off x="10515600" y="6510528"/>
-            <a:ext cx="1280160" cy="274320"/>
+            <a:ext cx="1280160" cy="230832"/>
           </a:xfrm>
           <a:prstGeom prst="rect">
             <a:avLst/>
@@ -12742,9 +13568,9 @@
           <a:p>
             <a:pPr algn="r"/>
             <a:r>
-              <a:rPr sz="900" b="0" i="0">
-                <a:solidFill>
-                  <a:srgbClr val="6B7280"/>
+              <a:rPr sz="900" b="1" i="0" dirty="0">
+                <a:solidFill>
+                  <a:srgbClr val="FFC000"/>
                 </a:solidFill>
               </a:rPr>
               <a:t>16 / 46</a:t>
@@ -13045,9 +13871,12 @@
           </a:bodyPr>
           <a:lstStyle/>
           <a:p>
-            <a:pPr algn="l"/>
-            <a:r>
-              <a:rPr sz="2200" b="0" i="0">
+            <a:pPr marL="342900" indent="-342900" algn="l">
+              <a:buFont typeface="Arial" panose="020B0604020202020204" pitchFamily="34" charset="0"/>
+              <a:buChar char="•"/>
+            </a:pPr>
+            <a:r>
+              <a:rPr sz="2200" b="0" i="0" dirty="0">
                 <a:solidFill>
                   <a:srgbClr val="111827"/>
                 </a:solidFill>
@@ -13079,9 +13908,12 @@
           </a:bodyPr>
           <a:lstStyle/>
           <a:p>
-            <a:pPr algn="l"/>
-            <a:r>
-              <a:rPr sz="2200" b="0" i="0">
+            <a:pPr marL="342900" indent="-342900" algn="l">
+              <a:buFont typeface="Arial" panose="020B0604020202020204" pitchFamily="34" charset="0"/>
+              <a:buChar char="•"/>
+            </a:pPr>
+            <a:r>
+              <a:rPr sz="2200" b="0" i="0" dirty="0">
                 <a:solidFill>
                   <a:srgbClr val="111827"/>
                 </a:solidFill>
@@ -13113,14 +13945,17 @@
           </a:bodyPr>
           <a:lstStyle/>
           <a:p>
-            <a:pPr algn="l"/>
+            <a:pPr marL="692150" indent="-342900" algn="l">
+              <a:buFont typeface="Arial" panose="020B0604020202020204" pitchFamily="34" charset="0"/>
+              <a:buChar char="•"/>
+            </a:pPr>
             <a:r>
               <a:rPr sz="2200" b="0" i="0" dirty="0">
                 <a:solidFill>
                   <a:srgbClr val="111827"/>
                 </a:solidFill>
               </a:rPr>
-              <a:t>    "Auth service"), not a verb</a:t>
+              <a:t>"Auth service"), not a verb</a:t>
             </a:r>
           </a:p>
         </p:txBody>
@@ -13147,9 +13982,12 @@
           </a:bodyPr>
           <a:lstStyle/>
           <a:p>
-            <a:pPr algn="l"/>
-            <a:r>
-              <a:rPr sz="2200" b="0" i="0">
+            <a:pPr marL="342900" indent="-342900" algn="l">
+              <a:buFont typeface="Arial" panose="020B0604020202020204" pitchFamily="34" charset="0"/>
+              <a:buChar char="•"/>
+            </a:pPr>
+            <a:r>
+              <a:rPr sz="2200" b="0" i="0" dirty="0">
                 <a:solidFill>
                   <a:srgbClr val="111827"/>
                 </a:solidFill>
@@ -13181,9 +14019,12 @@
           </a:bodyPr>
           <a:lstStyle/>
           <a:p>
-            <a:pPr algn="l"/>
-            <a:r>
-              <a:rPr sz="2200" b="0" i="0">
+            <a:pPr marL="342900" indent="-342900" algn="l">
+              <a:buFont typeface="Arial" panose="020B0604020202020204" pitchFamily="34" charset="0"/>
+              <a:buChar char="•"/>
+            </a:pPr>
+            <a:r>
+              <a:rPr sz="2200" b="0" i="0" dirty="0">
                 <a:solidFill>
                   <a:srgbClr val="111827"/>
                 </a:solidFill>
@@ -13215,14 +14056,20 @@
           </a:bodyPr>
           <a:lstStyle/>
           <a:p>
-            <a:pPr algn="l"/>
+            <a:pPr marL="692150" indent="-342900" algn="l">
+              <a:buFont typeface="Arial" panose="020B0604020202020204" pitchFamily="34" charset="0"/>
+              <a:buChar char="•"/>
+              <a:tabLst>
+                <a:tab pos="627063" algn="l"/>
+              </a:tabLst>
+            </a:pPr>
             <a:r>
               <a:rPr sz="2200" b="0" i="0" dirty="0">
                 <a:solidFill>
                   <a:srgbClr val="111827"/>
                 </a:solidFill>
               </a:rPr>
-              <a:t>    to show a layer or a folder</a:t>
+              <a:t>to show a layer or a folder</a:t>
             </a:r>
           </a:p>
         </p:txBody>
@@ -13253,10 +14100,18 @@
             <a:r>
               <a:rPr sz="2200" b="0" i="1" dirty="0">
                 <a:solidFill>
+                  <a:srgbClr val="1527D7"/>
+                </a:solidFill>
+              </a:rPr>
+              <a:t>Keep boxes the same size when they're the same kind of thing - it signals they're peers</a:t>
+            </a:r>
+            <a:r>
+              <a:rPr sz="2200" b="0" i="1" dirty="0">
+                <a:solidFill>
                   <a:srgbClr val="6B7280"/>
                 </a:solidFill>
               </a:rPr>
-              <a:t>Keep boxes the same size when they're the same kind of thing - it signals they're peers.</a:t>
+              <a:t>.</a:t>
             </a:r>
           </a:p>
         </p:txBody>
@@ -13363,9 +14218,12 @@
           </a:bodyPr>
           <a:lstStyle/>
           <a:p>
-            <a:pPr algn="l"/>
-            <a:r>
-              <a:rPr sz="2200" b="0" i="0">
+            <a:pPr marL="342900" indent="-342900" algn="l">
+              <a:buFont typeface="Arial" panose="020B0604020202020204" pitchFamily="34" charset="0"/>
+              <a:buChar char="•"/>
+            </a:pPr>
+            <a:r>
+              <a:rPr sz="2200" b="0" i="0" dirty="0">
                 <a:solidFill>
                   <a:srgbClr val="111827"/>
                 </a:solidFill>
@@ -13397,9 +14255,12 @@
           </a:bodyPr>
           <a:lstStyle/>
           <a:p>
-            <a:pPr algn="l"/>
-            <a:r>
-              <a:rPr sz="2200" b="0" i="0">
+            <a:pPr marL="342900" indent="-342900" algn="l">
+              <a:buFont typeface="Arial" panose="020B0604020202020204" pitchFamily="34" charset="0"/>
+              <a:buChar char="•"/>
+            </a:pPr>
+            <a:r>
+              <a:rPr sz="2200" b="0" i="0" dirty="0">
                 <a:solidFill>
                   <a:srgbClr val="111827"/>
                 </a:solidFill>
@@ -13431,7 +14292,10 @@
           </a:bodyPr>
           <a:lstStyle/>
           <a:p>
-            <a:pPr algn="l"/>
+            <a:pPr marL="342900" indent="-342900" algn="l">
+              <a:buFont typeface="Arial" panose="020B0604020202020204" pitchFamily="34" charset="0"/>
+              <a:buChar char="•"/>
+            </a:pPr>
             <a:r>
               <a:rPr sz="2200" b="0" i="0" dirty="0">
                 <a:solidFill>
@@ -13465,14 +14329,17 @@
           </a:bodyPr>
           <a:lstStyle/>
           <a:p>
-            <a:pPr algn="l"/>
-            <a:r>
-              <a:rPr sz="2200" b="0" i="0">
+            <a:pPr marL="744538" indent="-342900" algn="l">
+              <a:buFont typeface="Arial" panose="020B0604020202020204" pitchFamily="34" charset="0"/>
+              <a:buChar char="•"/>
+            </a:pPr>
+            <a:r>
+              <a:rPr sz="2200" b="0" i="0" dirty="0">
                 <a:solidFill>
                   <a:srgbClr val="111827"/>
                 </a:solidFill>
               </a:rPr>
-              <a:t>    ("course list", "JWT token")</a:t>
+              <a:t>("course list", "JWT token")</a:t>
             </a:r>
           </a:p>
         </p:txBody>
@@ -13499,9 +14366,12 @@
           </a:bodyPr>
           <a:lstStyle/>
           <a:p>
-            <a:pPr algn="l"/>
-            <a:r>
-              <a:rPr sz="2200" b="0" i="0">
+            <a:pPr marL="342900" indent="-342900" algn="l">
+              <a:buFont typeface="Arial" panose="020B0604020202020204" pitchFamily="34" charset="0"/>
+              <a:buChar char="•"/>
+            </a:pPr>
+            <a:r>
+              <a:rPr sz="2200" b="0" i="0" dirty="0">
                 <a:solidFill>
                   <a:srgbClr val="111827"/>
                 </a:solidFill>
@@ -13533,9 +14403,12 @@
           </a:bodyPr>
           <a:lstStyle/>
           <a:p>
-            <a:pPr algn="l"/>
-            <a:r>
-              <a:rPr sz="2200" b="0" i="0">
+            <a:pPr marL="342900" indent="-342900" algn="l">
+              <a:buFont typeface="Arial" panose="020B0604020202020204" pitchFamily="34" charset="0"/>
+              <a:buChar char="•"/>
+            </a:pPr>
+            <a:r>
+              <a:rPr sz="2200" b="0" i="0" dirty="0">
                 <a:solidFill>
                   <a:srgbClr val="111827"/>
                 </a:solidFill>
@@ -13569,9 +14442,9 @@
           <a:p>
             <a:pPr algn="l"/>
             <a:r>
-              <a:rPr sz="2200" b="0" i="1">
-                <a:solidFill>
-                  <a:srgbClr val="6B7280"/>
+              <a:rPr sz="2200" b="0" i="1" dirty="0">
+                <a:solidFill>
+                  <a:srgbClr val="1527D7"/>
                 </a:solidFill>
               </a:rPr>
               <a:t>Fewer arrows is better. Each arrow is a connection you'll have to build and maintain.</a:t>
@@ -13588,7 +14461,7 @@
         <p:spPr>
           <a:xfrm>
             <a:off x="10515600" y="6510528"/>
-            <a:ext cx="1280160" cy="274320"/>
+            <a:ext cx="1280160" cy="230832"/>
           </a:xfrm>
           <a:prstGeom prst="rect">
             <a:avLst/>
@@ -13603,9 +14476,9 @@
           <a:p>
             <a:pPr algn="r"/>
             <a:r>
-              <a:rPr sz="900" b="0" i="0">
-                <a:solidFill>
-                  <a:srgbClr val="6B7280"/>
+              <a:rPr sz="900" b="1" i="0" dirty="0">
+                <a:solidFill>
+                  <a:srgbClr val="FFC000"/>
                 </a:solidFill>
               </a:rPr>
               <a:t>17 / 46</a:t>
@@ -14155,7 +15028,7 @@
                   <a:srgbClr val="FFFFFF"/>
                 </a:solidFill>
               </a:rPr>
-              <a:t>Login (W12)</a:t>
+              <a:t>Login</a:t>
             </a:r>
           </a:p>
         </p:txBody>
@@ -14321,14 +15194,11 @@
               </a:rPr>
               <a:t>useForm</a:t>
             </a:r>
-            <a:r>
-              <a:rPr sz="2400" b="1" i="0" dirty="0">
-                <a:solidFill>
-                  <a:srgbClr val="FFFFFF"/>
-                </a:solidFill>
-              </a:rPr>
-              <a:t> (W8)</a:t>
-            </a:r>
+            <a:endParaRPr sz="2400" b="1" i="0" dirty="0">
+              <a:solidFill>
+                <a:srgbClr val="FFFFFF"/>
+              </a:solidFill>
+            </a:endParaRPr>
           </a:p>
         </p:txBody>
       </p:sp>
@@ -14400,12 +15270,12 @@
           <a:p>
             <a:pPr algn="ctr"/>
             <a:r>
-              <a:rPr sz="2400" b="1" i="0">
+              <a:rPr sz="2400" b="1" i="0" dirty="0">
                 <a:solidFill>
                   <a:srgbClr val="FFFFFF"/>
                 </a:solidFill>
               </a:rPr>
-              <a:t>Auth session (W12)</a:t>
+              <a:t>Auth session</a:t>
             </a:r>
           </a:p>
         </p:txBody>
@@ -14563,14 +15433,11 @@
               </a:rPr>
               <a:t>AsyncStorage</a:t>
             </a:r>
-            <a:r>
-              <a:rPr sz="2400" b="1" i="0" dirty="0">
-                <a:solidFill>
-                  <a:srgbClr val="FFFFFF"/>
-                </a:solidFill>
-              </a:rPr>
-              <a:t> (W9)</a:t>
-            </a:r>
+            <a:endParaRPr sz="2400" b="1" i="0" dirty="0">
+              <a:solidFill>
+                <a:srgbClr val="FFFFFF"/>
+              </a:solidFill>
+            </a:endParaRPr>
           </a:p>
         </p:txBody>
       </p:sp>
@@ -14647,7 +15514,7 @@
                   <a:srgbClr val="FFFFFF"/>
                 </a:solidFill>
               </a:rPr>
-              <a:t>API client / fetch (W10)</a:t>
+              <a:t>API client / fetch</a:t>
             </a:r>
           </a:p>
         </p:txBody>
@@ -14725,7 +15592,7 @@
                   <a:srgbClr val="FFFFFF"/>
                 </a:solidFill>
               </a:rPr>
-              <a:t>Device: camera/GPS (W11)</a:t>
+              <a:t>Device: camera/GPS</a:t>
             </a:r>
           </a:p>
         </p:txBody>
@@ -14889,7 +15756,7 @@
                   <a:srgbClr val="FFFFFF"/>
                 </a:solidFill>
               </a:rPr>
-              <a:t> - Auth + Postgres database + storage (W12-13)</a:t>
+              <a:t> - Auth + Postgres database + storage</a:t>
             </a:r>
           </a:p>
         </p:txBody>
@@ -14903,7 +15770,7 @@
         <p:spPr>
           <a:xfrm>
             <a:off x="10515600" y="6510528"/>
-            <a:ext cx="1280160" cy="274320"/>
+            <a:ext cx="1280160" cy="230832"/>
           </a:xfrm>
           <a:prstGeom prst="rect">
             <a:avLst/>
@@ -14918,9 +15785,9 @@
           <a:p>
             <a:pPr algn="r"/>
             <a:r>
-              <a:rPr sz="900" b="0" i="0">
-                <a:solidFill>
-                  <a:srgbClr val="6B7280"/>
+              <a:rPr sz="900" b="1" i="0" dirty="0">
+                <a:solidFill>
+                  <a:srgbClr val="FFC000"/>
                 </a:solidFill>
               </a:rPr>
               <a:t>18 / 46</a:t>
@@ -16265,8 +17132,8 @@
         </p:nvSpPr>
         <p:spPr>
           <a:xfrm>
-            <a:off x="10515600" y="6510528"/>
-            <a:ext cx="1280160" cy="274320"/>
+            <a:off x="10816388" y="6510528"/>
+            <a:ext cx="1280160" cy="230832"/>
           </a:xfrm>
           <a:prstGeom prst="rect">
             <a:avLst/>
@@ -16281,9 +17148,9 @@
           <a:p>
             <a:pPr algn="r"/>
             <a:r>
-              <a:rPr sz="900" b="0" i="0">
-                <a:solidFill>
-                  <a:srgbClr val="6B7280"/>
+              <a:rPr sz="900" b="1" i="0" dirty="0">
+                <a:solidFill>
+                  <a:srgbClr val="FFC000"/>
                 </a:solidFill>
               </a:rPr>
               <a:t>19 / 46</a:t>
@@ -17769,8 +18636,8 @@
         </p:nvSpPr>
         <p:spPr>
           <a:xfrm>
-            <a:off x="10515600" y="6510528"/>
-            <a:ext cx="1280160" cy="430887"/>
+            <a:off x="10840454" y="6510528"/>
+            <a:ext cx="1280160" cy="276999"/>
           </a:xfrm>
           <a:prstGeom prst="rect">
             <a:avLst/>
@@ -17785,9 +18652,9 @@
           <a:p>
             <a:pPr algn="r"/>
             <a:r>
-              <a:rPr sz="2200" b="0" i="0">
-                <a:solidFill>
-                  <a:srgbClr val="6B7280"/>
+              <a:rPr sz="1200" b="1" i="0" dirty="0">
+                <a:solidFill>
+                  <a:srgbClr val="FFC000"/>
                 </a:solidFill>
               </a:rPr>
               <a:t>20 / 46</a:t>
@@ -18499,7 +19366,7 @@
           <a:p>
             <a:pPr algn="l"/>
             <a:r>
-              <a:rPr sz="2400" b="0" i="0">
+              <a:rPr sz="2400" b="0" i="0" dirty="0">
                 <a:solidFill>
                   <a:srgbClr val="111827"/>
                 </a:solidFill>
@@ -19094,13 +19961,18 @@
           <a:p>
             <a:pPr algn="l"/>
             <a:r>
-              <a:rPr sz="2800" b="1" i="0" dirty="0">
+              <a:rPr lang="en-US" sz="2800" b="1" i="0" dirty="0">
                 <a:solidFill>
                   <a:srgbClr val="111827"/>
                 </a:solidFill>
               </a:rPr>
-              <a:t>Why instructors love it</a:t>
-            </a:r>
+              <a:t>Key Advantages</a:t>
+            </a:r>
+            <a:endParaRPr sz="2800" b="1" i="0" dirty="0">
+              <a:solidFill>
+                <a:srgbClr val="111827"/>
+              </a:solidFill>
+            </a:endParaRPr>
           </a:p>
         </p:txBody>
       </p:sp>
@@ -19513,7 +20385,7 @@
         <p:spPr>
           <a:xfrm>
             <a:off x="10515600" y="6510528"/>
-            <a:ext cx="1280160" cy="274320"/>
+            <a:ext cx="1280160" cy="230832"/>
           </a:xfrm>
           <a:prstGeom prst="rect">
             <a:avLst/>
@@ -19528,9 +20400,9 @@
           <a:p>
             <a:pPr algn="r"/>
             <a:r>
-              <a:rPr sz="900" b="0" i="0">
-                <a:solidFill>
-                  <a:srgbClr val="6B7280"/>
+              <a:rPr sz="900" b="1" i="0" dirty="0">
+                <a:solidFill>
+                  <a:srgbClr val="FFC000"/>
                 </a:solidFill>
               </a:rPr>
               <a:t>21 / 46</a:t>
@@ -20375,7 +21247,7 @@
         <p:spPr>
           <a:xfrm>
             <a:off x="10515600" y="6510528"/>
-            <a:ext cx="1280160" cy="274320"/>
+            <a:ext cx="1280160" cy="230832"/>
           </a:xfrm>
           <a:prstGeom prst="rect">
             <a:avLst/>
@@ -20390,9 +21262,9 @@
           <a:p>
             <a:pPr algn="r"/>
             <a:r>
-              <a:rPr sz="900" b="0" i="0">
-                <a:solidFill>
-                  <a:srgbClr val="6B7280"/>
+              <a:rPr sz="900" b="1" i="0">
+                <a:solidFill>
+                  <a:srgbClr val="FFC000"/>
                 </a:solidFill>
               </a:rPr>
               <a:t>22 / 46</a:t>
@@ -20411,57 +21283,57 @@
 <file path=ppt/slides/slide22.xml><?xml version="1.0" encoding="utf-8"?>
 <p:sld xmlns:a="http://schemas.openxmlformats.org/drawingml/2006/main" xmlns:r="http://schemas.openxmlformats.org/officeDocument/2006/relationships" xmlns:p="http://schemas.openxmlformats.org/presentationml/2006/main">
   <p:cSld>
-    <p:bg>
-      <p:bgPr>
-        <a:solidFill>
-          <a:srgbClr val="2563EB"/>
-        </a:solidFill>
-        <a:effectLst/>
-      </p:bgPr>
-    </p:bg>
     <p:spTree>
       <p:nvGrpSpPr>
-        <p:cNvPr id="1" name=""/>
+        <p:cNvPr id="1" name="">
+          <a:extLst>
+            <a:ext uri="{FF2B5EF4-FFF2-40B4-BE49-F238E27FC236}">
+              <a16:creationId xmlns:a16="http://schemas.microsoft.com/office/drawing/2014/main" id="{DEE16CEE-F111-E7B0-43A6-E6D80F301127}"/>
+            </a:ext>
+          </a:extLst>
+        </p:cNvPr>
         <p:cNvGrpSpPr/>
         <p:nvPr/>
       </p:nvGrpSpPr>
       <p:grpSpPr>
         <a:xfrm>
           <a:off x="0" y="0"/>
-          <a:ext cx="0" cy="0"/>
+          <a:ext cx="1" cy="1"/>
           <a:chOff x="0" y="0"/>
-          <a:chExt cx="0" cy="0"/>
+          <a:chExt cx="1" cy="1"/>
         </a:xfrm>
       </p:grpSpPr>
       <p:sp>
         <p:nvSpPr>
-          <p:cNvPr id="3" name="TextBox 2"/>
-          <p:cNvSpPr txBox="1"/>
-          <p:nvPr/>
-        </p:nvSpPr>
-        <p:spPr>
-          <a:xfrm>
-            <a:off x="1" y="2168625"/>
-            <a:ext cx="12188824" cy="1015663"/>
-          </a:xfrm>
-          <a:prstGeom prst="rect">
-            <a:avLst/>
-          </a:prstGeom>
-          <a:noFill/>
-        </p:spPr>
-        <p:txBody>
-          <a:bodyPr wrap="square">
-            <a:spAutoFit/>
+          <p:cNvPr id="4" name="Text Placeholder 3">
+            <a:extLst>
+              <a:ext uri="{FF2B5EF4-FFF2-40B4-BE49-F238E27FC236}">
+                <a16:creationId xmlns:a16="http://schemas.microsoft.com/office/drawing/2014/main" id="{E17581CD-7FEC-3BB6-6E4C-889644B88301}"/>
+              </a:ext>
+            </a:extLst>
+          </p:cNvPr>
+          <p:cNvSpPr>
+            <a:spLocks noGrp="1"/>
+          </p:cNvSpPr>
+          <p:nvPr>
+            <p:ph type="body" sz="quarter" idx="10"/>
+          </p:nvPr>
+        </p:nvSpPr>
+        <p:spPr>
+          <a:xfrm>
+            <a:off x="833750" y="2448100"/>
+            <a:ext cx="6072018" cy="980901"/>
+          </a:xfrm>
+        </p:spPr>
+        <p:txBody>
+          <a:bodyPr>
+            <a:normAutofit/>
           </a:bodyPr>
           <a:lstStyle/>
           <a:p>
             <a:pPr algn="ctr"/>
             <a:r>
-              <a:rPr sz="6000" b="1" i="0" dirty="0">
-                <a:solidFill>
-                  <a:srgbClr val="FFFFFF"/>
-                </a:solidFill>
-              </a:rPr>
+              <a:rPr lang="en-US" sz="4800" b="1" dirty="0"/>
               <a:t>Choices &amp; Trade-offs</a:t>
             </a:r>
           </a:p>
@@ -20469,14 +21341,20 @@
       </p:sp>
       <p:sp>
         <p:nvSpPr>
-          <p:cNvPr id="4" name="TextBox 3"/>
-          <p:cNvSpPr txBox="1"/>
-          <p:nvPr/>
-        </p:nvSpPr>
-        <p:spPr>
-          <a:xfrm>
-            <a:off x="0" y="3448784"/>
-            <a:ext cx="12188823" cy="523220"/>
+          <p:cNvPr id="3" name="TextBox 2">
+            <a:extLst>
+              <a:ext uri="{FF2B5EF4-FFF2-40B4-BE49-F238E27FC236}">
+                <a16:creationId xmlns:a16="http://schemas.microsoft.com/office/drawing/2014/main" id="{7A98C372-3EC5-AC8A-F6ED-FE9DD92599A4}"/>
+              </a:ext>
+            </a:extLst>
+          </p:cNvPr>
+          <p:cNvSpPr txBox="1"/>
+          <p:nvPr/>
+        </p:nvSpPr>
+        <p:spPr>
+          <a:xfrm>
+            <a:off x="833748" y="3410831"/>
+            <a:ext cx="6072019" cy="954107"/>
           </a:xfrm>
           <a:prstGeom prst="rect">
             <a:avLst/>
@@ -20491,9 +21369,9 @@
           <a:p>
             <a:pPr algn="ctr"/>
             <a:r>
-              <a:rPr sz="2800" b="0" i="0" dirty="0">
-                <a:solidFill>
-                  <a:srgbClr val="BFDBFF"/>
+              <a:rPr lang="en-US" sz="2800" b="1" dirty="0">
+                <a:solidFill>
+                  <a:srgbClr val="1527D7"/>
                 </a:solidFill>
               </a:rPr>
               <a:t>Part 4 . There is no "best" - only the right fit for your context</a:t>
@@ -20502,6 +21380,11 @@
         </p:txBody>
       </p:sp>
     </p:spTree>
+    <p:extLst>
+      <p:ext uri="{BB962C8B-B14F-4D97-AF65-F5344CB8AC3E}">
+        <p14:creationId xmlns:p14="http://schemas.microsoft.com/office/powerpoint/2010/main" val="1309958887"/>
+      </p:ext>
+    </p:extLst>
   </p:cSld>
   <p:clrMapOvr>
     <a:masterClrMapping/>
@@ -20639,7 +21522,10 @@
           </a:bodyPr>
           <a:lstStyle/>
           <a:p>
-            <a:pPr algn="l"/>
+            <a:pPr marL="342900" indent="-342900" algn="l">
+              <a:buFont typeface="Arial" panose="020B0604020202020204" pitchFamily="34" charset="0"/>
+              <a:buChar char="•"/>
+            </a:pPr>
             <a:r>
               <a:rPr sz="2400" b="0" dirty="0"/>
               <a:t>Every architectural choice trades one good thing for another</a:t>
@@ -20713,7 +21599,10 @@
           </a:bodyPr>
           <a:lstStyle/>
           <a:p>
-            <a:pPr algn="l"/>
+            <a:pPr marL="342900" indent="-342900" algn="l">
+              <a:buFont typeface="Arial" panose="020B0604020202020204" pitchFamily="34" charset="0"/>
+              <a:buChar char="•"/>
+            </a:pPr>
             <a:r>
               <a:rPr sz="2400" b="0" i="0" dirty="0">
                 <a:solidFill>
@@ -21499,7 +22388,7 @@
         <p:spPr>
           <a:xfrm>
             <a:off x="10869096" y="6574264"/>
-            <a:ext cx="1280160" cy="274320"/>
+            <a:ext cx="1280160" cy="230832"/>
           </a:xfrm>
           <a:prstGeom prst="rect">
             <a:avLst/>
@@ -21514,9 +22403,9 @@
           <a:p>
             <a:pPr algn="r"/>
             <a:r>
-              <a:rPr sz="900" b="0" i="0" dirty="0">
-                <a:solidFill>
-                  <a:srgbClr val="6B7280"/>
+              <a:rPr sz="900" b="1" i="0" dirty="0">
+                <a:solidFill>
+                  <a:srgbClr val="FFC000"/>
                 </a:solidFill>
               </a:rPr>
               <a:t>24 / 46</a:t>
@@ -22679,7 +23568,7 @@
         <p:spPr>
           <a:xfrm>
             <a:off x="10515600" y="6510528"/>
-            <a:ext cx="1280160" cy="274320"/>
+            <a:ext cx="1280160" cy="230832"/>
           </a:xfrm>
           <a:prstGeom prst="rect">
             <a:avLst/>
@@ -22694,9 +23583,9 @@
           <a:p>
             <a:pPr algn="r"/>
             <a:r>
-              <a:rPr sz="900" b="0" i="0" dirty="0">
-                <a:solidFill>
-                  <a:srgbClr val="6B7280"/>
+              <a:rPr sz="900" b="1" i="0" dirty="0">
+                <a:solidFill>
+                  <a:srgbClr val="FFC000"/>
                 </a:solidFill>
               </a:rPr>
               <a:t>25 / 46</a:t>
@@ -23725,7 +24614,7 @@
         <p:spPr>
           <a:xfrm>
             <a:off x="10515600" y="6510528"/>
-            <a:ext cx="1280160" cy="274320"/>
+            <a:ext cx="1280160" cy="230832"/>
           </a:xfrm>
           <a:prstGeom prst="rect">
             <a:avLst/>
@@ -23740,9 +24629,9 @@
           <a:p>
             <a:pPr algn="r"/>
             <a:r>
-              <a:rPr sz="900" b="0" i="0">
-                <a:solidFill>
-                  <a:srgbClr val="6B7280"/>
+              <a:rPr sz="900" b="1" i="0">
+                <a:solidFill>
+                  <a:srgbClr val="FFC000"/>
                 </a:solidFill>
               </a:rPr>
               <a:t>26 / 46</a:t>
@@ -23761,57 +24650,57 @@
 <file path=ppt/slides/slide26.xml><?xml version="1.0" encoding="utf-8"?>
 <p:sld xmlns:a="http://schemas.openxmlformats.org/drawingml/2006/main" xmlns:r="http://schemas.openxmlformats.org/officeDocument/2006/relationships" xmlns:p="http://schemas.openxmlformats.org/presentationml/2006/main">
   <p:cSld>
-    <p:bg>
-      <p:bgPr>
-        <a:solidFill>
-          <a:srgbClr val="2563EB"/>
-        </a:solidFill>
-        <a:effectLst/>
-      </p:bgPr>
-    </p:bg>
     <p:spTree>
       <p:nvGrpSpPr>
-        <p:cNvPr id="1" name=""/>
+        <p:cNvPr id="1" name="">
+          <a:extLst>
+            <a:ext uri="{FF2B5EF4-FFF2-40B4-BE49-F238E27FC236}">
+              <a16:creationId xmlns:a16="http://schemas.microsoft.com/office/drawing/2014/main" id="{E42CA72C-F873-8B67-8C79-2C7492D87BC1}"/>
+            </a:ext>
+          </a:extLst>
+        </p:cNvPr>
         <p:cNvGrpSpPr/>
         <p:nvPr/>
       </p:nvGrpSpPr>
       <p:grpSpPr>
         <a:xfrm>
           <a:off x="0" y="0"/>
-          <a:ext cx="0" cy="0"/>
+          <a:ext cx="1" cy="1"/>
           <a:chOff x="0" y="0"/>
-          <a:chExt cx="0" cy="0"/>
+          <a:chExt cx="1" cy="1"/>
         </a:xfrm>
       </p:grpSpPr>
       <p:sp>
         <p:nvSpPr>
-          <p:cNvPr id="3" name="TextBox 2"/>
-          <p:cNvSpPr txBox="1"/>
-          <p:nvPr/>
-        </p:nvSpPr>
-        <p:spPr>
-          <a:xfrm>
-            <a:off x="-1" y="2195923"/>
-            <a:ext cx="12188825" cy="1015663"/>
-          </a:xfrm>
-          <a:prstGeom prst="rect">
-            <a:avLst/>
-          </a:prstGeom>
-          <a:noFill/>
-        </p:spPr>
-        <p:txBody>
-          <a:bodyPr wrap="square">
-            <a:spAutoFit/>
+          <p:cNvPr id="4" name="Text Placeholder 3">
+            <a:extLst>
+              <a:ext uri="{FF2B5EF4-FFF2-40B4-BE49-F238E27FC236}">
+                <a16:creationId xmlns:a16="http://schemas.microsoft.com/office/drawing/2014/main" id="{DACD0631-A3A1-D2CC-5A51-8E44524FB72C}"/>
+              </a:ext>
+            </a:extLst>
+          </p:cNvPr>
+          <p:cNvSpPr>
+            <a:spLocks noGrp="1"/>
+          </p:cNvSpPr>
+          <p:nvPr>
+            <p:ph type="body" sz="quarter" idx="10"/>
+          </p:nvPr>
+        </p:nvSpPr>
+        <p:spPr>
+          <a:xfrm>
+            <a:off x="833750" y="2448100"/>
+            <a:ext cx="6072018" cy="980901"/>
+          </a:xfrm>
+        </p:spPr>
+        <p:txBody>
+          <a:bodyPr>
+            <a:normAutofit fontScale="92500"/>
           </a:bodyPr>
           <a:lstStyle/>
           <a:p>
             <a:pPr algn="ctr"/>
             <a:r>
-              <a:rPr sz="6000" b="1" i="0" dirty="0">
-                <a:solidFill>
-                  <a:srgbClr val="FFFFFF"/>
-                </a:solidFill>
-              </a:rPr>
+              <a:rPr lang="en-US" sz="4800" b="1" dirty="0"/>
               <a:t>Where Does Data Live?</a:t>
             </a:r>
           </a:p>
@@ -23819,14 +24708,20 @@
       </p:sp>
       <p:sp>
         <p:nvSpPr>
-          <p:cNvPr id="4" name="TextBox 3"/>
-          <p:cNvSpPr txBox="1"/>
-          <p:nvPr/>
-        </p:nvSpPr>
-        <p:spPr>
-          <a:xfrm>
-            <a:off x="0" y="3476082"/>
-            <a:ext cx="12188824" cy="523220"/>
+          <p:cNvPr id="3" name="TextBox 2">
+            <a:extLst>
+              <a:ext uri="{FF2B5EF4-FFF2-40B4-BE49-F238E27FC236}">
+                <a16:creationId xmlns:a16="http://schemas.microsoft.com/office/drawing/2014/main" id="{EFB6CBD8-0341-50CC-12BF-E9910B13FACD}"/>
+              </a:ext>
+            </a:extLst>
+          </p:cNvPr>
+          <p:cNvSpPr txBox="1"/>
+          <p:nvPr/>
+        </p:nvSpPr>
+        <p:spPr>
+          <a:xfrm>
+            <a:off x="833748" y="3410831"/>
+            <a:ext cx="6072019" cy="954107"/>
           </a:xfrm>
           <a:prstGeom prst="rect">
             <a:avLst/>
@@ -23841,25 +24736,25 @@
           <a:p>
             <a:pPr algn="ctr"/>
             <a:r>
-              <a:rPr sz="2800" b="0" i="0" dirty="0">
-                <a:solidFill>
-                  <a:srgbClr val="BFDBFF"/>
+              <a:rPr lang="en-US" sz="2800" b="1" dirty="0">
+                <a:solidFill>
+                  <a:srgbClr val="1527D7"/>
                 </a:solidFill>
               </a:rPr>
               <a:t>Part 5 . </a:t>
             </a:r>
             <a:r>
-              <a:rPr sz="2800" b="0" i="0" dirty="0" err="1">
-                <a:solidFill>
-                  <a:srgbClr val="BFDBFF"/>
+              <a:rPr lang="en-US" sz="2800" b="1" dirty="0" err="1">
+                <a:solidFill>
+                  <a:srgbClr val="1527D7"/>
                 </a:solidFill>
               </a:rPr>
               <a:t>AsyncStorage</a:t>
             </a:r>
             <a:r>
-              <a:rPr sz="2800" b="0" i="0" dirty="0">
-                <a:solidFill>
-                  <a:srgbClr val="BFDBFF"/>
+              <a:rPr lang="en-US" sz="2800" b="1" dirty="0">
+                <a:solidFill>
+                  <a:srgbClr val="1527D7"/>
                 </a:solidFill>
               </a:rPr>
               <a:t> vs a database - the classic trade-off</a:t>
@@ -23868,6 +24763,11 @@
         </p:txBody>
       </p:sp>
     </p:spTree>
+    <p:extLst>
+      <p:ext uri="{BB962C8B-B14F-4D97-AF65-F5344CB8AC3E}">
+        <p14:creationId xmlns:p14="http://schemas.microsoft.com/office/powerpoint/2010/main" val="2378594349"/>
+      </p:ext>
+    </p:extLst>
   </p:cSld>
   <p:clrMapOvr>
     <a:masterClrMapping/>
@@ -24717,12 +25617,28 @@
           <a:p>
             <a:pPr algn="l"/>
             <a:r>
-              <a:rPr sz="2000" b="0" i="0">
+              <a:rPr sz="2000" b="0" i="0" dirty="0">
                 <a:solidFill>
                   <a:srgbClr val="111827"/>
                 </a:solidFill>
               </a:rPr>
-              <a:t>Theme, login token, small prefs (W9)</a:t>
+              <a:t>Theme, login token, small </a:t>
+            </a:r>
+            <a:r>
+              <a:rPr sz="2000" b="0" i="0" dirty="0" err="1">
+                <a:solidFill>
+                  <a:srgbClr val="111827"/>
+                </a:solidFill>
+              </a:rPr>
+              <a:t>prefs</a:t>
+            </a:r>
+            <a:r>
+              <a:rPr sz="2000" b="0" i="0" dirty="0">
+                <a:solidFill>
+                  <a:srgbClr val="111827"/>
+                </a:solidFill>
+              </a:rPr>
+              <a:t> </a:t>
             </a:r>
           </a:p>
         </p:txBody>
@@ -25345,12 +26261,12 @@
           <a:p>
             <a:pPr algn="l"/>
             <a:r>
-              <a:rPr sz="2000" b="0" i="0">
+              <a:rPr sz="2000" b="0" i="0" dirty="0">
                 <a:solidFill>
                   <a:srgbClr val="111827"/>
                 </a:solidFill>
               </a:rPr>
-              <a:t>Courses, profiles, real app data (W12)</a:t>
+              <a:t>Courses, profiles, real app data</a:t>
             </a:r>
           </a:p>
         </p:txBody>
@@ -25393,7 +26309,7 @@
             </a:r>
             <a:r>
               <a:rPr sz="2400" b="1" dirty="0"/>
-              <a:t> (W9) and a </a:t>
+              <a:t> and a </a:t>
             </a:r>
             <a:r>
               <a:rPr sz="2400" b="1" dirty="0" err="1"/>
@@ -25401,7 +26317,7 @@
             </a:r>
             <a:r>
               <a:rPr sz="2400" b="1" dirty="0"/>
-              <a:t> cloud database (W12).</a:t>
+              <a:t> cloud database.</a:t>
             </a:r>
           </a:p>
         </p:txBody>
@@ -25415,7 +26331,7 @@
         <p:spPr>
           <a:xfrm>
             <a:off x="10515600" y="6510528"/>
-            <a:ext cx="1280160" cy="274320"/>
+            <a:ext cx="1280160" cy="230832"/>
           </a:xfrm>
           <a:prstGeom prst="rect">
             <a:avLst/>
@@ -25430,9 +26346,9 @@
           <a:p>
             <a:pPr algn="r"/>
             <a:r>
-              <a:rPr sz="900" b="0" i="0">
-                <a:solidFill>
-                  <a:srgbClr val="6B7280"/>
+              <a:rPr sz="900" b="1" i="0" dirty="0">
+                <a:solidFill>
+                  <a:srgbClr val="FFC000"/>
                 </a:solidFill>
               </a:rPr>
               <a:t>28 / 46</a:t>
@@ -25869,7 +26785,7 @@
         </p:nvSpPr>
         <p:spPr>
           <a:xfrm>
-            <a:off x="6387153" y="2243011"/>
+            <a:off x="6387153" y="1966559"/>
             <a:ext cx="5677468" cy="523220"/>
           </a:xfrm>
           <a:prstGeom prst="rect">
@@ -25903,7 +26819,7 @@
         </p:nvSpPr>
         <p:spPr>
           <a:xfrm>
-            <a:off x="6387153" y="2722732"/>
+            <a:off x="6387153" y="2499439"/>
             <a:ext cx="5426895" cy="384048"/>
           </a:xfrm>
           <a:prstGeom prst="roundRect">
@@ -25949,7 +26865,7 @@
         </p:nvSpPr>
         <p:spPr>
           <a:xfrm>
-            <a:off x="6534841" y="2768452"/>
+            <a:off x="6534841" y="2449462"/>
             <a:ext cx="5373318" cy="430887"/>
           </a:xfrm>
           <a:prstGeom prst="rect">
@@ -25983,7 +26899,7 @@
         </p:nvSpPr>
         <p:spPr>
           <a:xfrm>
-            <a:off x="6387153" y="3179932"/>
+            <a:off x="6387153" y="3126767"/>
             <a:ext cx="5426895" cy="384048"/>
           </a:xfrm>
           <a:prstGeom prst="roundRect">
@@ -26029,7 +26945,7 @@
         </p:nvSpPr>
         <p:spPr>
           <a:xfrm>
-            <a:off x="6534841" y="3225652"/>
+            <a:off x="6534841" y="3087423"/>
             <a:ext cx="5373318" cy="430887"/>
           </a:xfrm>
           <a:prstGeom prst="rect">
@@ -26045,7 +26961,7 @@
           <a:p>
             <a:pPr algn="l"/>
             <a:r>
-              <a:rPr sz="2200" b="0" i="0">
+              <a:rPr sz="2200" b="0" i="0" dirty="0">
                 <a:solidFill>
                   <a:srgbClr val="111827"/>
                 </a:solidFill>
@@ -26063,7 +26979,7 @@
         </p:nvSpPr>
         <p:spPr>
           <a:xfrm>
-            <a:off x="6387153" y="3637132"/>
+            <a:off x="6387153" y="3743462"/>
             <a:ext cx="5426895" cy="384048"/>
           </a:xfrm>
           <a:prstGeom prst="roundRect">
@@ -26109,7 +27025,7 @@
         </p:nvSpPr>
         <p:spPr>
           <a:xfrm>
-            <a:off x="6534841" y="3682852"/>
+            <a:off x="6534841" y="3714751"/>
             <a:ext cx="5373318" cy="430887"/>
           </a:xfrm>
           <a:prstGeom prst="rect">
@@ -26125,12 +27041,28 @@
           <a:p>
             <a:pPr algn="l"/>
             <a:r>
-              <a:rPr sz="2200" b="0" i="0">
+              <a:rPr sz="2200" b="0" i="0" dirty="0">
                 <a:solidFill>
                   <a:srgbClr val="111827"/>
                 </a:solidFill>
               </a:rPr>
-              <a:t>+  It's simple: prefs, flags, a token, a cache</a:t>
+              <a:t>+  It's simple: </a:t>
+            </a:r>
+            <a:r>
+              <a:rPr sz="2200" b="0" i="0" dirty="0" err="1">
+                <a:solidFill>
+                  <a:srgbClr val="111827"/>
+                </a:solidFill>
+              </a:rPr>
+              <a:t>prefs</a:t>
+            </a:r>
+            <a:r>
+              <a:rPr sz="2200" b="0" i="0" dirty="0">
+                <a:solidFill>
+                  <a:srgbClr val="111827"/>
+                </a:solidFill>
+              </a:rPr>
+              <a:t>, flags, a token, a cache</a:t>
             </a:r>
           </a:p>
         </p:txBody>
@@ -26143,7 +27075,7 @@
         </p:nvSpPr>
         <p:spPr>
           <a:xfrm>
-            <a:off x="6387153" y="4094332"/>
+            <a:off x="6387153" y="4349521"/>
             <a:ext cx="5426895" cy="384048"/>
           </a:xfrm>
           <a:prstGeom prst="roundRect">
@@ -26189,7 +27121,7 @@
         </p:nvSpPr>
         <p:spPr>
           <a:xfrm>
-            <a:off x="6534841" y="4140052"/>
+            <a:off x="6534841" y="4320810"/>
             <a:ext cx="5373318" cy="430887"/>
           </a:xfrm>
           <a:prstGeom prst="rect">
@@ -26205,7 +27137,7 @@
           <a:p>
             <a:pPr algn="l"/>
             <a:r>
-              <a:rPr sz="2200" b="0" i="0">
+              <a:rPr sz="2200" b="0" i="0" dirty="0">
                 <a:solidFill>
                   <a:srgbClr val="111827"/>
                 </a:solidFill>
@@ -26223,7 +27155,7 @@
         </p:nvSpPr>
         <p:spPr>
           <a:xfrm>
-            <a:off x="6387153" y="4551532"/>
+            <a:off x="6387153" y="4913045"/>
             <a:ext cx="5426895" cy="384048"/>
           </a:xfrm>
           <a:prstGeom prst="roundRect">
@@ -26269,7 +27201,7 @@
         </p:nvSpPr>
         <p:spPr>
           <a:xfrm>
-            <a:off x="6534841" y="4597252"/>
+            <a:off x="6534841" y="4884333"/>
             <a:ext cx="5373318" cy="430887"/>
           </a:xfrm>
           <a:prstGeom prst="rect">
@@ -26285,7 +27217,7 @@
           <a:p>
             <a:pPr algn="l"/>
             <a:r>
-              <a:rPr sz="2200" b="0" i="0">
+              <a:rPr sz="2200" b="0" i="0" dirty="0">
                 <a:solidFill>
                   <a:srgbClr val="111827"/>
                 </a:solidFill>
@@ -26423,7 +27355,7 @@
         <p:spPr>
           <a:xfrm>
             <a:off x="10515600" y="6510528"/>
-            <a:ext cx="1280160" cy="274320"/>
+            <a:ext cx="1280160" cy="230832"/>
           </a:xfrm>
           <a:prstGeom prst="rect">
             <a:avLst/>
@@ -26438,9 +27370,9 @@
           <a:p>
             <a:pPr algn="r"/>
             <a:r>
-              <a:rPr sz="900" b="0" i="0">
-                <a:solidFill>
-                  <a:srgbClr val="6B7280"/>
+              <a:rPr sz="900" b="1" i="0" dirty="0">
+                <a:solidFill>
+                  <a:srgbClr val="FFC000"/>
                 </a:solidFill>
               </a:rPr>
               <a:t>29 / 46</a:t>
@@ -26849,7 +27781,7 @@
         </p:nvSpPr>
         <p:spPr>
           <a:xfrm>
-            <a:off x="6501792" y="2051942"/>
+            <a:off x="6501792" y="1701060"/>
             <a:ext cx="5120640" cy="461665"/>
           </a:xfrm>
           <a:prstGeom prst="rect">
@@ -26883,7 +27815,7 @@
         </p:nvSpPr>
         <p:spPr>
           <a:xfrm>
-            <a:off x="6501792" y="2463423"/>
+            <a:off x="6501792" y="2112541"/>
             <a:ext cx="5120640" cy="384048"/>
           </a:xfrm>
           <a:prstGeom prst="roundRect">
@@ -26929,7 +27861,7 @@
         </p:nvSpPr>
         <p:spPr>
           <a:xfrm>
-            <a:off x="6638952" y="2509143"/>
+            <a:off x="6638952" y="2158261"/>
             <a:ext cx="4846320" cy="400110"/>
           </a:xfrm>
           <a:prstGeom prst="rect">
@@ -26963,7 +27895,7 @@
         </p:nvSpPr>
         <p:spPr>
           <a:xfrm>
-            <a:off x="6501792" y="2920623"/>
+            <a:off x="6501792" y="2697334"/>
             <a:ext cx="5120640" cy="384048"/>
           </a:xfrm>
           <a:prstGeom prst="roundRect">
@@ -27009,7 +27941,7 @@
         </p:nvSpPr>
         <p:spPr>
           <a:xfrm>
-            <a:off x="6638952" y="2966343"/>
+            <a:off x="6638952" y="2743054"/>
             <a:ext cx="4846320" cy="400110"/>
           </a:xfrm>
           <a:prstGeom prst="rect">
@@ -27043,7 +27975,7 @@
         </p:nvSpPr>
         <p:spPr>
           <a:xfrm>
-            <a:off x="6501792" y="3377823"/>
+            <a:off x="6501792" y="3345924"/>
             <a:ext cx="5120640" cy="384048"/>
           </a:xfrm>
           <a:prstGeom prst="roundRect">
@@ -27089,7 +28021,7 @@
         </p:nvSpPr>
         <p:spPr>
           <a:xfrm>
-            <a:off x="6638952" y="3423543"/>
+            <a:off x="6638952" y="3391644"/>
             <a:ext cx="4846320" cy="400110"/>
           </a:xfrm>
           <a:prstGeom prst="rect">
@@ -27123,7 +28055,7 @@
         </p:nvSpPr>
         <p:spPr>
           <a:xfrm>
-            <a:off x="6501792" y="3835023"/>
+            <a:off x="6501792" y="4015776"/>
             <a:ext cx="5120640" cy="384048"/>
           </a:xfrm>
           <a:prstGeom prst="roundRect">
@@ -27169,7 +28101,7 @@
         </p:nvSpPr>
         <p:spPr>
           <a:xfrm>
-            <a:off x="6638952" y="3880743"/>
+            <a:off x="6638952" y="4061496"/>
             <a:ext cx="4846320" cy="400110"/>
           </a:xfrm>
           <a:prstGeom prst="rect">
@@ -27203,7 +28135,7 @@
         </p:nvSpPr>
         <p:spPr>
           <a:xfrm>
-            <a:off x="6501792" y="4292223"/>
+            <a:off x="6501792" y="4653733"/>
             <a:ext cx="5120640" cy="384048"/>
           </a:xfrm>
           <a:prstGeom prst="roundRect">
@@ -27249,7 +28181,7 @@
         </p:nvSpPr>
         <p:spPr>
           <a:xfrm>
-            <a:off x="6638952" y="4337943"/>
+            <a:off x="6638952" y="4699453"/>
             <a:ext cx="4846320" cy="400110"/>
           </a:xfrm>
           <a:prstGeom prst="rect">
@@ -27384,7 +28316,7 @@
         <p:spPr>
           <a:xfrm>
             <a:off x="10515600" y="6510528"/>
-            <a:ext cx="1280160" cy="274320"/>
+            <a:ext cx="1280160" cy="230832"/>
           </a:xfrm>
           <a:prstGeom prst="rect">
             <a:avLst/>
@@ -27399,9 +28331,9 @@
           <a:p>
             <a:pPr algn="r"/>
             <a:r>
-              <a:rPr sz="900" b="0" i="0">
-                <a:solidFill>
-                  <a:srgbClr val="6B7280"/>
+              <a:rPr sz="900" b="1" i="0" dirty="0">
+                <a:solidFill>
+                  <a:srgbClr val="FFC000"/>
                 </a:solidFill>
               </a:rPr>
               <a:t>30 / 46</a:t>
@@ -30238,7 +31170,7 @@
         <p:spPr>
           <a:xfrm>
             <a:off x="10515600" y="6510528"/>
-            <a:ext cx="1280160" cy="274320"/>
+            <a:ext cx="1280160" cy="230832"/>
           </a:xfrm>
           <a:prstGeom prst="rect">
             <a:avLst/>
@@ -30253,9 +31185,9 @@
           <a:p>
             <a:pPr algn="r"/>
             <a:r>
-              <a:rPr sz="900" b="0" i="0">
-                <a:solidFill>
-                  <a:srgbClr val="6B7280"/>
+              <a:rPr sz="900" b="1" i="0" dirty="0">
+                <a:solidFill>
+                  <a:srgbClr val="FFC000"/>
                 </a:solidFill>
               </a:rPr>
               <a:t>31 / 46</a:t>
@@ -31602,7 +32534,7 @@
         <p:spPr>
           <a:xfrm>
             <a:off x="10515600" y="6510528"/>
-            <a:ext cx="1280160" cy="274320"/>
+            <a:ext cx="1280160" cy="230832"/>
           </a:xfrm>
           <a:prstGeom prst="rect">
             <a:avLst/>
@@ -31617,9 +32549,9 @@
           <a:p>
             <a:pPr algn="r"/>
             <a:r>
-              <a:rPr sz="900" b="0" i="0">
-                <a:solidFill>
-                  <a:srgbClr val="6B7280"/>
+              <a:rPr sz="900" b="1" i="0" dirty="0">
+                <a:solidFill>
+                  <a:srgbClr val="FFC000"/>
                 </a:solidFill>
               </a:rPr>
               <a:t>32 / 46</a:t>
@@ -31638,57 +32570,57 @@
 <file path=ppt/slides/slide32.xml><?xml version="1.0" encoding="utf-8"?>
 <p:sld xmlns:a="http://schemas.openxmlformats.org/drawingml/2006/main" xmlns:r="http://schemas.openxmlformats.org/officeDocument/2006/relationships" xmlns:p="http://schemas.openxmlformats.org/presentationml/2006/main">
   <p:cSld>
-    <p:bg>
-      <p:bgPr>
-        <a:solidFill>
-          <a:srgbClr val="2563EB"/>
-        </a:solidFill>
-        <a:effectLst/>
-      </p:bgPr>
-    </p:bg>
     <p:spTree>
       <p:nvGrpSpPr>
-        <p:cNvPr id="1" name=""/>
+        <p:cNvPr id="1" name="">
+          <a:extLst>
+            <a:ext uri="{FF2B5EF4-FFF2-40B4-BE49-F238E27FC236}">
+              <a16:creationId xmlns:a16="http://schemas.microsoft.com/office/drawing/2014/main" id="{62E2F735-27E8-EA1A-8018-551256B63537}"/>
+            </a:ext>
+          </a:extLst>
+        </p:cNvPr>
         <p:cNvGrpSpPr/>
         <p:nvPr/>
       </p:nvGrpSpPr>
       <p:grpSpPr>
         <a:xfrm>
           <a:off x="0" y="0"/>
-          <a:ext cx="0" cy="0"/>
+          <a:ext cx="1" cy="1"/>
           <a:chOff x="0" y="0"/>
-          <a:chExt cx="0" cy="0"/>
+          <a:chExt cx="1" cy="1"/>
         </a:xfrm>
       </p:grpSpPr>
       <p:sp>
         <p:nvSpPr>
-          <p:cNvPr id="3" name="TextBox 2"/>
-          <p:cNvSpPr txBox="1"/>
-          <p:nvPr/>
-        </p:nvSpPr>
-        <p:spPr>
-          <a:xfrm>
-            <a:off x="0" y="2346048"/>
-            <a:ext cx="12188824" cy="1015663"/>
-          </a:xfrm>
-          <a:prstGeom prst="rect">
-            <a:avLst/>
-          </a:prstGeom>
-          <a:noFill/>
-        </p:spPr>
-        <p:txBody>
-          <a:bodyPr wrap="square">
-            <a:spAutoFit/>
+          <p:cNvPr id="4" name="Text Placeholder 3">
+            <a:extLst>
+              <a:ext uri="{FF2B5EF4-FFF2-40B4-BE49-F238E27FC236}">
+                <a16:creationId xmlns:a16="http://schemas.microsoft.com/office/drawing/2014/main" id="{F95AA22E-46D5-4B0C-CBD8-9579C3EEBCF2}"/>
+              </a:ext>
+            </a:extLst>
+          </p:cNvPr>
+          <p:cNvSpPr>
+            <a:spLocks noGrp="1"/>
+          </p:cNvSpPr>
+          <p:nvPr>
+            <p:ph type="body" sz="quarter" idx="10"/>
+          </p:nvPr>
+        </p:nvSpPr>
+        <p:spPr>
+          <a:xfrm>
+            <a:off x="833750" y="2448100"/>
+            <a:ext cx="6072018" cy="980901"/>
+          </a:xfrm>
+        </p:spPr>
+        <p:txBody>
+          <a:bodyPr>
+            <a:normAutofit/>
           </a:bodyPr>
           <a:lstStyle/>
           <a:p>
             <a:pPr algn="ctr"/>
             <a:r>
-              <a:rPr sz="6000" b="1" i="0" dirty="0">
-                <a:solidFill>
-                  <a:srgbClr val="FFFFFF"/>
-                </a:solidFill>
-              </a:rPr>
+              <a:rPr lang="en-US" sz="4800" b="1" dirty="0"/>
               <a:t>Talking to a Server</a:t>
             </a:r>
           </a:p>
@@ -31696,14 +32628,20 @@
       </p:sp>
       <p:sp>
         <p:nvSpPr>
-          <p:cNvPr id="4" name="TextBox 3"/>
-          <p:cNvSpPr txBox="1"/>
-          <p:nvPr/>
-        </p:nvSpPr>
-        <p:spPr>
-          <a:xfrm>
-            <a:off x="-1" y="3626207"/>
-            <a:ext cx="12188825" cy="523220"/>
+          <p:cNvPr id="3" name="TextBox 2">
+            <a:extLst>
+              <a:ext uri="{FF2B5EF4-FFF2-40B4-BE49-F238E27FC236}">
+                <a16:creationId xmlns:a16="http://schemas.microsoft.com/office/drawing/2014/main" id="{123D5BE2-28FA-1A89-C1AE-5E1BF3E15623}"/>
+              </a:ext>
+            </a:extLst>
+          </p:cNvPr>
+          <p:cNvSpPr txBox="1"/>
+          <p:nvPr/>
+        </p:nvSpPr>
+        <p:spPr>
+          <a:xfrm>
+            <a:off x="833748" y="3410831"/>
+            <a:ext cx="6072020" cy="954107"/>
           </a:xfrm>
           <a:prstGeom prst="rect">
             <a:avLst/>
@@ -31718,9 +32656,9 @@
           <a:p>
             <a:pPr algn="ctr"/>
             <a:r>
-              <a:rPr sz="2800" b="0" i="0" dirty="0">
-                <a:solidFill>
-                  <a:srgbClr val="BFDBFF"/>
+              <a:rPr lang="en-US" sz="2800" b="1" dirty="0">
+                <a:solidFill>
+                  <a:srgbClr val="1527D7"/>
                 </a:solidFill>
               </a:rPr>
               <a:t>Part 6 . API calls - how the app asks for data over the network</a:t>
@@ -31729,6 +32667,11 @@
         </p:txBody>
       </p:sp>
     </p:spTree>
+    <p:extLst>
+      <p:ext uri="{BB962C8B-B14F-4D97-AF65-F5344CB8AC3E}">
+        <p14:creationId xmlns:p14="http://schemas.microsoft.com/office/powerpoint/2010/main" val="3307553653"/>
+      </p:ext>
+    </p:extLst>
   </p:cSld>
   <p:clrMapOvr>
     <a:masterClrMapping/>
@@ -32803,7 +33746,7 @@
         <p:spPr>
           <a:xfrm>
             <a:off x="10515600" y="6510528"/>
-            <a:ext cx="1280160" cy="274320"/>
+            <a:ext cx="1280160" cy="230832"/>
           </a:xfrm>
           <a:prstGeom prst="rect">
             <a:avLst/>
@@ -32818,9 +33761,9 @@
           <a:p>
             <a:pPr algn="r"/>
             <a:r>
-              <a:rPr sz="900" b="0" i="0">
-                <a:solidFill>
-                  <a:srgbClr val="6B7280"/>
+              <a:rPr sz="900" b="1" i="0" dirty="0">
+                <a:solidFill>
+                  <a:srgbClr val="FFC000"/>
                 </a:solidFill>
               </a:rPr>
               <a:t>34 / 46</a:t>
@@ -34008,7 +34951,7 @@
         <p:spPr>
           <a:xfrm>
             <a:off x="10515600" y="6510528"/>
-            <a:ext cx="1280160" cy="274320"/>
+            <a:ext cx="1280160" cy="230832"/>
           </a:xfrm>
           <a:prstGeom prst="rect">
             <a:avLst/>
@@ -34023,9 +34966,9 @@
           <a:p>
             <a:pPr algn="r"/>
             <a:r>
-              <a:rPr sz="900" b="0" i="0">
-                <a:solidFill>
-                  <a:srgbClr val="6B7280"/>
+              <a:rPr sz="900" b="1" i="0" dirty="0">
+                <a:solidFill>
+                  <a:srgbClr val="FFC000"/>
                 </a:solidFill>
               </a:rPr>
               <a:t>35 / 46</a:t>
@@ -34193,7 +35136,15 @@
             </a:pPr>
             <a:r>
               <a:rPr sz="2800" dirty="0"/>
-              <a:t>The shape you'll write in Week 10 - handling all the states</a:t>
+              <a:t>The shape you'll write </a:t>
+            </a:r>
+            <a:r>
+              <a:rPr lang="en-US" sz="2800" dirty="0"/>
+              <a:t>later</a:t>
+            </a:r>
+            <a:r>
+              <a:rPr sz="2800" dirty="0"/>
+              <a:t> - handling all the states</a:t>
             </a:r>
           </a:p>
         </p:txBody>
@@ -35323,7 +36274,7 @@
         <p:spPr>
           <a:xfrm>
             <a:off x="10515600" y="6510528"/>
-            <a:ext cx="1280160" cy="274320"/>
+            <a:ext cx="1280160" cy="230832"/>
           </a:xfrm>
           <a:prstGeom prst="rect">
             <a:avLst/>
@@ -35338,9 +36289,9 @@
           <a:p>
             <a:pPr algn="r"/>
             <a:r>
-              <a:rPr sz="900" b="0" i="0">
-                <a:solidFill>
-                  <a:srgbClr val="6B7280"/>
+              <a:rPr sz="900" b="1" i="0" dirty="0">
+                <a:solidFill>
+                  <a:srgbClr val="FFC000"/>
                 </a:solidFill>
               </a:rPr>
               <a:t>36 / 46</a:t>
@@ -36261,7 +37212,7 @@
         <p:spPr>
           <a:xfrm>
             <a:off x="10515600" y="6510528"/>
-            <a:ext cx="1280160" cy="274320"/>
+            <a:ext cx="1280160" cy="230832"/>
           </a:xfrm>
           <a:prstGeom prst="rect">
             <a:avLst/>
@@ -36276,9 +37227,9 @@
           <a:p>
             <a:pPr algn="r"/>
             <a:r>
-              <a:rPr sz="900" b="0" i="0">
-                <a:solidFill>
-                  <a:srgbClr val="6B7280"/>
+              <a:rPr sz="900" b="1" i="0" dirty="0">
+                <a:solidFill>
+                  <a:srgbClr val="FFC000"/>
                 </a:solidFill>
               </a:rPr>
               <a:t>37 / 46</a:t>
@@ -36297,57 +37248,57 @@
 <file path=ppt/slides/slide37.xml><?xml version="1.0" encoding="utf-8"?>
 <p:sld xmlns:a="http://schemas.openxmlformats.org/drawingml/2006/main" xmlns:r="http://schemas.openxmlformats.org/officeDocument/2006/relationships" xmlns:p="http://schemas.openxmlformats.org/presentationml/2006/main">
   <p:cSld>
-    <p:bg>
-      <p:bgPr>
-        <a:solidFill>
-          <a:srgbClr val="2563EB"/>
-        </a:solidFill>
-        <a:effectLst/>
-      </p:bgPr>
-    </p:bg>
     <p:spTree>
       <p:nvGrpSpPr>
-        <p:cNvPr id="1" name=""/>
+        <p:cNvPr id="1" name="">
+          <a:extLst>
+            <a:ext uri="{FF2B5EF4-FFF2-40B4-BE49-F238E27FC236}">
+              <a16:creationId xmlns:a16="http://schemas.microsoft.com/office/drawing/2014/main" id="{F1606007-3518-4F6D-357C-C257CB0AA8ED}"/>
+            </a:ext>
+          </a:extLst>
+        </p:cNvPr>
         <p:cNvGrpSpPr/>
         <p:nvPr/>
       </p:nvGrpSpPr>
       <p:grpSpPr>
         <a:xfrm>
           <a:off x="0" y="0"/>
-          <a:ext cx="0" cy="0"/>
+          <a:ext cx="1" cy="1"/>
           <a:chOff x="0" y="0"/>
-          <a:chExt cx="0" cy="0"/>
+          <a:chExt cx="1" cy="1"/>
         </a:xfrm>
       </p:grpSpPr>
       <p:sp>
         <p:nvSpPr>
-          <p:cNvPr id="3" name="TextBox 2"/>
-          <p:cNvSpPr txBox="1"/>
-          <p:nvPr/>
-        </p:nvSpPr>
-        <p:spPr>
-          <a:xfrm>
-            <a:off x="-1" y="2223216"/>
-            <a:ext cx="12188825" cy="1015663"/>
-          </a:xfrm>
-          <a:prstGeom prst="rect">
-            <a:avLst/>
-          </a:prstGeom>
-          <a:noFill/>
-        </p:spPr>
-        <p:txBody>
-          <a:bodyPr wrap="square">
-            <a:spAutoFit/>
+          <p:cNvPr id="4" name="Text Placeholder 3">
+            <a:extLst>
+              <a:ext uri="{FF2B5EF4-FFF2-40B4-BE49-F238E27FC236}">
+                <a16:creationId xmlns:a16="http://schemas.microsoft.com/office/drawing/2014/main" id="{E51DC413-3375-F152-4F70-36A4532184BE}"/>
+              </a:ext>
+            </a:extLst>
+          </p:cNvPr>
+          <p:cNvSpPr>
+            <a:spLocks noGrp="1"/>
+          </p:cNvSpPr>
+          <p:nvPr>
+            <p:ph type="body" sz="quarter" idx="10"/>
+          </p:nvPr>
+        </p:nvSpPr>
+        <p:spPr>
+          <a:xfrm>
+            <a:off x="833750" y="2448100"/>
+            <a:ext cx="6072018" cy="980901"/>
+          </a:xfrm>
+        </p:spPr>
+        <p:txBody>
+          <a:bodyPr>
+            <a:normAutofit fontScale="85000" lnSpcReduction="10000"/>
           </a:bodyPr>
           <a:lstStyle/>
           <a:p>
             <a:pPr algn="ctr"/>
             <a:r>
-              <a:rPr sz="6000" b="1" i="0" dirty="0">
-                <a:solidFill>
-                  <a:srgbClr val="FFFFFF"/>
-                </a:solidFill>
-              </a:rPr>
+              <a:rPr lang="en-US" sz="4800" b="1" dirty="0"/>
               <a:t>Authentication &amp; Security</a:t>
             </a:r>
           </a:p>
@@ -36355,14 +37306,20 @@
       </p:sp>
       <p:sp>
         <p:nvSpPr>
-          <p:cNvPr id="4" name="TextBox 3"/>
-          <p:cNvSpPr txBox="1"/>
-          <p:nvPr/>
-        </p:nvSpPr>
-        <p:spPr>
-          <a:xfrm>
-            <a:off x="0" y="3503375"/>
-            <a:ext cx="12188824" cy="523220"/>
+          <p:cNvPr id="3" name="TextBox 2">
+            <a:extLst>
+              <a:ext uri="{FF2B5EF4-FFF2-40B4-BE49-F238E27FC236}">
+                <a16:creationId xmlns:a16="http://schemas.microsoft.com/office/drawing/2014/main" id="{00C90D53-CF0C-45A3-2100-402307F701DD}"/>
+              </a:ext>
+            </a:extLst>
+          </p:cNvPr>
+          <p:cNvSpPr txBox="1"/>
+          <p:nvPr/>
+        </p:nvSpPr>
+        <p:spPr>
+          <a:xfrm>
+            <a:off x="833748" y="3410831"/>
+            <a:ext cx="6072020" cy="954107"/>
           </a:xfrm>
           <a:prstGeom prst="rect">
             <a:avLst/>
@@ -36377,9 +37334,9 @@
           <a:p>
             <a:pPr algn="ctr"/>
             <a:r>
-              <a:rPr sz="2800" b="0" i="0">
-                <a:solidFill>
-                  <a:srgbClr val="BFDBFF"/>
+              <a:rPr lang="en-US" sz="2800" b="1" dirty="0">
+                <a:solidFill>
+                  <a:srgbClr val="1527D7"/>
                 </a:solidFill>
               </a:rPr>
               <a:t>Part 7 . Who are you - and how do we keep the app safe</a:t>
@@ -36388,6 +37345,11 @@
         </p:txBody>
       </p:sp>
     </p:spTree>
+    <p:extLst>
+      <p:ext uri="{BB962C8B-B14F-4D97-AF65-F5344CB8AC3E}">
+        <p14:creationId xmlns:p14="http://schemas.microsoft.com/office/powerpoint/2010/main" val="200138654"/>
+      </p:ext>
+    </p:extLst>
   </p:cSld>
   <p:clrMapOvr>
     <a:masterClrMapping/>
@@ -36861,12 +37823,28 @@
           <a:p>
             <a:pPr algn="l"/>
             <a:r>
-              <a:rPr sz="2200" b="0" i="0">
+              <a:rPr sz="2200" b="0" i="0" dirty="0">
                 <a:solidFill>
                   <a:srgbClr val="111827"/>
                 </a:solidFill>
               </a:rPr>
-              <a:t>.  Campus Hub: Supabase Auth (W12)</a:t>
+              <a:t>.  Campus Hub: </a:t>
+            </a:r>
+            <a:r>
+              <a:rPr sz="2200" b="0" i="0" dirty="0" err="1">
+                <a:solidFill>
+                  <a:srgbClr val="111827"/>
+                </a:solidFill>
+              </a:rPr>
+              <a:t>Supabase</a:t>
+            </a:r>
+            <a:r>
+              <a:rPr sz="2200" b="0" i="0" dirty="0">
+                <a:solidFill>
+                  <a:srgbClr val="111827"/>
+                </a:solidFill>
+              </a:rPr>
+              <a:t> Auth</a:t>
             </a:r>
           </a:p>
         </p:txBody>
@@ -37150,7 +38128,7 @@
                   <a:srgbClr val="111827"/>
                 </a:solidFill>
               </a:rPr>
-              <a:t>.  Campus Hub: database access rules (W12)</a:t>
+              <a:t>.  Campus Hub: database access rules</a:t>
             </a:r>
           </a:p>
         </p:txBody>
@@ -37201,7 +38179,7 @@
         <p:spPr>
           <a:xfrm>
             <a:off x="10515600" y="6510528"/>
-            <a:ext cx="1280160" cy="274320"/>
+            <a:ext cx="1280160" cy="230832"/>
           </a:xfrm>
           <a:prstGeom prst="rect">
             <a:avLst/>
@@ -37216,9 +38194,9 @@
           <a:p>
             <a:pPr algn="r"/>
             <a:r>
-              <a:rPr sz="900" b="0" i="0">
-                <a:solidFill>
-                  <a:srgbClr val="6B7280"/>
+              <a:rPr sz="900" b="1" i="0" dirty="0">
+                <a:solidFill>
+                  <a:srgbClr val="FFC000"/>
                 </a:solidFill>
               </a:rPr>
               <a:t>39 / 46</a:t>
@@ -38407,7 +39385,7 @@
         <p:spPr>
           <a:xfrm>
             <a:off x="10515600" y="6510528"/>
-            <a:ext cx="1280160" cy="274320"/>
+            <a:ext cx="1280160" cy="230832"/>
           </a:xfrm>
           <a:prstGeom prst="rect">
             <a:avLst/>
@@ -38422,9 +39400,9 @@
           <a:p>
             <a:pPr algn="r"/>
             <a:r>
-              <a:rPr sz="900" b="0" i="0">
-                <a:solidFill>
-                  <a:srgbClr val="6B7280"/>
+              <a:rPr sz="900" b="1" i="0" dirty="0">
+                <a:solidFill>
+                  <a:srgbClr val="FFC000"/>
                 </a:solidFill>
               </a:rPr>
               <a:t>40 / 46</a:t>
@@ -38443,14 +39421,6 @@
 <file path=ppt/slides/slide4.xml><?xml version="1.0" encoding="utf-8"?>
 <p:sld xmlns:a="http://schemas.openxmlformats.org/drawingml/2006/main" xmlns:r="http://schemas.openxmlformats.org/officeDocument/2006/relationships" xmlns:p="http://schemas.openxmlformats.org/presentationml/2006/main">
   <p:cSld>
-    <p:bg>
-      <p:bgPr>
-        <a:solidFill>
-          <a:srgbClr val="2563EB"/>
-        </a:solidFill>
-        <a:effectLst/>
-      </p:bgPr>
-    </p:bg>
     <p:spTree>
       <p:nvGrpSpPr>
         <p:cNvPr id="1" name=""/>
@@ -38460,40 +39430,42 @@
       <p:grpSpPr>
         <a:xfrm>
           <a:off x="0" y="0"/>
-          <a:ext cx="0" cy="0"/>
+          <a:ext cx="1" cy="1"/>
           <a:chOff x="0" y="0"/>
-          <a:chExt cx="0" cy="0"/>
+          <a:chExt cx="1" cy="1"/>
         </a:xfrm>
       </p:grpSpPr>
       <p:sp>
         <p:nvSpPr>
-          <p:cNvPr id="3" name="TextBox 2"/>
-          <p:cNvSpPr txBox="1"/>
-          <p:nvPr/>
-        </p:nvSpPr>
-        <p:spPr>
-          <a:xfrm>
-            <a:off x="1" y="2250516"/>
-            <a:ext cx="12188824" cy="1015663"/>
-          </a:xfrm>
-          <a:prstGeom prst="rect">
-            <a:avLst/>
-          </a:prstGeom>
-          <a:noFill/>
-        </p:spPr>
-        <p:txBody>
-          <a:bodyPr wrap="square">
-            <a:spAutoFit/>
+          <p:cNvPr id="4" name="Text Placeholder 3">
+            <a:extLst>
+              <a:ext uri="{FF2B5EF4-FFF2-40B4-BE49-F238E27FC236}">
+                <a16:creationId xmlns:a16="http://schemas.microsoft.com/office/drawing/2014/main" id="{CB4FE1B0-D895-AF1C-0A83-2EE58E4A8233}"/>
+              </a:ext>
+            </a:extLst>
+          </p:cNvPr>
+          <p:cNvSpPr>
+            <a:spLocks noGrp="1"/>
+          </p:cNvSpPr>
+          <p:nvPr>
+            <p:ph type="body" sz="quarter" idx="10"/>
+          </p:nvPr>
+        </p:nvSpPr>
+        <p:spPr>
+          <a:xfrm>
+            <a:off x="833750" y="2448100"/>
+            <a:ext cx="6072018" cy="980901"/>
+          </a:xfrm>
+        </p:spPr>
+        <p:txBody>
+          <a:bodyPr>
+            <a:normAutofit/>
           </a:bodyPr>
           <a:lstStyle/>
           <a:p>
             <a:pPr algn="ctr"/>
             <a:r>
-              <a:rPr sz="6000" b="1" i="0" dirty="0">
-                <a:solidFill>
-                  <a:srgbClr val="FFFFFF"/>
-                </a:solidFill>
-              </a:rPr>
+              <a:rPr lang="en-US" sz="4800" b="1" dirty="0"/>
               <a:t>What Is Architecture?</a:t>
             </a:r>
           </a:p>
@@ -38501,31 +39473,37 @@
       </p:sp>
       <p:sp>
         <p:nvSpPr>
-          <p:cNvPr id="4" name="TextBox 3"/>
-          <p:cNvSpPr txBox="1"/>
-          <p:nvPr/>
-        </p:nvSpPr>
-        <p:spPr>
-          <a:xfrm>
-            <a:off x="1" y="3530675"/>
-            <a:ext cx="12188824" cy="523220"/>
-          </a:xfrm>
-          <a:prstGeom prst="rect">
-            <a:avLst/>
-          </a:prstGeom>
-          <a:noFill/>
-        </p:spPr>
-        <p:txBody>
-          <a:bodyPr wrap="square">
-            <a:spAutoFit/>
-          </a:bodyPr>
-          <a:lstStyle/>
-          <a:p>
-            <a:pPr algn="ctr"/>
-            <a:r>
-              <a:rPr sz="2800" b="0" i="0" dirty="0">
-                <a:solidFill>
-                  <a:srgbClr val="BFDBFF"/>
+          <p:cNvPr id="3" name="TextBox 2">
+            <a:extLst>
+              <a:ext uri="{FF2B5EF4-FFF2-40B4-BE49-F238E27FC236}">
+                <a16:creationId xmlns:a16="http://schemas.microsoft.com/office/drawing/2014/main" id="{3C3B8AD1-2854-BAB1-7B46-B5207E805D35}"/>
+              </a:ext>
+            </a:extLst>
+          </p:cNvPr>
+          <p:cNvSpPr txBox="1"/>
+          <p:nvPr/>
+        </p:nvSpPr>
+        <p:spPr>
+          <a:xfrm>
+            <a:off x="833748" y="3410831"/>
+            <a:ext cx="6072019" cy="523220"/>
+          </a:xfrm>
+          <a:prstGeom prst="rect">
+            <a:avLst/>
+          </a:prstGeom>
+          <a:noFill/>
+        </p:spPr>
+        <p:txBody>
+          <a:bodyPr wrap="square">
+            <a:spAutoFit/>
+          </a:bodyPr>
+          <a:lstStyle/>
+          <a:p>
+            <a:pPr algn="r"/>
+            <a:r>
+              <a:rPr lang="en-US" sz="2800" b="1" i="0" dirty="0">
+                <a:solidFill>
+                  <a:srgbClr val="1527D7"/>
                 </a:solidFill>
               </a:rPr>
               <a:t>Part 1 . The big idea, before any code</a:t>
@@ -38534,6 +39512,11 @@
         </p:txBody>
       </p:sp>
     </p:spTree>
+    <p:extLst>
+      <p:ext uri="{BB962C8B-B14F-4D97-AF65-F5344CB8AC3E}">
+        <p14:creationId xmlns:p14="http://schemas.microsoft.com/office/powerpoint/2010/main" val="3900052464"/>
+      </p:ext>
+    </p:extLst>
   </p:cSld>
   <p:clrMapOvr>
     <a:masterClrMapping/>
@@ -40142,7 +41125,7 @@
         <p:spPr>
           <a:xfrm>
             <a:off x="10515600" y="6510528"/>
-            <a:ext cx="1280160" cy="274320"/>
+            <a:ext cx="1280160" cy="230832"/>
           </a:xfrm>
           <a:prstGeom prst="rect">
             <a:avLst/>
@@ -40157,9 +41140,9 @@
           <a:p>
             <a:pPr algn="r"/>
             <a:r>
-              <a:rPr sz="900" b="0" i="0">
-                <a:solidFill>
-                  <a:srgbClr val="6B7280"/>
+              <a:rPr sz="900" b="0" i="0" dirty="0">
+                <a:solidFill>
+                  <a:srgbClr val="FFC000"/>
                 </a:solidFill>
               </a:rPr>
               <a:t>41 / 46</a:t>
@@ -41008,7 +41991,7 @@
         <p:spPr>
           <a:xfrm>
             <a:off x="10515600" y="6510528"/>
-            <a:ext cx="1280160" cy="274320"/>
+            <a:ext cx="1280160" cy="230832"/>
           </a:xfrm>
           <a:prstGeom prst="rect">
             <a:avLst/>
@@ -41023,9 +42006,9 @@
           <a:p>
             <a:pPr algn="r"/>
             <a:r>
-              <a:rPr sz="900" b="0" i="0">
-                <a:solidFill>
-                  <a:srgbClr val="6B7280"/>
+              <a:rPr sz="900" b="1" i="0" dirty="0">
+                <a:solidFill>
+                  <a:srgbClr val="FFC000"/>
                 </a:solidFill>
               </a:rPr>
               <a:t>42 / 46</a:t>
@@ -42151,7 +43134,7 @@
         <p:spPr>
           <a:xfrm>
             <a:off x="10515600" y="6510528"/>
-            <a:ext cx="1280160" cy="274320"/>
+            <a:ext cx="1280160" cy="230832"/>
           </a:xfrm>
           <a:prstGeom prst="rect">
             <a:avLst/>
@@ -42166,9 +43149,9 @@
           <a:p>
             <a:pPr algn="r"/>
             <a:r>
-              <a:rPr sz="900" b="0" i="0">
-                <a:solidFill>
-                  <a:srgbClr val="6B7280"/>
+              <a:rPr sz="900" b="1" i="0">
+                <a:solidFill>
+                  <a:srgbClr val="FFC000"/>
                 </a:solidFill>
               </a:rPr>
               <a:t>43 / 46</a:t>
@@ -42291,7 +43274,7 @@
         </p:nvSpPr>
         <p:spPr>
           <a:xfrm>
-            <a:off x="384048" y="841248"/>
+            <a:off x="384048" y="899123"/>
             <a:ext cx="11430000" cy="523220"/>
           </a:xfrm>
           <a:prstGeom prst="rect">
@@ -42368,7 +43351,7 @@
         </p:nvSpPr>
         <p:spPr>
           <a:xfrm>
-            <a:off x="457200" y="1488976"/>
+            <a:off x="457200" y="1651026"/>
             <a:ext cx="6949440" cy="4572000"/>
           </a:xfrm>
           <a:prstGeom prst="roundRect">
@@ -42414,7 +43397,7 @@
         </p:nvSpPr>
         <p:spPr>
           <a:xfrm>
-            <a:off x="790208" y="1525824"/>
+            <a:off x="790208" y="1687874"/>
             <a:ext cx="6583680" cy="461665"/>
           </a:xfrm>
           <a:prstGeom prst="rect">
@@ -42448,7 +43431,7 @@
         </p:nvSpPr>
         <p:spPr>
           <a:xfrm>
-            <a:off x="685800" y="2037616"/>
+            <a:off x="685800" y="2199666"/>
             <a:ext cx="3108960" cy="548640"/>
           </a:xfrm>
           <a:prstGeom prst="roundRect">
@@ -42492,7 +43475,7 @@
         </p:nvSpPr>
         <p:spPr>
           <a:xfrm>
-            <a:off x="713232" y="2147343"/>
+            <a:off x="713232" y="2309393"/>
             <a:ext cx="3054096" cy="400110"/>
           </a:xfrm>
           <a:prstGeom prst="rect">
@@ -42526,7 +43509,7 @@
         </p:nvSpPr>
         <p:spPr>
           <a:xfrm>
-            <a:off x="3977639" y="2037616"/>
+            <a:off x="3977639" y="2199666"/>
             <a:ext cx="3246120" cy="548640"/>
           </a:xfrm>
           <a:prstGeom prst="roundRect">
@@ -42570,7 +43553,7 @@
         </p:nvSpPr>
         <p:spPr>
           <a:xfrm>
-            <a:off x="4005072" y="2147343"/>
+            <a:off x="4005072" y="2309393"/>
             <a:ext cx="3191256" cy="400110"/>
           </a:xfrm>
           <a:prstGeom prst="rect">
@@ -42604,7 +43587,7 @@
         </p:nvSpPr>
         <p:spPr>
           <a:xfrm>
-            <a:off x="2103120" y="2631976"/>
+            <a:off x="2103120" y="2794026"/>
             <a:ext cx="228600" cy="228600"/>
           </a:xfrm>
           <a:prstGeom prst="downArrow">
@@ -42648,7 +43631,7 @@
         </p:nvSpPr>
         <p:spPr>
           <a:xfrm>
-            <a:off x="5394960" y="2631976"/>
+            <a:off x="5394960" y="2794026"/>
             <a:ext cx="228600" cy="228600"/>
           </a:xfrm>
           <a:prstGeom prst="downArrow">
@@ -42692,7 +43675,7 @@
         </p:nvSpPr>
         <p:spPr>
           <a:xfrm>
-            <a:off x="685800" y="2952015"/>
+            <a:off x="685800" y="3114065"/>
             <a:ext cx="3108960" cy="815977"/>
           </a:xfrm>
           <a:prstGeom prst="roundRect">
@@ -42736,7 +43719,7 @@
         </p:nvSpPr>
         <p:spPr>
           <a:xfrm>
-            <a:off x="713232" y="3020799"/>
+            <a:off x="713232" y="3182849"/>
             <a:ext cx="3054096" cy="707886"/>
           </a:xfrm>
           <a:prstGeom prst="rect">
@@ -42791,7 +43774,7 @@
         </p:nvSpPr>
         <p:spPr>
           <a:xfrm>
-            <a:off x="3977639" y="2952016"/>
+            <a:off x="3977639" y="3114066"/>
             <a:ext cx="3246120" cy="815976"/>
           </a:xfrm>
           <a:prstGeom prst="roundRect">
@@ -42835,7 +43818,7 @@
         </p:nvSpPr>
         <p:spPr>
           <a:xfrm>
-            <a:off x="4005072" y="3170927"/>
+            <a:off x="4005072" y="3332977"/>
             <a:ext cx="3191256" cy="400110"/>
           </a:xfrm>
           <a:prstGeom prst="rect">
@@ -42869,7 +43852,7 @@
         </p:nvSpPr>
         <p:spPr>
           <a:xfrm>
-            <a:off x="685800" y="4020091"/>
+            <a:off x="685800" y="4182141"/>
             <a:ext cx="6583680" cy="707886"/>
           </a:xfrm>
           <a:prstGeom prst="rect">
@@ -42903,7 +43886,7 @@
         </p:nvSpPr>
         <p:spPr>
           <a:xfrm>
-            <a:off x="1463040" y="4980075"/>
+            <a:off x="1463040" y="5142125"/>
             <a:ext cx="4572000" cy="548640"/>
           </a:xfrm>
           <a:prstGeom prst="roundRect">
@@ -42947,7 +43930,7 @@
         </p:nvSpPr>
         <p:spPr>
           <a:xfrm>
-            <a:off x="1490472" y="5089803"/>
+            <a:off x="1490472" y="5251853"/>
             <a:ext cx="4517136" cy="400110"/>
           </a:xfrm>
           <a:prstGeom prst="rect">
@@ -42981,8 +43964,8 @@
         </p:nvSpPr>
         <p:spPr>
           <a:xfrm>
-            <a:off x="7406640" y="3546376"/>
-            <a:ext cx="868680" cy="411480"/>
+            <a:off x="7406639" y="3708426"/>
+            <a:ext cx="913583" cy="400110"/>
           </a:xfrm>
           <a:prstGeom prst="rightArrow">
             <a:avLst/>
@@ -43025,7 +44008,7 @@
         </p:nvSpPr>
         <p:spPr>
           <a:xfrm>
-            <a:off x="7269480" y="3089176"/>
+            <a:off x="7362080" y="3251226"/>
             <a:ext cx="1005840" cy="400110"/>
           </a:xfrm>
           <a:prstGeom prst="rect">
@@ -43059,7 +44042,7 @@
         </p:nvSpPr>
         <p:spPr>
           <a:xfrm>
-            <a:off x="8347655" y="1488976"/>
+            <a:off x="8347655" y="1651026"/>
             <a:ext cx="3566160" cy="4572000"/>
           </a:xfrm>
           <a:prstGeom prst="roundRect">
@@ -43105,7 +44088,7 @@
         </p:nvSpPr>
         <p:spPr>
           <a:xfrm>
-            <a:off x="8544184" y="1525824"/>
+            <a:off x="8544184" y="1687874"/>
             <a:ext cx="3291840" cy="461665"/>
           </a:xfrm>
           <a:prstGeom prst="rect">
@@ -43155,7 +44138,7 @@
         </p:nvSpPr>
         <p:spPr>
           <a:xfrm>
-            <a:off x="8530536" y="2037616"/>
+            <a:off x="8530536" y="2199666"/>
             <a:ext cx="3200400" cy="548640"/>
           </a:xfrm>
           <a:prstGeom prst="roundRect">
@@ -43199,7 +44182,7 @@
         </p:nvSpPr>
         <p:spPr>
           <a:xfrm>
-            <a:off x="8557968" y="2147343"/>
+            <a:off x="8557968" y="2309393"/>
             <a:ext cx="3145536" cy="400110"/>
           </a:xfrm>
           <a:prstGeom prst="rect">
@@ -43233,7 +44216,7 @@
         </p:nvSpPr>
         <p:spPr>
           <a:xfrm>
-            <a:off x="8530536" y="2769136"/>
+            <a:off x="8530536" y="2931186"/>
             <a:ext cx="3200400" cy="548640"/>
           </a:xfrm>
           <a:prstGeom prst="roundRect">
@@ -43277,7 +44260,7 @@
         </p:nvSpPr>
         <p:spPr>
           <a:xfrm>
-            <a:off x="8557968" y="2878864"/>
+            <a:off x="8557968" y="3040914"/>
             <a:ext cx="3145536" cy="400110"/>
           </a:xfrm>
           <a:prstGeom prst="rect">
@@ -43311,7 +44294,7 @@
         </p:nvSpPr>
         <p:spPr>
           <a:xfrm>
-            <a:off x="8530536" y="3500656"/>
+            <a:off x="8530536" y="3662706"/>
             <a:ext cx="3200400" cy="548640"/>
           </a:xfrm>
           <a:prstGeom prst="roundRect">
@@ -43355,7 +44338,7 @@
         </p:nvSpPr>
         <p:spPr>
           <a:xfrm>
-            <a:off x="8557968" y="3610383"/>
+            <a:off x="8557968" y="3772433"/>
             <a:ext cx="3145536" cy="400110"/>
           </a:xfrm>
           <a:prstGeom prst="rect">
@@ -43389,7 +44372,7 @@
         </p:nvSpPr>
         <p:spPr>
           <a:xfrm>
-            <a:off x="8530536" y="4232176"/>
+            <a:off x="8530536" y="4394226"/>
             <a:ext cx="3200400" cy="548640"/>
           </a:xfrm>
           <a:prstGeom prst="roundRect">
@@ -43433,7 +44416,7 @@
         </p:nvSpPr>
         <p:spPr>
           <a:xfrm>
-            <a:off x="8557968" y="4341904"/>
+            <a:off x="8557968" y="4503954"/>
             <a:ext cx="3145536" cy="400110"/>
           </a:xfrm>
           <a:prstGeom prst="rect">
@@ -43467,7 +44450,7 @@
         </p:nvSpPr>
         <p:spPr>
           <a:xfrm>
-            <a:off x="8530536" y="4963696"/>
+            <a:off x="8530536" y="5125746"/>
             <a:ext cx="3291840" cy="1015663"/>
           </a:xfrm>
           <a:prstGeom prst="rect">
@@ -43498,7 +44481,7 @@
         <p:spPr>
           <a:xfrm>
             <a:off x="10515600" y="6510528"/>
-            <a:ext cx="1280160" cy="274320"/>
+            <a:ext cx="1280160" cy="230832"/>
           </a:xfrm>
           <a:prstGeom prst="rect">
             <a:avLst/>
@@ -43513,9 +44496,9 @@
           <a:p>
             <a:pPr algn="r"/>
             <a:r>
-              <a:rPr sz="900" b="0" i="0">
-                <a:solidFill>
-                  <a:srgbClr val="6B7280"/>
+              <a:rPr sz="900" b="1" i="0" dirty="0">
+                <a:solidFill>
+                  <a:srgbClr val="FFC000"/>
                 </a:solidFill>
               </a:rPr>
               <a:t>44 / 46</a:t>
@@ -43647,7 +44630,7 @@
         </p:nvSpPr>
         <p:spPr>
           <a:xfrm>
-            <a:off x="731520" y="1035180"/>
+            <a:off x="731520" y="664789"/>
             <a:ext cx="10698480" cy="731520"/>
           </a:xfrm>
           <a:prstGeom prst="roundRect">
@@ -43691,7 +44674,7 @@
         </p:nvSpPr>
         <p:spPr>
           <a:xfrm>
-            <a:off x="914400" y="958204"/>
+            <a:off x="914400" y="587813"/>
             <a:ext cx="3657600" cy="461665"/>
           </a:xfrm>
           <a:prstGeom prst="rect">
@@ -43725,7 +44708,7 @@
         </p:nvSpPr>
         <p:spPr>
           <a:xfrm>
-            <a:off x="914400" y="1337340"/>
+            <a:off x="914400" y="966949"/>
             <a:ext cx="10332720" cy="461665"/>
           </a:xfrm>
           <a:prstGeom prst="rect">
@@ -43755,7 +44738,7 @@
         </p:nvSpPr>
         <p:spPr>
           <a:xfrm>
-            <a:off x="731520" y="1876428"/>
+            <a:off x="731520" y="1598636"/>
             <a:ext cx="10698480" cy="731520"/>
           </a:xfrm>
           <a:prstGeom prst="roundRect">
@@ -43799,7 +44782,7 @@
         </p:nvSpPr>
         <p:spPr>
           <a:xfrm>
-            <a:off x="914400" y="1826748"/>
+            <a:off x="914400" y="1548956"/>
             <a:ext cx="3657600" cy="461665"/>
           </a:xfrm>
           <a:prstGeom prst="rect">
@@ -43833,7 +44816,7 @@
         </p:nvSpPr>
         <p:spPr>
           <a:xfrm>
-            <a:off x="914400" y="2192236"/>
+            <a:off x="914400" y="1914444"/>
             <a:ext cx="10332720" cy="461665"/>
           </a:xfrm>
           <a:prstGeom prst="rect">
@@ -43863,7 +44846,7 @@
         </p:nvSpPr>
         <p:spPr>
           <a:xfrm>
-            <a:off x="731520" y="2717676"/>
+            <a:off x="731520" y="2567204"/>
             <a:ext cx="10698480" cy="731520"/>
           </a:xfrm>
           <a:prstGeom prst="roundRect">
@@ -43907,7 +44890,7 @@
         </p:nvSpPr>
         <p:spPr>
           <a:xfrm>
-            <a:off x="914400" y="2681644"/>
+            <a:off x="914400" y="2531172"/>
             <a:ext cx="3657600" cy="461665"/>
           </a:xfrm>
           <a:prstGeom prst="rect">
@@ -43941,7 +44924,7 @@
         </p:nvSpPr>
         <p:spPr>
           <a:xfrm>
-            <a:off x="914400" y="3033484"/>
+            <a:off x="914400" y="2883012"/>
             <a:ext cx="10332720" cy="461665"/>
           </a:xfrm>
           <a:prstGeom prst="rect">
@@ -43971,7 +44954,7 @@
         </p:nvSpPr>
         <p:spPr>
           <a:xfrm>
-            <a:off x="731520" y="3558924"/>
+            <a:off x="731520" y="3582074"/>
             <a:ext cx="10698480" cy="731520"/>
           </a:xfrm>
           <a:prstGeom prst="roundRect">
@@ -44015,7 +44998,7 @@
         </p:nvSpPr>
         <p:spPr>
           <a:xfrm>
-            <a:off x="914400" y="3536540"/>
+            <a:off x="914400" y="3559690"/>
             <a:ext cx="3657600" cy="461665"/>
           </a:xfrm>
           <a:prstGeom prst="rect">
@@ -44049,7 +45032,7 @@
         </p:nvSpPr>
         <p:spPr>
           <a:xfrm>
-            <a:off x="914400" y="3874732"/>
+            <a:off x="914400" y="3897882"/>
             <a:ext cx="10332720" cy="461665"/>
           </a:xfrm>
           <a:prstGeom prst="rect">
@@ -44066,15 +45049,7 @@
             <a:pPr algn="l"/>
             <a:r>
               <a:rPr sz="2400" b="0" i="0" dirty="0"/>
-              <a:t>Every choice is a trade-off. Ask what you're </a:t>
-            </a:r>
-            <a:r>
-              <a:rPr sz="2400" b="0" i="0" dirty="0" err="1"/>
-              <a:t>optimising</a:t>
-            </a:r>
-            <a:r>
-              <a:rPr sz="2400" b="0" i="0" dirty="0"/>
-              <a:t> for, then write it down.</a:t>
+              <a:t>Every choice is a trade-off. Ask what you're optimizing for, then write it down.</a:t>
             </a:r>
           </a:p>
         </p:txBody>
@@ -44087,7 +45062,7 @@
         </p:nvSpPr>
         <p:spPr>
           <a:xfrm>
-            <a:off x="731520" y="4400172"/>
+            <a:off x="731520" y="4585372"/>
             <a:ext cx="10698480" cy="731520"/>
           </a:xfrm>
           <a:prstGeom prst="roundRect">
@@ -44131,7 +45106,7 @@
         </p:nvSpPr>
         <p:spPr>
           <a:xfrm>
-            <a:off x="914400" y="4364140"/>
+            <a:off x="914400" y="4549340"/>
             <a:ext cx="3657600" cy="461665"/>
           </a:xfrm>
           <a:prstGeom prst="rect">
@@ -44165,7 +45140,7 @@
         </p:nvSpPr>
         <p:spPr>
           <a:xfrm>
-            <a:off x="914400" y="4715980"/>
+            <a:off x="914400" y="4901180"/>
             <a:ext cx="10332720" cy="430887"/>
           </a:xfrm>
           <a:prstGeom prst="rect">
@@ -44211,7 +45186,7 @@
         </p:nvSpPr>
         <p:spPr>
           <a:xfrm>
-            <a:off x="731520" y="5241420"/>
+            <a:off x="731520" y="5542367"/>
             <a:ext cx="10698480" cy="731520"/>
           </a:xfrm>
           <a:prstGeom prst="roundRect">
@@ -44255,7 +45230,7 @@
         </p:nvSpPr>
         <p:spPr>
           <a:xfrm>
-            <a:off x="914400" y="5178092"/>
+            <a:off x="914400" y="5479039"/>
             <a:ext cx="3657600" cy="461665"/>
           </a:xfrm>
           <a:prstGeom prst="rect">
@@ -44289,7 +45264,7 @@
         </p:nvSpPr>
         <p:spPr>
           <a:xfrm>
-            <a:off x="914400" y="5570876"/>
+            <a:off x="914400" y="5871823"/>
             <a:ext cx="10332720" cy="430887"/>
           </a:xfrm>
           <a:prstGeom prst="rect">
@@ -46547,7 +47522,7 @@
         <p:spPr>
           <a:xfrm>
             <a:off x="457200" y="960120"/>
-            <a:ext cx="11247120" cy="1325880"/>
+            <a:ext cx="11247120" cy="1095126"/>
           </a:xfrm>
           <a:prstGeom prst="roundRect">
             <a:avLst/>
@@ -46592,45 +47567,33 @@
         </p:nvSpPr>
         <p:spPr>
           <a:xfrm>
-            <a:off x="685800" y="1048144"/>
-            <a:ext cx="10789920" cy="1107996"/>
-          </a:xfrm>
-          <a:prstGeom prst="rect">
-            <a:avLst/>
-          </a:prstGeom>
-          <a:noFill/>
-        </p:spPr>
-        <p:txBody>
-          <a:bodyPr wrap="square">
-            <a:spAutoFit/>
-          </a:bodyPr>
-          <a:lstStyle/>
-          <a:p>
-            <a:pPr algn="l"/>
-            <a:r>
-              <a:rPr sz="2200" b="1" i="0" dirty="0">
-                <a:solidFill>
-                  <a:srgbClr val="111827"/>
-                </a:solidFill>
-              </a:rPr>
-              <a:t>Software architecture is the set of big, hard-to-change decisions about how the parts of your app</a:t>
-            </a:r>
-            <a:r>
-              <a:rPr lang="en-US" sz="2200" b="1" i="0" dirty="0">
-                <a:solidFill>
-                  <a:srgbClr val="111827"/>
-                </a:solidFill>
-              </a:rPr>
-              <a:t> </a:t>
-            </a:r>
-            <a:r>
-              <a:rPr sz="2200" b="1" i="0" dirty="0">
-                <a:solidFill>
-                  <a:srgbClr val="111827"/>
-                </a:solidFill>
-              </a:rPr>
-              <a:t>are divided up, what each part is responsible for, and how those parts talk to each other.</a:t>
-            </a:r>
+            <a:off x="552745" y="911664"/>
+            <a:ext cx="10991215" cy="1077218"/>
+          </a:xfrm>
+          <a:prstGeom prst="rect">
+            <a:avLst/>
+          </a:prstGeom>
+          <a:noFill/>
+        </p:spPr>
+        <p:txBody>
+          <a:bodyPr wrap="square">
+            <a:spAutoFit/>
+          </a:bodyPr>
+          <a:lstStyle/>
+          <a:p>
+            <a:r>
+              <a:rPr lang="en-US" sz="3200" b="1" dirty="0">
+                <a:solidFill>
+                  <a:srgbClr val="1527D7"/>
+                </a:solidFill>
+              </a:rPr>
+              <a:t>Software architecture defines how an app is divided, what each part owns, and how the parts communicate.</a:t>
+            </a:r>
+            <a:endParaRPr lang="en-US" sz="3200" dirty="0">
+              <a:solidFill>
+                <a:srgbClr val="1527D7"/>
+              </a:solidFill>
+            </a:endParaRPr>
           </a:p>
         </p:txBody>
       </p:sp>
@@ -46642,35 +47605,30 @@
         </p:nvSpPr>
         <p:spPr>
           <a:xfrm>
-            <a:off x="457200" y="2492080"/>
-            <a:ext cx="11338560" cy="461665"/>
-          </a:xfrm>
-          <a:prstGeom prst="rect">
-            <a:avLst/>
-          </a:prstGeom>
-          <a:noFill/>
-        </p:spPr>
-        <p:txBody>
-          <a:bodyPr wrap="square">
-            <a:spAutoFit/>
-          </a:bodyPr>
-          <a:lstStyle/>
-          <a:p>
-            <a:pPr marL="342900" indent="-342900" algn="l">
-              <a:buFont typeface="Arial" panose="020B0604020202020204" pitchFamily="34" charset="0"/>
-              <a:buChar char="•"/>
-            </a:pPr>
-            <a:r>
-              <a:rPr sz="2400" b="0" dirty="0"/>
-              <a:t>Three </a:t>
-            </a:r>
-            <a:r>
-              <a:rPr lang="en-US" sz="2400" b="0" dirty="0"/>
-              <a:t>drawn </a:t>
-            </a:r>
-            <a:r>
-              <a:rPr sz="2400" b="0" dirty="0"/>
-              <a:t>ideas:</a:t>
+            <a:off x="4233671" y="2191825"/>
+            <a:ext cx="3566161" cy="584775"/>
+          </a:xfrm>
+          <a:prstGeom prst="rect">
+            <a:avLst/>
+          </a:prstGeom>
+          <a:solidFill>
+            <a:srgbClr val="C00000"/>
+          </a:solidFill>
+        </p:spPr>
+        <p:txBody>
+          <a:bodyPr wrap="square">
+            <a:spAutoFit/>
+          </a:bodyPr>
+          <a:lstStyle/>
+          <a:p>
+            <a:pPr algn="ctr"/>
+            <a:r>
+              <a:rPr sz="3200" b="1" dirty="0">
+                <a:solidFill>
+                  <a:schemeClr val="bg1"/>
+                </a:solidFill>
+              </a:rPr>
+              <a:t>Three ideas</a:t>
             </a:r>
           </a:p>
         </p:txBody>
@@ -46683,8 +47641,8 @@
         </p:nvSpPr>
         <p:spPr>
           <a:xfrm>
-            <a:off x="457200" y="3108960"/>
-            <a:ext cx="3566160" cy="3175444"/>
+            <a:off x="457200" y="2887081"/>
+            <a:ext cx="3566160" cy="3715469"/>
           </a:xfrm>
           <a:prstGeom prst="roundRect">
             <a:avLst/>
@@ -46729,7 +47687,7 @@
         </p:nvSpPr>
         <p:spPr>
           <a:xfrm>
-            <a:off x="457200" y="3108960"/>
+            <a:off x="457200" y="2887082"/>
             <a:ext cx="3566160" cy="91440"/>
           </a:xfrm>
           <a:prstGeom prst="rect">
@@ -46773,8 +47731,8 @@
         </p:nvSpPr>
         <p:spPr>
           <a:xfrm>
-            <a:off x="685800" y="3310128"/>
-            <a:ext cx="3200400" cy="461665"/>
+            <a:off x="685800" y="2979066"/>
+            <a:ext cx="3200400" cy="523220"/>
           </a:xfrm>
           <a:prstGeom prst="rect">
             <a:avLst/>
@@ -46789,13 +47747,26 @@
           <a:p>
             <a:pPr algn="l"/>
             <a:r>
-              <a:rPr sz="2400" b="1" i="0" dirty="0">
+              <a:rPr sz="2800" b="1" i="0" dirty="0">
                 <a:solidFill>
                   <a:srgbClr val="2563EB"/>
                 </a:solidFill>
               </a:rPr>
-              <a:t>Divided up</a:t>
-            </a:r>
+              <a:t>Divid</a:t>
+            </a:r>
+            <a:r>
+              <a:rPr lang="en-US" sz="2800" b="1" i="0" dirty="0">
+                <a:solidFill>
+                  <a:srgbClr val="2563EB"/>
+                </a:solidFill>
+              </a:rPr>
+              <a:t>ed up</a:t>
+            </a:r>
+            <a:endParaRPr sz="2800" b="1" i="0" dirty="0">
+              <a:solidFill>
+                <a:srgbClr val="2563EB"/>
+              </a:solidFill>
+            </a:endParaRPr>
           </a:p>
         </p:txBody>
       </p:sp>
@@ -46807,8 +47778,8 @@
         </p:nvSpPr>
         <p:spPr>
           <a:xfrm>
-            <a:off x="685800" y="3822191"/>
-            <a:ext cx="3200400" cy="2462213"/>
+            <a:off x="685800" y="3600313"/>
+            <a:ext cx="3200400" cy="2985433"/>
           </a:xfrm>
           <a:prstGeom prst="rect">
             <a:avLst/>
@@ -46822,18 +47793,21 @@
           <a:lstStyle/>
           <a:p>
             <a:pPr marL="342900" indent="-342900" algn="l">
+              <a:spcAft>
+                <a:spcPts val="1200"/>
+              </a:spcAft>
               <a:buFont typeface="Arial" panose="020B0604020202020204" pitchFamily="34" charset="0"/>
               <a:buChar char="•"/>
             </a:pPr>
             <a:r>
-              <a:rPr sz="2200" b="0" i="0" dirty="0">
+              <a:rPr sz="2400" b="0" i="0" dirty="0">
                 <a:solidFill>
                   <a:srgbClr val="111827"/>
                 </a:solidFill>
               </a:rPr>
               <a:t>An app is not one giant file. </a:t>
             </a:r>
-            <a:endParaRPr lang="en-US" sz="2200" b="0" i="0" dirty="0">
+            <a:endParaRPr lang="en-US" sz="2400" b="0" i="0" dirty="0">
               <a:solidFill>
                 <a:srgbClr val="111827"/>
               </a:solidFill>
@@ -46841,11 +47815,14 @@
           </a:p>
           <a:p>
             <a:pPr marL="342900" indent="-342900" algn="l">
+              <a:spcAft>
+                <a:spcPts val="1200"/>
+              </a:spcAft>
               <a:buFont typeface="Arial" panose="020B0604020202020204" pitchFamily="34" charset="0"/>
               <a:buChar char="•"/>
             </a:pPr>
             <a:r>
-              <a:rPr sz="2200" b="0" i="0" dirty="0">
+              <a:rPr sz="2400" b="0" i="0" dirty="0">
                 <a:solidFill>
                   <a:srgbClr val="111827"/>
                 </a:solidFill>
@@ -46853,7 +47830,7 @@
               <a:t>It is many</a:t>
             </a:r>
             <a:r>
-              <a:rPr lang="en-US" sz="2200" b="0" i="0" dirty="0">
+              <a:rPr lang="en-US" sz="2400" b="0" i="0" dirty="0">
                 <a:solidFill>
                   <a:srgbClr val="111827"/>
                 </a:solidFill>
@@ -46861,14 +47838,14 @@
               <a:t> </a:t>
             </a:r>
             <a:r>
-              <a:rPr sz="2200" b="0" i="0" dirty="0">
+              <a:rPr sz="2400" b="0" i="0" dirty="0">
                 <a:solidFill>
                   <a:srgbClr val="111827"/>
                 </a:solidFill>
               </a:rPr>
               <a:t>parts, each doing one job. </a:t>
             </a:r>
-            <a:endParaRPr lang="en-US" sz="2200" b="0" i="0" dirty="0">
+            <a:endParaRPr lang="en-US" sz="2400" b="0" i="0" dirty="0">
               <a:solidFill>
                 <a:srgbClr val="111827"/>
               </a:solidFill>
@@ -46876,11 +47853,14 @@
           </a:p>
           <a:p>
             <a:pPr marL="342900" indent="-342900" algn="l">
+              <a:spcAft>
+                <a:spcPts val="1200"/>
+              </a:spcAft>
               <a:buFont typeface="Arial" panose="020B0604020202020204" pitchFamily="34" charset="0"/>
               <a:buChar char="•"/>
             </a:pPr>
             <a:r>
-              <a:rPr sz="2200" b="0" i="0" dirty="0">
+              <a:rPr sz="2400" b="0" i="0" dirty="0">
                 <a:solidFill>
                   <a:srgbClr val="111827"/>
                 </a:solidFill>
@@ -46888,7 +47868,7 @@
               <a:t>Architecture</a:t>
             </a:r>
             <a:r>
-              <a:rPr lang="en-US" sz="2200" b="0" i="0" dirty="0">
+              <a:rPr lang="en-US" sz="2400" b="0" i="0" dirty="0">
                 <a:solidFill>
                   <a:srgbClr val="111827"/>
                 </a:solidFill>
@@ -46896,7 +47876,7 @@
               <a:t> </a:t>
             </a:r>
             <a:r>
-              <a:rPr sz="2200" b="0" i="0" dirty="0">
+              <a:rPr sz="2400" b="0" i="0" dirty="0">
                 <a:solidFill>
                   <a:srgbClr val="111827"/>
                 </a:solidFill>
@@ -46914,8 +47894,8 @@
         </p:nvSpPr>
         <p:spPr>
           <a:xfrm>
-            <a:off x="4233672" y="3108960"/>
-            <a:ext cx="3566160" cy="3175444"/>
+            <a:off x="4233672" y="2887081"/>
+            <a:ext cx="3566160" cy="3715469"/>
           </a:xfrm>
           <a:prstGeom prst="roundRect">
             <a:avLst/>
@@ -46960,7 +47940,7 @@
         </p:nvSpPr>
         <p:spPr>
           <a:xfrm>
-            <a:off x="4233672" y="3108960"/>
+            <a:off x="4233672" y="2887082"/>
             <a:ext cx="3566160" cy="91440"/>
           </a:xfrm>
           <a:prstGeom prst="rect">
@@ -47004,8 +47984,8 @@
         </p:nvSpPr>
         <p:spPr>
           <a:xfrm>
-            <a:off x="4462272" y="3310128"/>
-            <a:ext cx="3200400" cy="461665"/>
+            <a:off x="4462272" y="2979066"/>
+            <a:ext cx="3200400" cy="523220"/>
           </a:xfrm>
           <a:prstGeom prst="rect">
             <a:avLst/>
@@ -47020,7 +48000,7 @@
           <a:p>
             <a:pPr algn="l"/>
             <a:r>
-              <a:rPr sz="2400" b="1" i="0">
+              <a:rPr sz="2800" b="1" i="0">
                 <a:solidFill>
                   <a:srgbClr val="7C3AED"/>
                 </a:solidFill>
@@ -47038,8 +48018,8 @@
         </p:nvSpPr>
         <p:spPr>
           <a:xfrm>
-            <a:off x="4462272" y="3822191"/>
-            <a:ext cx="3200400" cy="2123658"/>
+            <a:off x="4462272" y="3600313"/>
+            <a:ext cx="3200400" cy="2462213"/>
           </a:xfrm>
           <a:prstGeom prst="rect">
             <a:avLst/>
@@ -47053,11 +48033,14 @@
           <a:lstStyle/>
           <a:p>
             <a:pPr marL="342900" indent="-342900" algn="l">
+              <a:spcAft>
+                <a:spcPts val="1200"/>
+              </a:spcAft>
               <a:buFont typeface="Arial" panose="020B0604020202020204" pitchFamily="34" charset="0"/>
               <a:buChar char="•"/>
             </a:pPr>
             <a:r>
-              <a:rPr sz="2200" b="0" i="0" dirty="0">
+              <a:rPr sz="2400" b="0" i="0" dirty="0">
                 <a:solidFill>
                   <a:srgbClr val="111827"/>
                 </a:solidFill>
@@ -47065,7 +48048,7 @@
               <a:t>Each part owns one concern: drawing the</a:t>
             </a:r>
             <a:r>
-              <a:rPr lang="en-US" sz="2200" b="0" i="0" dirty="0">
+              <a:rPr lang="en-US" sz="2400" b="0" i="0" dirty="0">
                 <a:solidFill>
                   <a:srgbClr val="111827"/>
                 </a:solidFill>
@@ -47073,7 +48056,7 @@
               <a:t> </a:t>
             </a:r>
             <a:r>
-              <a:rPr sz="2200" b="0" i="0" dirty="0">
+              <a:rPr sz="2400" b="0" i="0" dirty="0">
                 <a:solidFill>
                   <a:srgbClr val="111827"/>
                 </a:solidFill>
@@ -47083,11 +48066,14 @@
           </a:p>
           <a:p>
             <a:pPr marL="342900" indent="-342900" algn="l">
+              <a:spcAft>
+                <a:spcPts val="1200"/>
+              </a:spcAft>
               <a:buFont typeface="Arial" panose="020B0604020202020204" pitchFamily="34" charset="0"/>
               <a:buChar char="•"/>
             </a:pPr>
             <a:r>
-              <a:rPr sz="2200" b="0" i="0" dirty="0">
+              <a:rPr sz="2400" b="0" i="0" dirty="0">
                 <a:solidFill>
                   <a:srgbClr val="111827"/>
                 </a:solidFill>
@@ -47105,8 +48091,8 @@
         </p:nvSpPr>
         <p:spPr>
           <a:xfrm>
-            <a:off x="8010144" y="3108960"/>
-            <a:ext cx="3566160" cy="3175444"/>
+            <a:off x="8010144" y="2887081"/>
+            <a:ext cx="3566160" cy="3715469"/>
           </a:xfrm>
           <a:prstGeom prst="roundRect">
             <a:avLst/>
@@ -47151,7 +48137,7 @@
         </p:nvSpPr>
         <p:spPr>
           <a:xfrm>
-            <a:off x="8010144" y="3108960"/>
+            <a:off x="8010144" y="2887082"/>
             <a:ext cx="3566160" cy="91440"/>
           </a:xfrm>
           <a:prstGeom prst="rect">
@@ -47195,8 +48181,8 @@
         </p:nvSpPr>
         <p:spPr>
           <a:xfrm>
-            <a:off x="8238744" y="3310128"/>
-            <a:ext cx="3200400" cy="461665"/>
+            <a:off x="8238744" y="2979066"/>
+            <a:ext cx="3200400" cy="523220"/>
           </a:xfrm>
           <a:prstGeom prst="rect">
             <a:avLst/>
@@ -47211,7 +48197,7 @@
           <a:p>
             <a:pPr algn="l"/>
             <a:r>
-              <a:rPr sz="2400" b="1" i="0">
+              <a:rPr sz="2800" b="1" i="0">
                 <a:solidFill>
                   <a:srgbClr val="16A34A"/>
                 </a:solidFill>
@@ -47229,8 +48215,8 @@
         </p:nvSpPr>
         <p:spPr>
           <a:xfrm>
-            <a:off x="8238744" y="3822191"/>
-            <a:ext cx="3200400" cy="2123658"/>
+            <a:off x="8238744" y="3600313"/>
+            <a:ext cx="3200400" cy="2831544"/>
           </a:xfrm>
           <a:prstGeom prst="rect">
             <a:avLst/>
@@ -47244,11 +48230,14 @@
           <a:lstStyle/>
           <a:p>
             <a:pPr marL="342900" indent="-342900" algn="l">
+              <a:spcAft>
+                <a:spcPts val="1200"/>
+              </a:spcAft>
               <a:buFont typeface="Arial" panose="020B0604020202020204" pitchFamily="34" charset="0"/>
               <a:buChar char="•"/>
             </a:pPr>
             <a:r>
-              <a:rPr sz="2200" b="0" i="0" dirty="0">
+              <a:rPr sz="2400" b="0" i="0" dirty="0">
                 <a:solidFill>
                   <a:srgbClr val="111827"/>
                 </a:solidFill>
@@ -47256,7 +48245,7 @@
               <a:t>Parts pass data to each other in agreed</a:t>
             </a:r>
             <a:r>
-              <a:rPr lang="en-US" sz="2200" b="0" i="0" dirty="0">
+              <a:rPr lang="en-US" sz="2400" b="0" i="0" dirty="0">
                 <a:solidFill>
                   <a:srgbClr val="111827"/>
                 </a:solidFill>
@@ -47264,14 +48253,14 @@
               <a:t> </a:t>
             </a:r>
             <a:r>
-              <a:rPr sz="2200" b="0" i="0" dirty="0">
+              <a:rPr sz="2400" b="0" i="0" dirty="0">
                 <a:solidFill>
                   <a:srgbClr val="111827"/>
                 </a:solidFill>
               </a:rPr>
               <a:t>ways. </a:t>
             </a:r>
-            <a:endParaRPr lang="en-US" sz="2200" b="0" i="0" dirty="0">
+            <a:endParaRPr lang="en-US" sz="2400" b="0" i="0" dirty="0">
               <a:solidFill>
                 <a:srgbClr val="111827"/>
               </a:solidFill>
@@ -47279,11 +48268,14 @@
           </a:p>
           <a:p>
             <a:pPr marL="342900" indent="-342900" algn="l">
+              <a:spcAft>
+                <a:spcPts val="1200"/>
+              </a:spcAft>
               <a:buFont typeface="Arial" panose="020B0604020202020204" pitchFamily="34" charset="0"/>
               <a:buChar char="•"/>
             </a:pPr>
             <a:r>
-              <a:rPr sz="2200" b="0" i="0" dirty="0">
+              <a:rPr sz="2400" b="0" i="0" dirty="0">
                 <a:solidFill>
                   <a:srgbClr val="111827"/>
                 </a:solidFill>
@@ -47291,7 +48283,7 @@
               <a:t>The arrows between boxes matter</a:t>
             </a:r>
             <a:r>
-              <a:rPr lang="en-US" sz="2200" b="0" i="0" dirty="0">
+              <a:rPr lang="en-US" sz="2400" b="0" i="0" dirty="0">
                 <a:solidFill>
                   <a:srgbClr val="111827"/>
                 </a:solidFill>
@@ -47299,7 +48291,7 @@
               <a:t> </a:t>
             </a:r>
             <a:r>
-              <a:rPr sz="2200" b="0" i="0" dirty="0">
+              <a:rPr sz="2400" b="0" i="0" dirty="0">
                 <a:solidFill>
                   <a:srgbClr val="111827"/>
                 </a:solidFill>
@@ -47317,8 +48309,8 @@
         </p:nvSpPr>
         <p:spPr>
           <a:xfrm>
-            <a:off x="10515600" y="6510528"/>
-            <a:ext cx="1280160" cy="274320"/>
+            <a:off x="10515600" y="6524173"/>
+            <a:ext cx="1280160" cy="230832"/>
           </a:xfrm>
           <a:prstGeom prst="rect">
             <a:avLst/>
@@ -47333,9 +48325,9 @@
           <a:p>
             <a:pPr algn="r"/>
             <a:r>
-              <a:rPr sz="900" b="0" i="0">
-                <a:solidFill>
-                  <a:srgbClr val="6B7280"/>
+              <a:rPr sz="900" b="1" i="0">
+                <a:solidFill>
+                  <a:srgbClr val="FFC000"/>
                 </a:solidFill>
               </a:rPr>
               <a:t>5 / 46</a:t>
@@ -47429,7 +48421,7 @@
         <p:spPr>
           <a:xfrm>
             <a:off x="365760" y="160224"/>
-            <a:ext cx="11430000" cy="1200329"/>
+            <a:ext cx="11430000" cy="646331"/>
           </a:xfrm>
           <a:prstGeom prst="rect">
             <a:avLst/>
@@ -47450,35 +48442,6 @@
               </a:rPr>
               <a:t>The House Analogy</a:t>
             </a:r>
-            <a:r>
-              <a:rPr lang="en-US" sz="3600" b="1" i="0" dirty="0">
-                <a:solidFill>
-                  <a:srgbClr val="111827"/>
-                </a:solidFill>
-              </a:rPr>
-              <a:t>: </a:t>
-            </a:r>
-            <a:r>
-              <a:rPr lang="en-US" sz="2400" dirty="0">
-                <a:solidFill>
-                  <a:srgbClr val="FF0000"/>
-                </a:solidFill>
-              </a:rPr>
-              <a:t>Why you draw the blueprint before you pour concrete?</a:t>
-            </a:r>
-            <a:endParaRPr lang="en-US" sz="3600" dirty="0">
-              <a:solidFill>
-                <a:srgbClr val="FF0000"/>
-              </a:solidFill>
-            </a:endParaRPr>
-          </a:p>
-          <a:p>
-            <a:pPr algn="l"/>
-            <a:endParaRPr sz="3600" b="1" i="0" dirty="0">
-              <a:solidFill>
-                <a:srgbClr val="111827"/>
-              </a:solidFill>
-            </a:endParaRPr>
           </a:p>
         </p:txBody>
       </p:sp>
@@ -47534,44 +48497,94 @@
         </p:nvSpPr>
         <p:spPr>
           <a:xfrm>
-            <a:off x="457200" y="986741"/>
-            <a:ext cx="11338560" cy="1107996"/>
-          </a:xfrm>
-          <a:prstGeom prst="rect">
-            <a:avLst/>
-          </a:prstGeom>
-          <a:noFill/>
-        </p:spPr>
-        <p:txBody>
-          <a:bodyPr wrap="square">
-            <a:spAutoFit/>
-          </a:bodyPr>
-          <a:lstStyle/>
-          <a:p>
-            <a:pPr algn="l"/>
-            <a:r>
-              <a:rPr sz="2200" b="0" i="0" dirty="0">
+            <a:off x="457200" y="770168"/>
+            <a:ext cx="11338560" cy="1723549"/>
+          </a:xfrm>
+          <a:prstGeom prst="rect">
+            <a:avLst/>
+          </a:prstGeom>
+          <a:noFill/>
+        </p:spPr>
+        <p:txBody>
+          <a:bodyPr wrap="square">
+            <a:spAutoFit/>
+          </a:bodyPr>
+          <a:lstStyle/>
+          <a:p>
+            <a:pPr marL="342900" indent="-342900" algn="l">
+              <a:spcAft>
+                <a:spcPts val="600"/>
+              </a:spcAft>
+              <a:buFont typeface="Arial" panose="020B0604020202020204" pitchFamily="34" charset="0"/>
+              <a:buChar char="•"/>
+            </a:pPr>
+            <a:r>
+              <a:rPr sz="2400" b="0" i="0" dirty="0">
                 <a:solidFill>
                   <a:srgbClr val="111827"/>
                 </a:solidFill>
               </a:rPr>
-              <a:t>Nobody builds a house by stacking bricks and hoping. An architect draws a plan first: where the load-bearing</a:t>
-            </a:r>
-            <a:r>
-              <a:rPr lang="en-US" sz="2200" b="0" i="0" dirty="0">
+              <a:t>Nobody builds a house by stacking bricks and hoping. </a:t>
+            </a:r>
+            <a:endParaRPr lang="en-US" sz="2400" b="0" i="0" dirty="0">
+              <a:solidFill>
+                <a:srgbClr val="111827"/>
+              </a:solidFill>
+            </a:endParaRPr>
+          </a:p>
+          <a:p>
+            <a:pPr marL="342900" indent="-342900" algn="l">
+              <a:spcAft>
+                <a:spcPts val="600"/>
+              </a:spcAft>
+              <a:buFont typeface="Arial" panose="020B0604020202020204" pitchFamily="34" charset="0"/>
+              <a:buChar char="•"/>
+            </a:pPr>
+            <a:r>
+              <a:rPr sz="2400" b="0" i="0" dirty="0">
                 <a:solidFill>
                   <a:srgbClr val="111827"/>
                 </a:solidFill>
               </a:rPr>
+              <a:t>An architect draws a plan first: where the load-bearing</a:t>
+            </a:r>
+            <a:r>
+              <a:rPr lang="en-US" sz="2400" b="0" i="0" dirty="0">
+                <a:solidFill>
+                  <a:srgbClr val="111827"/>
+                </a:solidFill>
+              </a:rPr>
               <a:t> </a:t>
             </a:r>
             <a:r>
-              <a:rPr sz="2200" b="0" i="0" dirty="0">
+              <a:rPr sz="2400" b="0" i="0" dirty="0">
                 <a:solidFill>
                   <a:srgbClr val="111827"/>
                 </a:solidFill>
               </a:rPr>
-              <a:t>walls go, where the plumbing runs, where the wiring lives. Apps are the same - the plan is the architecture.</a:t>
+              <a:t>walls go, where the plumbing runs, where the wiring lives. </a:t>
+            </a:r>
+            <a:endParaRPr lang="en-US" sz="2400" b="0" i="0" dirty="0">
+              <a:solidFill>
+                <a:srgbClr val="111827"/>
+              </a:solidFill>
+            </a:endParaRPr>
+          </a:p>
+          <a:p>
+            <a:pPr marL="342900" indent="-342900" algn="l">
+              <a:spcAft>
+                <a:spcPts val="600"/>
+              </a:spcAft>
+              <a:buFont typeface="Arial" panose="020B0604020202020204" pitchFamily="34" charset="0"/>
+              <a:buChar char="•"/>
+            </a:pPr>
+            <a:r>
+              <a:rPr sz="2400" b="0" i="0" dirty="0">
+                <a:solidFill>
+                  <a:srgbClr val="111827"/>
+                </a:solidFill>
+              </a:rPr>
+              <a:t>Apps are the same - the plan is the architecture.</a:t>
             </a:r>
           </a:p>
         </p:txBody>
@@ -47584,7 +48597,7 @@
         </p:nvSpPr>
         <p:spPr>
           <a:xfrm>
-            <a:off x="457200" y="2257344"/>
+            <a:off x="457200" y="2485948"/>
             <a:ext cx="11247120" cy="731520"/>
           </a:xfrm>
           <a:prstGeom prst="roundRect">
@@ -47630,7 +48643,7 @@
         </p:nvSpPr>
         <p:spPr>
           <a:xfrm>
-            <a:off x="640080" y="2421936"/>
+            <a:off x="640080" y="2650540"/>
             <a:ext cx="2651760" cy="461665"/>
           </a:xfrm>
           <a:prstGeom prst="rect">
@@ -47664,7 +48677,7 @@
         </p:nvSpPr>
         <p:spPr>
           <a:xfrm>
-            <a:off x="3291840" y="2504232"/>
+            <a:off x="3291840" y="2732836"/>
             <a:ext cx="457200" cy="237744"/>
           </a:xfrm>
           <a:prstGeom prst="rightArrow">
@@ -47708,8 +48721,8 @@
         </p:nvSpPr>
         <p:spPr>
           <a:xfrm>
-            <a:off x="3931920" y="2403648"/>
-            <a:ext cx="3108960" cy="400110"/>
+            <a:off x="3931920" y="2632252"/>
+            <a:ext cx="3108960" cy="461665"/>
           </a:xfrm>
           <a:prstGeom prst="rect">
             <a:avLst/>
@@ -47724,7 +48737,7 @@
           <a:p>
             <a:pPr algn="l"/>
             <a:r>
-              <a:rPr sz="2000" b="1" i="0" dirty="0">
+              <a:rPr sz="2400" b="1" i="0" dirty="0">
                 <a:solidFill>
                   <a:srgbClr val="2563EB"/>
                 </a:solidFill>
@@ -47742,8 +48755,8 @@
         </p:nvSpPr>
         <p:spPr>
           <a:xfrm>
-            <a:off x="7040880" y="2326400"/>
-            <a:ext cx="4572000" cy="707886"/>
+            <a:off x="7040880" y="2446716"/>
+            <a:ext cx="4572000" cy="830997"/>
           </a:xfrm>
           <a:prstGeom prst="rect">
             <a:avLst/>
@@ -47758,11 +48771,7 @@
           <a:p>
             <a:pPr algn="l"/>
             <a:r>
-              <a:rPr sz="2000" b="0" i="0" dirty="0">
-                <a:solidFill>
-                  <a:srgbClr val="6B7280"/>
-                </a:solidFill>
-              </a:rPr>
+              <a:rPr sz="2400" b="0" i="0" dirty="0"/>
               <a:t>Expo / React Native - chosen once, everything sits on top.</a:t>
             </a:r>
           </a:p>
@@ -47776,7 +48785,7 @@
         </p:nvSpPr>
         <p:spPr>
           <a:xfrm>
-            <a:off x="457200" y="3098592"/>
+            <a:off x="457200" y="3327196"/>
             <a:ext cx="11247120" cy="731520"/>
           </a:xfrm>
           <a:prstGeom prst="roundRect">
@@ -47822,7 +48831,7 @@
         </p:nvSpPr>
         <p:spPr>
           <a:xfrm>
-            <a:off x="640080" y="3263184"/>
+            <a:off x="640080" y="3491788"/>
             <a:ext cx="2651760" cy="461665"/>
           </a:xfrm>
           <a:prstGeom prst="rect">
@@ -47856,7 +48865,7 @@
         </p:nvSpPr>
         <p:spPr>
           <a:xfrm>
-            <a:off x="3291840" y="3345480"/>
+            <a:off x="3291840" y="3574084"/>
             <a:ext cx="457200" cy="237744"/>
           </a:xfrm>
           <a:prstGeom prst="rightArrow">
@@ -47900,22 +48909,22 @@
         </p:nvSpPr>
         <p:spPr>
           <a:xfrm>
-            <a:off x="3931920" y="3135712"/>
-            <a:ext cx="3108960" cy="707886"/>
-          </a:xfrm>
-          <a:prstGeom prst="rect">
-            <a:avLst/>
-          </a:prstGeom>
-          <a:noFill/>
-        </p:spPr>
-        <p:txBody>
-          <a:bodyPr wrap="square">
-            <a:spAutoFit/>
-          </a:bodyPr>
-          <a:lstStyle/>
-          <a:p>
-            <a:r>
-              <a:rPr sz="2000" b="1" i="0" dirty="0">
+            <a:off x="3931920" y="3299001"/>
+            <a:ext cx="3108960" cy="830997"/>
+          </a:xfrm>
+          <a:prstGeom prst="rect">
+            <a:avLst/>
+          </a:prstGeom>
+          <a:noFill/>
+        </p:spPr>
+        <p:txBody>
+          <a:bodyPr wrap="square">
+            <a:spAutoFit/>
+          </a:bodyPr>
+          <a:lstStyle/>
+          <a:p>
+            <a:r>
+              <a:rPr sz="2400" b="1" i="0" dirty="0">
                 <a:solidFill>
                   <a:srgbClr val="2563EB"/>
                 </a:solidFill>
@@ -47933,8 +48942,8 @@
         </p:nvSpPr>
         <p:spPr>
           <a:xfrm>
-            <a:off x="7040880" y="3167648"/>
-            <a:ext cx="4572000" cy="707886"/>
+            <a:off x="7040880" y="3287964"/>
+            <a:ext cx="4572000" cy="830997"/>
           </a:xfrm>
           <a:prstGeom prst="rect">
             <a:avLst/>
@@ -47949,11 +48958,7 @@
           <a:p>
             <a:pPr algn="l"/>
             <a:r>
-              <a:rPr sz="2000" b="0" i="0" dirty="0">
-                <a:solidFill>
-                  <a:srgbClr val="6B7280"/>
-                </a:solidFill>
-              </a:rPr>
+              <a:rPr sz="2400" b="0" i="0" dirty="0"/>
               <a:t>Home, Courses, Settings - separated by what they do.</a:t>
             </a:r>
           </a:p>
@@ -47967,7 +48972,7 @@
         </p:nvSpPr>
         <p:spPr>
           <a:xfrm>
-            <a:off x="457200" y="3939840"/>
+            <a:off x="457200" y="4168444"/>
             <a:ext cx="11247120" cy="731520"/>
           </a:xfrm>
           <a:prstGeom prst="roundRect">
@@ -48013,7 +49018,7 @@
         </p:nvSpPr>
         <p:spPr>
           <a:xfrm>
-            <a:off x="640080" y="4104432"/>
+            <a:off x="640080" y="4333036"/>
             <a:ext cx="2651760" cy="461665"/>
           </a:xfrm>
           <a:prstGeom prst="rect">
@@ -48047,7 +49052,7 @@
         </p:nvSpPr>
         <p:spPr>
           <a:xfrm>
-            <a:off x="3291840" y="4186728"/>
+            <a:off x="3291840" y="4415332"/>
             <a:ext cx="457200" cy="237744"/>
           </a:xfrm>
           <a:prstGeom prst="rightArrow">
@@ -48091,8 +49096,8 @@
         </p:nvSpPr>
         <p:spPr>
           <a:xfrm>
-            <a:off x="3931920" y="4127088"/>
-            <a:ext cx="3108960" cy="400110"/>
+            <a:off x="3931920" y="4355692"/>
+            <a:ext cx="3108960" cy="461665"/>
           </a:xfrm>
           <a:prstGeom prst="rect">
             <a:avLst/>
@@ -48107,7 +49112,7 @@
           <a:p>
             <a:pPr algn="l"/>
             <a:r>
-              <a:rPr sz="2000" b="1" i="0" dirty="0">
+              <a:rPr sz="2400" b="1" i="0" dirty="0">
                 <a:solidFill>
                   <a:srgbClr val="2563EB"/>
                 </a:solidFill>
@@ -48125,8 +49130,8 @@
         </p:nvSpPr>
         <p:spPr>
           <a:xfrm>
-            <a:off x="7040880" y="4008896"/>
-            <a:ext cx="4572000" cy="707886"/>
+            <a:off x="7040880" y="4129212"/>
+            <a:ext cx="4572000" cy="830997"/>
           </a:xfrm>
           <a:prstGeom prst="rect">
             <a:avLst/>
@@ -48141,11 +49146,7 @@
           <a:p>
             <a:pPr algn="l"/>
             <a:r>
-              <a:rPr sz="2000" b="0" i="0" dirty="0">
-                <a:solidFill>
-                  <a:srgbClr val="6B7280"/>
-                </a:solidFill>
-              </a:rPr>
+              <a:rPr sz="2400" b="0" i="0" dirty="0"/>
               <a:t>How information travels from a server to a screen and back.</a:t>
             </a:r>
           </a:p>
@@ -48159,7 +49160,7 @@
         </p:nvSpPr>
         <p:spPr>
           <a:xfrm>
-            <a:off x="457200" y="4781088"/>
+            <a:off x="457200" y="5009692"/>
             <a:ext cx="11247120" cy="731520"/>
           </a:xfrm>
           <a:prstGeom prst="roundRect">
@@ -48205,7 +49206,7 @@
         </p:nvSpPr>
         <p:spPr>
           <a:xfrm>
-            <a:off x="640080" y="4945680"/>
+            <a:off x="640080" y="5174284"/>
             <a:ext cx="2651760" cy="461665"/>
           </a:xfrm>
           <a:prstGeom prst="rect">
@@ -48239,7 +49240,7 @@
         </p:nvSpPr>
         <p:spPr>
           <a:xfrm>
-            <a:off x="3291840" y="5027976"/>
+            <a:off x="3291840" y="5256580"/>
             <a:ext cx="457200" cy="237744"/>
           </a:xfrm>
           <a:prstGeom prst="rightArrow">
@@ -48283,8 +49284,8 @@
         </p:nvSpPr>
         <p:spPr>
           <a:xfrm>
-            <a:off x="3931920" y="4927392"/>
-            <a:ext cx="3108960" cy="400110"/>
+            <a:off x="3931920" y="5155996"/>
+            <a:ext cx="3108960" cy="461665"/>
           </a:xfrm>
           <a:prstGeom prst="rect">
             <a:avLst/>
@@ -48299,7 +49300,7 @@
           <a:p>
             <a:pPr algn="l"/>
             <a:r>
-              <a:rPr sz="2000" b="1" i="0">
+              <a:rPr sz="2400" b="1" i="0">
                 <a:solidFill>
                   <a:srgbClr val="2563EB"/>
                 </a:solidFill>
@@ -48317,8 +49318,8 @@
         </p:nvSpPr>
         <p:spPr>
           <a:xfrm>
-            <a:off x="7040880" y="4863792"/>
-            <a:ext cx="4572000" cy="707886"/>
+            <a:off x="7040880" y="4984108"/>
+            <a:ext cx="4572000" cy="830997"/>
           </a:xfrm>
           <a:prstGeom prst="rect">
             <a:avLst/>
@@ -48333,11 +49334,7 @@
           <a:p>
             <a:pPr algn="l"/>
             <a:r>
-              <a:rPr sz="2000" b="0" i="0" dirty="0">
-                <a:solidFill>
-                  <a:srgbClr val="6B7280"/>
-                </a:solidFill>
-              </a:rPr>
+              <a:rPr sz="2400" b="0" i="0" dirty="0"/>
               <a:t>The hidden connections that make one change update many screens.</a:t>
             </a:r>
           </a:p>
@@ -48351,7 +49348,7 @@
         </p:nvSpPr>
         <p:spPr>
           <a:xfrm>
-            <a:off x="457200" y="5622336"/>
+            <a:off x="457200" y="5850940"/>
             <a:ext cx="11247120" cy="731520"/>
           </a:xfrm>
           <a:prstGeom prst="roundRect">
@@ -48397,7 +49394,7 @@
         </p:nvSpPr>
         <p:spPr>
           <a:xfrm>
-            <a:off x="640080" y="5786928"/>
+            <a:off x="640080" y="6015532"/>
             <a:ext cx="2651760" cy="461665"/>
           </a:xfrm>
           <a:prstGeom prst="rect">
@@ -48431,7 +49428,7 @@
         </p:nvSpPr>
         <p:spPr>
           <a:xfrm>
-            <a:off x="3291840" y="5869224"/>
+            <a:off x="3291840" y="6097828"/>
             <a:ext cx="457200" cy="237744"/>
           </a:xfrm>
           <a:prstGeom prst="rightArrow">
@@ -48475,8 +49472,8 @@
         </p:nvSpPr>
         <p:spPr>
           <a:xfrm>
-            <a:off x="3931920" y="5768640"/>
-            <a:ext cx="3108960" cy="400110"/>
+            <a:off x="3931920" y="5997244"/>
+            <a:ext cx="3108960" cy="461665"/>
           </a:xfrm>
           <a:prstGeom prst="rect">
             <a:avLst/>
@@ -48491,7 +49488,7 @@
           <a:p>
             <a:pPr algn="l"/>
             <a:r>
-              <a:rPr sz="2000" b="1" i="0">
+              <a:rPr sz="2400" b="1" i="0">
                 <a:solidFill>
                   <a:srgbClr val="2563EB"/>
                 </a:solidFill>
@@ -48509,8 +49506,8 @@
         </p:nvSpPr>
         <p:spPr>
           <a:xfrm>
-            <a:off x="7040880" y="5705040"/>
-            <a:ext cx="4572000" cy="707886"/>
+            <a:off x="7040880" y="5825356"/>
+            <a:ext cx="4572000" cy="830997"/>
           </a:xfrm>
           <a:prstGeom prst="rect">
             <a:avLst/>
@@ -48525,11 +49522,7 @@
           <a:p>
             <a:pPr algn="l"/>
             <a:r>
-              <a:rPr sz="2000" b="0" i="0">
-                <a:solidFill>
-                  <a:srgbClr val="6B7280"/>
-                </a:solidFill>
-              </a:rPr>
+              <a:rPr sz="2400" b="0" i="0"/>
               <a:t>Who is allowed in, and what they are allowed to touch.</a:t>
             </a:r>
           </a:p>
@@ -48543,8 +49536,8 @@
         </p:nvSpPr>
         <p:spPr>
           <a:xfrm>
-            <a:off x="10515600" y="6510528"/>
-            <a:ext cx="1280160" cy="274320"/>
+            <a:off x="10515600" y="6630846"/>
+            <a:ext cx="1280160" cy="230832"/>
           </a:xfrm>
           <a:prstGeom prst="rect">
             <a:avLst/>
@@ -48559,9 +49552,9 @@
           <a:p>
             <a:pPr algn="r"/>
             <a:r>
-              <a:rPr sz="900" b="0" i="0">
-                <a:solidFill>
-                  <a:srgbClr val="6B7280"/>
+              <a:rPr sz="900" b="1" i="0" dirty="0">
+                <a:solidFill>
+                  <a:srgbClr val="FFC000"/>
                 </a:solidFill>
               </a:rPr>
               <a:t>6 / 46</a:t>
@@ -48758,1015 +49751,489 @@
       </p:sp>
       <p:sp>
         <p:nvSpPr>
-          <p:cNvPr id="6" name="TextBox 5"/>
-          <p:cNvSpPr txBox="1"/>
-          <p:nvPr/>
-        </p:nvSpPr>
-        <p:spPr>
-          <a:xfrm>
-            <a:off x="457200" y="1397535"/>
-            <a:ext cx="5486400" cy="461665"/>
-          </a:xfrm>
-          <a:prstGeom prst="rect">
-            <a:avLst/>
-          </a:prstGeom>
-          <a:noFill/>
-        </p:spPr>
-        <p:txBody>
-          <a:bodyPr wrap="square">
-            <a:spAutoFit/>
-          </a:bodyPr>
-          <a:lstStyle/>
-          <a:p>
-            <a:pPr algn="l"/>
-            <a:r>
-              <a:rPr sz="2400" b="1" i="0">
-                <a:solidFill>
-                  <a:srgbClr val="DC2626"/>
-                </a:solidFill>
-              </a:rPr>
-              <a:t>Without architecture</a:t>
-            </a:r>
-          </a:p>
-        </p:txBody>
-      </p:sp>
-      <p:sp>
-        <p:nvSpPr>
-          <p:cNvPr id="7" name="Rounded Rectangle 6"/>
+          <p:cNvPr id="33" name="TextBox 32"/>
+          <p:cNvSpPr txBox="1"/>
+          <p:nvPr/>
+        </p:nvSpPr>
+        <p:spPr>
+          <a:xfrm>
+            <a:off x="10515600" y="6387696"/>
+            <a:ext cx="1280160" cy="230832"/>
+          </a:xfrm>
+          <a:prstGeom prst="rect">
+            <a:avLst/>
+          </a:prstGeom>
+          <a:noFill/>
+        </p:spPr>
+        <p:txBody>
+          <a:bodyPr wrap="square">
+            <a:spAutoFit/>
+          </a:bodyPr>
+          <a:lstStyle/>
+          <a:p>
+            <a:pPr algn="r"/>
+            <a:r>
+              <a:rPr sz="900" b="1" i="0" dirty="0">
+                <a:solidFill>
+                  <a:srgbClr val="FFC000"/>
+                </a:solidFill>
+              </a:rPr>
+              <a:t>7 / 46</a:t>
+            </a:r>
+          </a:p>
+        </p:txBody>
+      </p:sp>
+      <p:sp>
+        <p:nvSpPr>
+          <p:cNvPr id="34" name="Shape 2">
+            <a:extLst>
+              <a:ext uri="{FF2B5EF4-FFF2-40B4-BE49-F238E27FC236}">
+                <a16:creationId xmlns:a16="http://schemas.microsoft.com/office/drawing/2014/main" id="{96FECF89-328B-3C61-5733-2EE7A5D1DC23}"/>
+              </a:ext>
+            </a:extLst>
+          </p:cNvPr>
           <p:cNvSpPr/>
           <p:nvPr/>
         </p:nvSpPr>
         <p:spPr>
           <a:xfrm>
-            <a:off x="457200" y="1991211"/>
-            <a:ext cx="5486400" cy="1024128"/>
+            <a:off x="640080" y="1619455"/>
+            <a:ext cx="5303520" cy="4608576"/>
           </a:xfrm>
           <a:prstGeom prst="roundRect">
-            <a:avLst/>
+            <a:avLst>
+              <a:gd name="adj" fmla="val 1684"/>
+            </a:avLst>
           </a:prstGeom>
           <a:solidFill>
-            <a:srgbClr val="FFF1F1"/>
+            <a:srgbClr val="FFFFFF"/>
           </a:solidFill>
-          <a:ln w="15875">
+          <a:ln w="12700">
+            <a:solidFill>
+              <a:srgbClr val="DCE3EC"/>
+            </a:solidFill>
+            <a:prstDash val="solid"/>
+          </a:ln>
+          <a:effectLst>
+            <a:outerShdw blurRad="15240" dist="6350" dir="2700000" algn="bl" rotWithShape="0">
+              <a:srgbClr val="000000">
+                <a:alpha val="12000"/>
+              </a:srgbClr>
+            </a:outerShdw>
+          </a:effectLst>
+        </p:spPr>
+        <p:txBody>
+          <a:bodyPr/>
+          <a:lstStyle/>
+          <a:p>
+            <a:endParaRPr lang="en-US" sz="2400"/>
+          </a:p>
+        </p:txBody>
+      </p:sp>
+      <p:sp>
+        <p:nvSpPr>
+          <p:cNvPr id="36" name="Shape 3">
+            <a:extLst>
+              <a:ext uri="{FF2B5EF4-FFF2-40B4-BE49-F238E27FC236}">
+                <a16:creationId xmlns:a16="http://schemas.microsoft.com/office/drawing/2014/main" id="{1A22F644-2FD8-7D5C-0908-B90FB1BA7EBB}"/>
+              </a:ext>
+            </a:extLst>
+          </p:cNvPr>
+          <p:cNvSpPr/>
+          <p:nvPr/>
+        </p:nvSpPr>
+        <p:spPr>
+          <a:xfrm>
+            <a:off x="640080" y="1619455"/>
+            <a:ext cx="45719" cy="4608576"/>
+          </a:xfrm>
+          <a:prstGeom prst="rect">
+            <a:avLst/>
+          </a:prstGeom>
+          <a:solidFill>
+            <a:srgbClr val="DC2626"/>
+          </a:solidFill>
+          <a:ln w="12700">
             <a:solidFill>
               <a:srgbClr val="DC2626"/>
             </a:solidFill>
+            <a:prstDash val="solid"/>
           </a:ln>
         </p:spPr>
-        <p:style>
-          <a:lnRef idx="1">
-            <a:schemeClr val="accent1"/>
-          </a:lnRef>
-          <a:fillRef idx="3">
-            <a:schemeClr val="accent1"/>
-          </a:fillRef>
-          <a:effectRef idx="2">
-            <a:schemeClr val="accent1"/>
-          </a:effectRef>
-          <a:fontRef idx="minor">
-            <a:schemeClr val="lt1"/>
-          </a:fontRef>
-        </p:style>
-        <p:txBody>
-          <a:bodyPr rtlCol="0" anchor="ctr"/>
+        <p:txBody>
+          <a:bodyPr/>
+          <a:lstStyle/>
+          <a:p>
+            <a:endParaRPr lang="en-US" sz="2400"/>
+          </a:p>
+        </p:txBody>
+      </p:sp>
+      <p:sp>
+        <p:nvSpPr>
+          <p:cNvPr id="38" name="Text 4">
+            <a:extLst>
+              <a:ext uri="{FF2B5EF4-FFF2-40B4-BE49-F238E27FC236}">
+                <a16:creationId xmlns:a16="http://schemas.microsoft.com/office/drawing/2014/main" id="{8D7B2768-2C2F-DEE4-3D1E-74A682BF61F8}"/>
+              </a:ext>
+            </a:extLst>
+          </p:cNvPr>
+          <p:cNvSpPr/>
+          <p:nvPr/>
+        </p:nvSpPr>
+        <p:spPr>
+          <a:xfrm>
+            <a:off x="868680" y="1784047"/>
+            <a:ext cx="4937760" cy="320040"/>
+          </a:xfrm>
+          <a:prstGeom prst="rect">
+            <a:avLst/>
+          </a:prstGeom>
+          <a:noFill/>
+          <a:ln/>
+        </p:spPr>
+        <p:txBody>
+          <a:bodyPr wrap="square" lIns="0" tIns="0" rIns="0" bIns="0" rtlCol="0" anchor="ctr"/>
           <a:lstStyle/>
           <a:p>
             <a:pPr algn="ctr"/>
-            <a:endParaRPr sz="3600"/>
-          </a:p>
-        </p:txBody>
-      </p:sp>
-      <p:sp>
-        <p:nvSpPr>
-          <p:cNvPr id="8" name="TextBox 7"/>
-          <p:cNvSpPr txBox="1"/>
-          <p:nvPr/>
-        </p:nvSpPr>
-        <p:spPr>
-          <a:xfrm>
-            <a:off x="640080" y="1946171"/>
-            <a:ext cx="5120640" cy="461665"/>
-          </a:xfrm>
-          <a:prstGeom prst="rect">
-            <a:avLst/>
-          </a:prstGeom>
-          <a:noFill/>
-        </p:spPr>
-        <p:txBody>
-          <a:bodyPr wrap="square">
-            <a:spAutoFit/>
-          </a:bodyPr>
-          <a:lstStyle/>
-          <a:p>
-            <a:pPr algn="l"/>
-            <a:r>
-              <a:rPr sz="2400" b="1" i="0" dirty="0">
+            <a:r>
+              <a:rPr lang="en-US" sz="2800" b="1" dirty="0">
                 <a:solidFill>
                   <a:srgbClr val="DC2626"/>
                 </a:solidFill>
               </a:rPr>
-              <a:t>-  Change becomes scary</a:t>
-            </a:r>
-          </a:p>
-        </p:txBody>
-      </p:sp>
-      <p:sp>
-        <p:nvSpPr>
-          <p:cNvPr id="9" name="TextBox 8"/>
-          <p:cNvSpPr txBox="1"/>
-          <p:nvPr/>
-        </p:nvSpPr>
-        <p:spPr>
-          <a:xfrm>
-            <a:off x="640080" y="2311931"/>
-            <a:ext cx="5120640" cy="707886"/>
-          </a:xfrm>
-          <a:prstGeom prst="rect">
-            <a:avLst/>
-          </a:prstGeom>
-          <a:noFill/>
-        </p:spPr>
-        <p:txBody>
-          <a:bodyPr wrap="square">
-            <a:spAutoFit/>
-          </a:bodyPr>
-          <a:lstStyle/>
-          <a:p>
-            <a:pPr algn="l"/>
-            <a:r>
-              <a:rPr sz="2000" b="0" i="0" dirty="0">
+              <a:t>WITHOUT ARCHITECTURE</a:t>
+            </a:r>
+            <a:endParaRPr lang="en-US" sz="2800" dirty="0"/>
+          </a:p>
+        </p:txBody>
+      </p:sp>
+      <p:sp>
+        <p:nvSpPr>
+          <p:cNvPr id="40" name="Text 5">
+            <a:extLst>
+              <a:ext uri="{FF2B5EF4-FFF2-40B4-BE49-F238E27FC236}">
+                <a16:creationId xmlns:a16="http://schemas.microsoft.com/office/drawing/2014/main" id="{FA47B7E2-2A99-6E82-5397-0BA5173C4E3E}"/>
+              </a:ext>
+            </a:extLst>
+          </p:cNvPr>
+          <p:cNvSpPr/>
+          <p:nvPr/>
+        </p:nvSpPr>
+        <p:spPr>
+          <a:xfrm>
+            <a:off x="868680" y="2186383"/>
+            <a:ext cx="4864608" cy="3630168"/>
+          </a:xfrm>
+          <a:prstGeom prst="rect">
+            <a:avLst/>
+          </a:prstGeom>
+          <a:noFill/>
+          <a:ln/>
+        </p:spPr>
+        <p:txBody>
+          <a:bodyPr wrap="square" lIns="0" tIns="0" rIns="0" bIns="0" rtlCol="0" anchor="t">
+            <a:noAutofit/>
+          </a:bodyPr>
+          <a:lstStyle/>
+          <a:p>
+            <a:pPr marL="457200" indent="-457200">
+              <a:spcAft>
+                <a:spcPts val="1800"/>
+              </a:spcAft>
+              <a:buFont typeface="Arial" panose="020B0604020202020204" pitchFamily="34" charset="0"/>
+              <a:buChar char="•"/>
+            </a:pPr>
+            <a:r>
+              <a:rPr lang="en-US" sz="2600" dirty="0">
                 <a:solidFill>
                   <a:srgbClr val="111827"/>
                 </a:solidFill>
               </a:rPr>
-              <a:t>One feature touches ten files because nothing has a clear home.</a:t>
-            </a:r>
-          </a:p>
-        </p:txBody>
-      </p:sp>
-      <p:sp>
-        <p:nvSpPr>
-          <p:cNvPr id="10" name="Rounded Rectangle 9"/>
+              <a:t>Changes spread across many files</a:t>
+            </a:r>
+            <a:endParaRPr lang="en-US" sz="2600" dirty="0"/>
+          </a:p>
+          <a:p>
+            <a:pPr marL="457200" indent="-457200">
+              <a:spcAft>
+                <a:spcPts val="1800"/>
+              </a:spcAft>
+              <a:buFont typeface="Arial" panose="020B0604020202020204" pitchFamily="34" charset="0"/>
+              <a:buChar char="•"/>
+            </a:pPr>
+            <a:r>
+              <a:rPr lang="en-US" sz="2600" dirty="0">
+                <a:solidFill>
+                  <a:srgbClr val="111827"/>
+                </a:solidFill>
+              </a:rPr>
+              <a:t>Data is duplicated or inconsistent</a:t>
+            </a:r>
+            <a:endParaRPr lang="en-US" sz="2600" dirty="0"/>
+          </a:p>
+          <a:p>
+            <a:pPr marL="457200" indent="-457200">
+              <a:spcAft>
+                <a:spcPts val="1800"/>
+              </a:spcAft>
+              <a:buFont typeface="Arial" panose="020B0604020202020204" pitchFamily="34" charset="0"/>
+              <a:buChar char="•"/>
+            </a:pPr>
+            <a:r>
+              <a:rPr lang="en-US" sz="2600" dirty="0">
+                <a:solidFill>
+                  <a:srgbClr val="111827"/>
+                </a:solidFill>
+              </a:rPr>
+              <a:t>New teammates cannot find responsibilities</a:t>
+            </a:r>
+            <a:endParaRPr lang="en-US" sz="2600" dirty="0"/>
+          </a:p>
+          <a:p>
+            <a:pPr marL="457200" indent="-457200">
+              <a:spcAft>
+                <a:spcPts val="1800"/>
+              </a:spcAft>
+              <a:buFont typeface="Arial" panose="020B0604020202020204" pitchFamily="34" charset="0"/>
+              <a:buChar char="•"/>
+            </a:pPr>
+            <a:r>
+              <a:rPr lang="en-US" sz="2600" dirty="0">
+                <a:solidFill>
+                  <a:srgbClr val="111827"/>
+                </a:solidFill>
+              </a:rPr>
+              <a:t>Secrets and rules leak into the client</a:t>
+            </a:r>
+            <a:endParaRPr lang="en-US" sz="2600" dirty="0"/>
+          </a:p>
+        </p:txBody>
+      </p:sp>
+      <p:sp>
+        <p:nvSpPr>
+          <p:cNvPr id="42" name="Shape 6">
+            <a:extLst>
+              <a:ext uri="{FF2B5EF4-FFF2-40B4-BE49-F238E27FC236}">
+                <a16:creationId xmlns:a16="http://schemas.microsoft.com/office/drawing/2014/main" id="{F1CBBE98-C089-3302-84CE-BCF20E7B0AC8}"/>
+              </a:ext>
+            </a:extLst>
+          </p:cNvPr>
           <p:cNvSpPr/>
           <p:nvPr/>
         </p:nvSpPr>
         <p:spPr>
           <a:xfrm>
-            <a:off x="457200" y="3025163"/>
-            <a:ext cx="5486400" cy="1024128"/>
+            <a:off x="6263640" y="1619455"/>
+            <a:ext cx="5303520" cy="4608576"/>
           </a:xfrm>
           <a:prstGeom prst="roundRect">
-            <a:avLst/>
+            <a:avLst>
+              <a:gd name="adj" fmla="val 1684"/>
+            </a:avLst>
           </a:prstGeom>
           <a:solidFill>
-            <a:srgbClr val="FFF1F1"/>
+            <a:srgbClr val="FFFFFF"/>
           </a:solidFill>
-          <a:ln w="15875">
+          <a:ln w="12700">
             <a:solidFill>
-              <a:srgbClr val="DC2626"/>
+              <a:srgbClr val="DCE3EC"/>
             </a:solidFill>
+            <a:prstDash val="solid"/>
           </a:ln>
-        </p:spPr>
-        <p:style>
-          <a:lnRef idx="1">
-            <a:schemeClr val="accent1"/>
-          </a:lnRef>
-          <a:fillRef idx="3">
-            <a:schemeClr val="accent1"/>
-          </a:fillRef>
-          <a:effectRef idx="2">
-            <a:schemeClr val="accent1"/>
-          </a:effectRef>
-          <a:fontRef idx="minor">
-            <a:schemeClr val="lt1"/>
-          </a:fontRef>
-        </p:style>
-        <p:txBody>
-          <a:bodyPr rtlCol="0" anchor="ctr"/>
-          <a:lstStyle/>
-          <a:p>
-            <a:pPr algn="ctr"/>
-            <a:endParaRPr sz="3600"/>
-          </a:p>
-        </p:txBody>
-      </p:sp>
-      <p:sp>
-        <p:nvSpPr>
-          <p:cNvPr id="11" name="TextBox 10"/>
-          <p:cNvSpPr txBox="1"/>
-          <p:nvPr/>
-        </p:nvSpPr>
-        <p:spPr>
-          <a:xfrm>
-            <a:off x="640080" y="2980123"/>
-            <a:ext cx="5120640" cy="461665"/>
-          </a:xfrm>
-          <a:prstGeom prst="rect">
-            <a:avLst/>
-          </a:prstGeom>
-          <a:noFill/>
-        </p:spPr>
-        <p:txBody>
-          <a:bodyPr wrap="square">
-            <a:spAutoFit/>
-          </a:bodyPr>
-          <a:lstStyle/>
-          <a:p>
-            <a:pPr algn="l"/>
-            <a:r>
-              <a:rPr sz="2400" b="1" i="0" dirty="0">
-                <a:solidFill>
-                  <a:srgbClr val="DC2626"/>
-                </a:solidFill>
-              </a:rPr>
-              <a:t>-  Bugs hide</a:t>
-            </a:r>
-          </a:p>
-        </p:txBody>
-      </p:sp>
-      <p:sp>
-        <p:nvSpPr>
-          <p:cNvPr id="12" name="TextBox 11"/>
-          <p:cNvSpPr txBox="1"/>
-          <p:nvPr/>
-        </p:nvSpPr>
-        <p:spPr>
-          <a:xfrm>
-            <a:off x="640080" y="3345883"/>
-            <a:ext cx="5120640" cy="707886"/>
-          </a:xfrm>
-          <a:prstGeom prst="rect">
-            <a:avLst/>
-          </a:prstGeom>
-          <a:noFill/>
-        </p:spPr>
-        <p:txBody>
-          <a:bodyPr wrap="square">
-            <a:spAutoFit/>
-          </a:bodyPr>
-          <a:lstStyle/>
-          <a:p>
-            <a:pPr algn="l"/>
-            <a:r>
-              <a:rPr sz="2000" b="0" i="0" dirty="0">
-                <a:solidFill>
-                  <a:srgbClr val="111827"/>
-                </a:solidFill>
-              </a:rPr>
-              <a:t>Data is fetched, stored &amp; validated in five places, so no one place is right.</a:t>
-            </a:r>
-          </a:p>
-        </p:txBody>
-      </p:sp>
-      <p:sp>
-        <p:nvSpPr>
-          <p:cNvPr id="13" name="Rounded Rectangle 12"/>
+          <a:effectLst>
+            <a:outerShdw blurRad="15240" dist="6350" dir="2700000" algn="bl" rotWithShape="0">
+              <a:srgbClr val="000000">
+                <a:alpha val="12000"/>
+              </a:srgbClr>
+            </a:outerShdw>
+          </a:effectLst>
+        </p:spPr>
+        <p:txBody>
+          <a:bodyPr/>
+          <a:lstStyle/>
+          <a:p>
+            <a:endParaRPr lang="en-US" sz="2400"/>
+          </a:p>
+        </p:txBody>
+      </p:sp>
+      <p:sp>
+        <p:nvSpPr>
+          <p:cNvPr id="44" name="Shape 7">
+            <a:extLst>
+              <a:ext uri="{FF2B5EF4-FFF2-40B4-BE49-F238E27FC236}">
+                <a16:creationId xmlns:a16="http://schemas.microsoft.com/office/drawing/2014/main" id="{10992A7E-414C-D007-F54D-18730D59431C}"/>
+              </a:ext>
+            </a:extLst>
+          </p:cNvPr>
           <p:cNvSpPr/>
           <p:nvPr/>
         </p:nvSpPr>
         <p:spPr>
           <a:xfrm>
-            <a:off x="457200" y="4195595"/>
-            <a:ext cx="5486400" cy="1024128"/>
-          </a:xfrm>
-          <a:prstGeom prst="roundRect">
+            <a:off x="6263640" y="1619455"/>
+            <a:ext cx="45719" cy="4608576"/>
+          </a:xfrm>
+          <a:prstGeom prst="rect">
             <a:avLst/>
           </a:prstGeom>
           <a:solidFill>
-            <a:srgbClr val="FFF1F1"/>
+            <a:srgbClr val="16A34A"/>
           </a:solidFill>
-          <a:ln w="15875">
-            <a:solidFill>
-              <a:srgbClr val="DC2626"/>
-            </a:solidFill>
-          </a:ln>
-        </p:spPr>
-        <p:style>
-          <a:lnRef idx="1">
-            <a:schemeClr val="accent1"/>
-          </a:lnRef>
-          <a:fillRef idx="3">
-            <a:schemeClr val="accent1"/>
-          </a:fillRef>
-          <a:effectRef idx="2">
-            <a:schemeClr val="accent1"/>
-          </a:effectRef>
-          <a:fontRef idx="minor">
-            <a:schemeClr val="lt1"/>
-          </a:fontRef>
-        </p:style>
-        <p:txBody>
-          <a:bodyPr rtlCol="0" anchor="ctr"/>
-          <a:lstStyle/>
-          <a:p>
-            <a:pPr algn="ctr"/>
-            <a:endParaRPr sz="3600"/>
-          </a:p>
-        </p:txBody>
-      </p:sp>
-      <p:sp>
-        <p:nvSpPr>
-          <p:cNvPr id="14" name="TextBox 13"/>
-          <p:cNvSpPr txBox="1"/>
-          <p:nvPr/>
-        </p:nvSpPr>
-        <p:spPr>
-          <a:xfrm>
-            <a:off x="640080" y="4150554"/>
-            <a:ext cx="5120640" cy="461665"/>
-          </a:xfrm>
-          <a:prstGeom prst="rect">
-            <a:avLst/>
-          </a:prstGeom>
-          <a:noFill/>
-        </p:spPr>
-        <p:txBody>
-          <a:bodyPr wrap="square">
-            <a:spAutoFit/>
-          </a:bodyPr>
-          <a:lstStyle/>
-          <a:p>
-            <a:pPr algn="l"/>
-            <a:r>
-              <a:rPr sz="2400" b="1" i="0" dirty="0">
-                <a:solidFill>
-                  <a:srgbClr val="DC2626"/>
-                </a:solidFill>
-              </a:rPr>
-              <a:t>-  You can't add people</a:t>
-            </a:r>
-          </a:p>
-        </p:txBody>
-      </p:sp>
-      <p:sp>
-        <p:nvSpPr>
-          <p:cNvPr id="15" name="TextBox 14"/>
-          <p:cNvSpPr txBox="1"/>
-          <p:nvPr/>
-        </p:nvSpPr>
-        <p:spPr>
-          <a:xfrm>
-            <a:off x="640080" y="4516315"/>
-            <a:ext cx="5120640" cy="707886"/>
-          </a:xfrm>
-          <a:prstGeom prst="rect">
-            <a:avLst/>
-          </a:prstGeom>
-          <a:noFill/>
-        </p:spPr>
-        <p:txBody>
-          <a:bodyPr wrap="square">
-            <a:spAutoFit/>
-          </a:bodyPr>
-          <a:lstStyle/>
-          <a:p>
-            <a:pPr algn="l"/>
-            <a:r>
-              <a:rPr sz="2000" b="0" i="0" dirty="0">
-                <a:solidFill>
-                  <a:srgbClr val="111827"/>
-                </a:solidFill>
-              </a:rPr>
-              <a:t>A teammate can't help if only you know where things live.</a:t>
-            </a:r>
-          </a:p>
-        </p:txBody>
-      </p:sp>
-      <p:sp>
-        <p:nvSpPr>
-          <p:cNvPr id="16" name="Rounded Rectangle 15"/>
-          <p:cNvSpPr/>
-          <p:nvPr/>
-        </p:nvSpPr>
-        <p:spPr>
-          <a:xfrm>
-            <a:off x="457200" y="5366027"/>
-            <a:ext cx="5486400" cy="1024128"/>
-          </a:xfrm>
-          <a:prstGeom prst="roundRect">
-            <a:avLst/>
-          </a:prstGeom>
-          <a:solidFill>
-            <a:srgbClr val="FFF1F1"/>
-          </a:solidFill>
-          <a:ln w="15875">
-            <a:solidFill>
-              <a:srgbClr val="DC2626"/>
-            </a:solidFill>
-          </a:ln>
-        </p:spPr>
-        <p:style>
-          <a:lnRef idx="1">
-            <a:schemeClr val="accent1"/>
-          </a:lnRef>
-          <a:fillRef idx="3">
-            <a:schemeClr val="accent1"/>
-          </a:fillRef>
-          <a:effectRef idx="2">
-            <a:schemeClr val="accent1"/>
-          </a:effectRef>
-          <a:fontRef idx="minor">
-            <a:schemeClr val="lt1"/>
-          </a:fontRef>
-        </p:style>
-        <p:txBody>
-          <a:bodyPr rtlCol="0" anchor="ctr"/>
-          <a:lstStyle/>
-          <a:p>
-            <a:pPr algn="ctr"/>
-            <a:endParaRPr sz="3600"/>
-          </a:p>
-        </p:txBody>
-      </p:sp>
-      <p:sp>
-        <p:nvSpPr>
-          <p:cNvPr id="17" name="TextBox 16"/>
-          <p:cNvSpPr txBox="1"/>
-          <p:nvPr/>
-        </p:nvSpPr>
-        <p:spPr>
-          <a:xfrm>
-            <a:off x="640080" y="5348283"/>
-            <a:ext cx="5120640" cy="461665"/>
-          </a:xfrm>
-          <a:prstGeom prst="rect">
-            <a:avLst/>
-          </a:prstGeom>
-          <a:noFill/>
-        </p:spPr>
-        <p:txBody>
-          <a:bodyPr wrap="square">
-            <a:spAutoFit/>
-          </a:bodyPr>
-          <a:lstStyle/>
-          <a:p>
-            <a:pPr algn="l"/>
-            <a:r>
-              <a:rPr sz="2400" b="1" i="0" dirty="0">
-                <a:solidFill>
-                  <a:srgbClr val="DC2626"/>
-                </a:solidFill>
-              </a:rPr>
-              <a:t>-  Security holes</a:t>
-            </a:r>
-          </a:p>
-        </p:txBody>
-      </p:sp>
-      <p:sp>
-        <p:nvSpPr>
-          <p:cNvPr id="18" name="TextBox 17"/>
-          <p:cNvSpPr txBox="1"/>
-          <p:nvPr/>
-        </p:nvSpPr>
-        <p:spPr>
-          <a:xfrm>
-            <a:off x="640080" y="5714043"/>
-            <a:ext cx="5120640" cy="707886"/>
-          </a:xfrm>
-          <a:prstGeom prst="rect">
-            <a:avLst/>
-          </a:prstGeom>
-          <a:noFill/>
-        </p:spPr>
-        <p:txBody>
-          <a:bodyPr wrap="square">
-            <a:spAutoFit/>
-          </a:bodyPr>
-          <a:lstStyle/>
-          <a:p>
-            <a:pPr algn="l"/>
-            <a:r>
-              <a:rPr sz="2000" b="0" i="0" dirty="0">
-                <a:solidFill>
-                  <a:srgbClr val="111827"/>
-                </a:solidFill>
-              </a:rPr>
-              <a:t>Secrets and logic end up in the app where attackers can read them.</a:t>
-            </a:r>
-          </a:p>
-        </p:txBody>
-      </p:sp>
-      <p:sp>
-        <p:nvSpPr>
-          <p:cNvPr id="19" name="TextBox 18"/>
-          <p:cNvSpPr txBox="1"/>
-          <p:nvPr/>
-        </p:nvSpPr>
-        <p:spPr>
-          <a:xfrm>
-            <a:off x="6263640" y="1397535"/>
-            <a:ext cx="5486400" cy="461665"/>
-          </a:xfrm>
-          <a:prstGeom prst="rect">
-            <a:avLst/>
-          </a:prstGeom>
-          <a:noFill/>
-        </p:spPr>
-        <p:txBody>
-          <a:bodyPr wrap="square">
-            <a:spAutoFit/>
-          </a:bodyPr>
-          <a:lstStyle/>
-          <a:p>
-            <a:pPr algn="l"/>
-            <a:r>
-              <a:rPr sz="2400" b="1" i="0">
-                <a:solidFill>
-                  <a:srgbClr val="16A34A"/>
-                </a:solidFill>
-              </a:rPr>
-              <a:t>With architecture</a:t>
-            </a:r>
-          </a:p>
-        </p:txBody>
-      </p:sp>
-      <p:sp>
-        <p:nvSpPr>
-          <p:cNvPr id="20" name="Rounded Rectangle 19"/>
-          <p:cNvSpPr/>
-          <p:nvPr/>
-        </p:nvSpPr>
-        <p:spPr>
-          <a:xfrm>
-            <a:off x="6263640" y="1991211"/>
-            <a:ext cx="5486400" cy="1024128"/>
-          </a:xfrm>
-          <a:prstGeom prst="roundRect">
-            <a:avLst/>
-          </a:prstGeom>
-          <a:solidFill>
-            <a:srgbClr val="F0FFF4"/>
-          </a:solidFill>
-          <a:ln w="15875">
+          <a:ln w="12700">
             <a:solidFill>
               <a:srgbClr val="16A34A"/>
             </a:solidFill>
+            <a:prstDash val="solid"/>
           </a:ln>
         </p:spPr>
-        <p:style>
-          <a:lnRef idx="1">
-            <a:schemeClr val="accent1"/>
-          </a:lnRef>
-          <a:fillRef idx="3">
-            <a:schemeClr val="accent1"/>
-          </a:fillRef>
-          <a:effectRef idx="2">
-            <a:schemeClr val="accent1"/>
-          </a:effectRef>
-          <a:fontRef idx="minor">
-            <a:schemeClr val="lt1"/>
-          </a:fontRef>
-        </p:style>
-        <p:txBody>
-          <a:bodyPr rtlCol="0" anchor="ctr"/>
+        <p:txBody>
+          <a:bodyPr/>
+          <a:lstStyle/>
+          <a:p>
+            <a:endParaRPr lang="en-US" sz="2400"/>
+          </a:p>
+        </p:txBody>
+      </p:sp>
+      <p:sp>
+        <p:nvSpPr>
+          <p:cNvPr id="46" name="Text 8">
+            <a:extLst>
+              <a:ext uri="{FF2B5EF4-FFF2-40B4-BE49-F238E27FC236}">
+                <a16:creationId xmlns:a16="http://schemas.microsoft.com/office/drawing/2014/main" id="{C058D14D-ABA2-1FCD-C4E5-5CFC3EA4063E}"/>
+              </a:ext>
+            </a:extLst>
+          </p:cNvPr>
+          <p:cNvSpPr/>
+          <p:nvPr/>
+        </p:nvSpPr>
+        <p:spPr>
+          <a:xfrm>
+            <a:off x="6492240" y="1784047"/>
+            <a:ext cx="4937760" cy="320040"/>
+          </a:xfrm>
+          <a:prstGeom prst="rect">
+            <a:avLst/>
+          </a:prstGeom>
+          <a:noFill/>
+          <a:ln/>
+        </p:spPr>
+        <p:txBody>
+          <a:bodyPr wrap="square" lIns="0" tIns="0" rIns="0" bIns="0" rtlCol="0" anchor="ctr"/>
           <a:lstStyle/>
           <a:p>
             <a:pPr algn="ctr"/>
-            <a:endParaRPr sz="3600"/>
-          </a:p>
-        </p:txBody>
-      </p:sp>
-      <p:sp>
-        <p:nvSpPr>
-          <p:cNvPr id="21" name="TextBox 20"/>
-          <p:cNvSpPr txBox="1"/>
-          <p:nvPr/>
-        </p:nvSpPr>
-        <p:spPr>
-          <a:xfrm>
-            <a:off x="6446520" y="1946171"/>
-            <a:ext cx="5120640" cy="461665"/>
-          </a:xfrm>
-          <a:prstGeom prst="rect">
-            <a:avLst/>
-          </a:prstGeom>
-          <a:noFill/>
-        </p:spPr>
-        <p:txBody>
-          <a:bodyPr wrap="square">
-            <a:spAutoFit/>
-          </a:bodyPr>
-          <a:lstStyle/>
-          <a:p>
-            <a:pPr algn="l"/>
-            <a:r>
-              <a:rPr sz="2400" b="1" i="0">
+            <a:r>
+              <a:rPr lang="en-US" sz="2800" b="1" dirty="0">
                 <a:solidFill>
                   <a:srgbClr val="16A34A"/>
                 </a:solidFill>
               </a:rPr>
-              <a:t>+  Change is local</a:t>
-            </a:r>
-          </a:p>
-        </p:txBody>
-      </p:sp>
-      <p:sp>
-        <p:nvSpPr>
-          <p:cNvPr id="22" name="TextBox 21"/>
-          <p:cNvSpPr txBox="1"/>
-          <p:nvPr/>
-        </p:nvSpPr>
-        <p:spPr>
-          <a:xfrm>
-            <a:off x="6446520" y="2311931"/>
-            <a:ext cx="5120640" cy="707886"/>
-          </a:xfrm>
-          <a:prstGeom prst="rect">
-            <a:avLst/>
-          </a:prstGeom>
-          <a:noFill/>
-        </p:spPr>
-        <p:txBody>
-          <a:bodyPr wrap="square">
-            <a:spAutoFit/>
-          </a:bodyPr>
-          <a:lstStyle/>
-          <a:p>
-            <a:pPr algn="l"/>
-            <a:r>
-              <a:rPr sz="2000" b="0" i="0">
+              <a:t>WITH ARCHITECTURE</a:t>
+            </a:r>
+            <a:endParaRPr lang="en-US" sz="2800" dirty="0"/>
+          </a:p>
+        </p:txBody>
+      </p:sp>
+      <p:sp>
+        <p:nvSpPr>
+          <p:cNvPr id="48" name="Text 9">
+            <a:extLst>
+              <a:ext uri="{FF2B5EF4-FFF2-40B4-BE49-F238E27FC236}">
+                <a16:creationId xmlns:a16="http://schemas.microsoft.com/office/drawing/2014/main" id="{C85B1E5C-9DE4-32D2-7621-99154A1F8336}"/>
+              </a:ext>
+            </a:extLst>
+          </p:cNvPr>
+          <p:cNvSpPr/>
+          <p:nvPr/>
+        </p:nvSpPr>
+        <p:spPr>
+          <a:xfrm>
+            <a:off x="6492240" y="2186383"/>
+            <a:ext cx="4864608" cy="3630168"/>
+          </a:xfrm>
+          <a:prstGeom prst="rect">
+            <a:avLst/>
+          </a:prstGeom>
+          <a:noFill/>
+          <a:ln/>
+        </p:spPr>
+        <p:txBody>
+          <a:bodyPr wrap="square" lIns="0" tIns="0" rIns="0" bIns="0" rtlCol="0" anchor="t">
+            <a:normAutofit/>
+          </a:bodyPr>
+          <a:lstStyle/>
+          <a:p>
+            <a:pPr marL="457200" indent="-457200">
+              <a:spcAft>
+                <a:spcPts val="1800"/>
+              </a:spcAft>
+              <a:buFont typeface="Arial" panose="020B0604020202020204" pitchFamily="34" charset="0"/>
+              <a:buChar char="•"/>
+            </a:pPr>
+            <a:r>
+              <a:rPr lang="en-US" sz="2600" dirty="0">
                 <a:solidFill>
                   <a:srgbClr val="111827"/>
                 </a:solidFill>
               </a:rPr>
-              <a:t>A new screen is a new file in an obvious folder. Nothing else moves.</a:t>
-            </a:r>
-          </a:p>
-        </p:txBody>
-      </p:sp>
-      <p:sp>
-        <p:nvSpPr>
-          <p:cNvPr id="23" name="Rounded Rectangle 22"/>
-          <p:cNvSpPr/>
-          <p:nvPr/>
-        </p:nvSpPr>
-        <p:spPr>
-          <a:xfrm>
-            <a:off x="6263640" y="3161643"/>
-            <a:ext cx="5486400" cy="1024128"/>
-          </a:xfrm>
-          <a:prstGeom prst="roundRect">
-            <a:avLst/>
-          </a:prstGeom>
-          <a:solidFill>
-            <a:srgbClr val="F0FFF4"/>
-          </a:solidFill>
-          <a:ln w="15875">
-            <a:solidFill>
-              <a:srgbClr val="16A34A"/>
-            </a:solidFill>
-          </a:ln>
-        </p:spPr>
-        <p:style>
-          <a:lnRef idx="1">
-            <a:schemeClr val="accent1"/>
-          </a:lnRef>
-          <a:fillRef idx="3">
-            <a:schemeClr val="accent1"/>
-          </a:fillRef>
-          <a:effectRef idx="2">
-            <a:schemeClr val="accent1"/>
-          </a:effectRef>
-          <a:fontRef idx="minor">
-            <a:schemeClr val="lt1"/>
-          </a:fontRef>
-        </p:style>
-        <p:txBody>
-          <a:bodyPr rtlCol="0" anchor="ctr"/>
-          <a:lstStyle/>
-          <a:p>
-            <a:pPr algn="ctr"/>
-            <a:endParaRPr sz="3600"/>
-          </a:p>
-        </p:txBody>
-      </p:sp>
-      <p:sp>
-        <p:nvSpPr>
-          <p:cNvPr id="24" name="TextBox 23"/>
-          <p:cNvSpPr txBox="1"/>
-          <p:nvPr/>
-        </p:nvSpPr>
-        <p:spPr>
-          <a:xfrm>
-            <a:off x="6446520" y="3116603"/>
-            <a:ext cx="5120640" cy="461665"/>
-          </a:xfrm>
-          <a:prstGeom prst="rect">
-            <a:avLst/>
-          </a:prstGeom>
-          <a:noFill/>
-        </p:spPr>
-        <p:txBody>
-          <a:bodyPr wrap="square">
-            <a:spAutoFit/>
-          </a:bodyPr>
-          <a:lstStyle/>
-          <a:p>
-            <a:pPr algn="l"/>
-            <a:r>
-              <a:rPr sz="2400" b="1" i="0">
-                <a:solidFill>
-                  <a:srgbClr val="16A34A"/>
-                </a:solidFill>
-              </a:rPr>
-              <a:t>+  One source of truth</a:t>
-            </a:r>
-          </a:p>
-        </p:txBody>
-      </p:sp>
-      <p:sp>
-        <p:nvSpPr>
-          <p:cNvPr id="25" name="TextBox 24"/>
-          <p:cNvSpPr txBox="1"/>
-          <p:nvPr/>
-        </p:nvSpPr>
-        <p:spPr>
-          <a:xfrm>
-            <a:off x="6446520" y="3482363"/>
-            <a:ext cx="5120640" cy="707886"/>
-          </a:xfrm>
-          <a:prstGeom prst="rect">
-            <a:avLst/>
-          </a:prstGeom>
-          <a:noFill/>
-        </p:spPr>
-        <p:txBody>
-          <a:bodyPr wrap="square">
-            <a:spAutoFit/>
-          </a:bodyPr>
-          <a:lstStyle/>
-          <a:p>
-            <a:pPr algn="l"/>
-            <a:r>
-              <a:rPr sz="2000" b="0" i="0">
+              <a:t>Changes stay local</a:t>
+            </a:r>
+            <a:endParaRPr lang="en-US" sz="2600" dirty="0"/>
+          </a:p>
+          <a:p>
+            <a:pPr marL="457200" indent="-457200">
+              <a:spcAft>
+                <a:spcPts val="1800"/>
+              </a:spcAft>
+              <a:buFont typeface="Arial" panose="020B0604020202020204" pitchFamily="34" charset="0"/>
+              <a:buChar char="•"/>
+            </a:pPr>
+            <a:r>
+              <a:rPr lang="en-US" sz="2600" dirty="0">
                 <a:solidFill>
                   <a:srgbClr val="111827"/>
                 </a:solidFill>
               </a:rPr>
-              <a:t>Each piece of data has exactly one owner. Fix it once.</a:t>
-            </a:r>
-          </a:p>
-        </p:txBody>
-      </p:sp>
-      <p:sp>
-        <p:nvSpPr>
-          <p:cNvPr id="26" name="Rounded Rectangle 25"/>
-          <p:cNvSpPr/>
-          <p:nvPr/>
-        </p:nvSpPr>
-        <p:spPr>
-          <a:xfrm>
-            <a:off x="6263640" y="4332075"/>
-            <a:ext cx="5486400" cy="1024128"/>
-          </a:xfrm>
-          <a:prstGeom prst="roundRect">
-            <a:avLst/>
-          </a:prstGeom>
-          <a:solidFill>
-            <a:srgbClr val="F0FFF4"/>
-          </a:solidFill>
-          <a:ln w="15875">
-            <a:solidFill>
-              <a:srgbClr val="16A34A"/>
-            </a:solidFill>
-          </a:ln>
-        </p:spPr>
-        <p:style>
-          <a:lnRef idx="1">
-            <a:schemeClr val="accent1"/>
-          </a:lnRef>
-          <a:fillRef idx="3">
-            <a:schemeClr val="accent1"/>
-          </a:fillRef>
-          <a:effectRef idx="2">
-            <a:schemeClr val="accent1"/>
-          </a:effectRef>
-          <a:fontRef idx="minor">
-            <a:schemeClr val="lt1"/>
-          </a:fontRef>
-        </p:style>
-        <p:txBody>
-          <a:bodyPr rtlCol="0" anchor="ctr"/>
-          <a:lstStyle/>
-          <a:p>
-            <a:pPr algn="ctr"/>
-            <a:endParaRPr sz="3600"/>
-          </a:p>
-        </p:txBody>
-      </p:sp>
-      <p:sp>
-        <p:nvSpPr>
-          <p:cNvPr id="27" name="TextBox 26"/>
-          <p:cNvSpPr txBox="1"/>
-          <p:nvPr/>
-        </p:nvSpPr>
-        <p:spPr>
-          <a:xfrm>
-            <a:off x="6446520" y="4287034"/>
-            <a:ext cx="5120640" cy="461665"/>
-          </a:xfrm>
-          <a:prstGeom prst="rect">
-            <a:avLst/>
-          </a:prstGeom>
-          <a:noFill/>
-        </p:spPr>
-        <p:txBody>
-          <a:bodyPr wrap="square">
-            <a:spAutoFit/>
-          </a:bodyPr>
-          <a:lstStyle/>
-          <a:p>
-            <a:pPr algn="l"/>
-            <a:r>
-              <a:rPr sz="2400" b="1" i="0" dirty="0">
-                <a:solidFill>
-                  <a:srgbClr val="16A34A"/>
-                </a:solidFill>
-              </a:rPr>
-              <a:t>+  Onboarding is fast</a:t>
-            </a:r>
-          </a:p>
-        </p:txBody>
-      </p:sp>
-      <p:sp>
-        <p:nvSpPr>
-          <p:cNvPr id="28" name="TextBox 27"/>
-          <p:cNvSpPr txBox="1"/>
-          <p:nvPr/>
-        </p:nvSpPr>
-        <p:spPr>
-          <a:xfrm>
-            <a:off x="6446520" y="4721035"/>
-            <a:ext cx="5120640" cy="400110"/>
-          </a:xfrm>
-          <a:prstGeom prst="rect">
-            <a:avLst/>
-          </a:prstGeom>
-          <a:noFill/>
-        </p:spPr>
-        <p:txBody>
-          <a:bodyPr wrap="square">
-            <a:spAutoFit/>
-          </a:bodyPr>
-          <a:lstStyle/>
-          <a:p>
-            <a:pPr algn="l"/>
-            <a:r>
-              <a:rPr sz="2000" b="0" i="0" dirty="0">
+              <a:t>Data has one clear owner</a:t>
+            </a:r>
+            <a:endParaRPr lang="en-US" sz="2600" dirty="0"/>
+          </a:p>
+          <a:p>
+            <a:pPr marL="457200" indent="-457200">
+              <a:spcAft>
+                <a:spcPts val="1800"/>
+              </a:spcAft>
+              <a:buFont typeface="Arial" panose="020B0604020202020204" pitchFamily="34" charset="0"/>
+              <a:buChar char="•"/>
+            </a:pPr>
+            <a:r>
+              <a:rPr lang="en-US" sz="2600" dirty="0">
                 <a:solidFill>
                   <a:srgbClr val="111827"/>
                 </a:solidFill>
               </a:rPr>
-              <a:t>The folder names ARE the documentation.</a:t>
-            </a:r>
-          </a:p>
-        </p:txBody>
-      </p:sp>
-      <p:sp>
-        <p:nvSpPr>
-          <p:cNvPr id="29" name="Rounded Rectangle 28"/>
-          <p:cNvSpPr/>
-          <p:nvPr/>
-        </p:nvSpPr>
-        <p:spPr>
-          <a:xfrm>
-            <a:off x="6263640" y="5502507"/>
-            <a:ext cx="5486400" cy="1024128"/>
-          </a:xfrm>
-          <a:prstGeom prst="roundRect">
-            <a:avLst/>
-          </a:prstGeom>
-          <a:solidFill>
-            <a:srgbClr val="F0FFF4"/>
-          </a:solidFill>
-          <a:ln w="15875">
-            <a:solidFill>
-              <a:srgbClr val="16A34A"/>
-            </a:solidFill>
-          </a:ln>
-        </p:spPr>
-        <p:style>
-          <a:lnRef idx="1">
-            <a:schemeClr val="accent1"/>
-          </a:lnRef>
-          <a:fillRef idx="3">
-            <a:schemeClr val="accent1"/>
-          </a:fillRef>
-          <a:effectRef idx="2">
-            <a:schemeClr val="accent1"/>
-          </a:effectRef>
-          <a:fontRef idx="minor">
-            <a:schemeClr val="lt1"/>
-          </a:fontRef>
-        </p:style>
-        <p:txBody>
-          <a:bodyPr rtlCol="0" anchor="ctr"/>
-          <a:lstStyle/>
-          <a:p>
-            <a:pPr algn="ctr"/>
-            <a:endParaRPr sz="3600"/>
-          </a:p>
-        </p:txBody>
-      </p:sp>
-      <p:sp>
-        <p:nvSpPr>
-          <p:cNvPr id="30" name="TextBox 29"/>
-          <p:cNvSpPr txBox="1"/>
-          <p:nvPr/>
-        </p:nvSpPr>
-        <p:spPr>
-          <a:xfrm>
-            <a:off x="6446520" y="5457467"/>
-            <a:ext cx="5120640" cy="461665"/>
-          </a:xfrm>
-          <a:prstGeom prst="rect">
-            <a:avLst/>
-          </a:prstGeom>
-          <a:noFill/>
-        </p:spPr>
-        <p:txBody>
-          <a:bodyPr wrap="square">
-            <a:spAutoFit/>
-          </a:bodyPr>
-          <a:lstStyle/>
-          <a:p>
-            <a:pPr algn="l"/>
-            <a:r>
-              <a:rPr sz="2400" b="1" i="0">
-                <a:solidFill>
-                  <a:srgbClr val="16A34A"/>
-                </a:solidFill>
-              </a:rPr>
-              <a:t>+  Safe by design</a:t>
-            </a:r>
-          </a:p>
-        </p:txBody>
-      </p:sp>
-      <p:sp>
-        <p:nvSpPr>
-          <p:cNvPr id="31" name="TextBox 30"/>
-          <p:cNvSpPr txBox="1"/>
-          <p:nvPr/>
-        </p:nvSpPr>
-        <p:spPr>
-          <a:xfrm>
-            <a:off x="6446520" y="5823227"/>
-            <a:ext cx="5120640" cy="707886"/>
-          </a:xfrm>
-          <a:prstGeom prst="rect">
-            <a:avLst/>
-          </a:prstGeom>
-          <a:noFill/>
-        </p:spPr>
-        <p:txBody>
-          <a:bodyPr wrap="square">
-            <a:spAutoFit/>
-          </a:bodyPr>
-          <a:lstStyle/>
-          <a:p>
-            <a:pPr algn="l"/>
-            <a:r>
-              <a:rPr sz="2000" b="0" i="0">
+              <a:t>Folder structure communicates intent</a:t>
+            </a:r>
+            <a:endParaRPr lang="en-US" sz="2600" dirty="0"/>
+          </a:p>
+          <a:p>
+            <a:pPr marL="457200" indent="-457200">
+              <a:spcAft>
+                <a:spcPts val="1800"/>
+              </a:spcAft>
+              <a:buFont typeface="Arial" panose="020B0604020202020204" pitchFamily="34" charset="0"/>
+              <a:buChar char="•"/>
+            </a:pPr>
+            <a:r>
+              <a:rPr lang="en-US" sz="2600" dirty="0">
                 <a:solidFill>
                   <a:srgbClr val="111827"/>
                 </a:solidFill>
               </a:rPr>
-              <a:t>Secrets live on the server; the app only holds what it must.</a:t>
-            </a:r>
-          </a:p>
-        </p:txBody>
-      </p:sp>
-      <p:sp>
-        <p:nvSpPr>
-          <p:cNvPr id="33" name="TextBox 32"/>
-          <p:cNvSpPr txBox="1"/>
-          <p:nvPr/>
-        </p:nvSpPr>
-        <p:spPr>
-          <a:xfrm>
-            <a:off x="10515600" y="6510528"/>
-            <a:ext cx="1280160" cy="274320"/>
-          </a:xfrm>
-          <a:prstGeom prst="rect">
-            <a:avLst/>
-          </a:prstGeom>
-          <a:noFill/>
-        </p:spPr>
-        <p:txBody>
-          <a:bodyPr wrap="square">
-            <a:spAutoFit/>
-          </a:bodyPr>
-          <a:lstStyle/>
-          <a:p>
-            <a:pPr algn="r"/>
-            <a:r>
-              <a:rPr sz="900" b="0" i="0">
-                <a:solidFill>
-                  <a:srgbClr val="6B7280"/>
-                </a:solidFill>
-              </a:rPr>
-              <a:t>7 / 46</a:t>
-            </a:r>
+              <a:t>Security boundaries are deliberate</a:t>
+            </a:r>
+            <a:endParaRPr lang="en-US" sz="2600" dirty="0"/>
           </a:p>
         </p:txBody>
       </p:sp>
@@ -49781,80 +50248,78 @@
 <file path=ppt/slides/slide8.xml><?xml version="1.0" encoding="utf-8"?>
 <p:sld xmlns:a="http://schemas.openxmlformats.org/drawingml/2006/main" xmlns:r="http://schemas.openxmlformats.org/officeDocument/2006/relationships" xmlns:p="http://schemas.openxmlformats.org/presentationml/2006/main">
   <p:cSld>
-    <p:bg>
-      <p:bgPr>
-        <a:solidFill>
-          <a:srgbClr val="2563EB"/>
-        </a:solidFill>
-        <a:effectLst/>
-      </p:bgPr>
-    </p:bg>
     <p:spTree>
       <p:nvGrpSpPr>
-        <p:cNvPr id="1" name=""/>
+        <p:cNvPr id="1" name="">
+          <a:extLst>
+            <a:ext uri="{FF2B5EF4-FFF2-40B4-BE49-F238E27FC236}">
+              <a16:creationId xmlns:a16="http://schemas.microsoft.com/office/drawing/2014/main" id="{7E9F954F-71AB-BD44-032F-6D6635B6985C}"/>
+            </a:ext>
+          </a:extLst>
+        </p:cNvPr>
         <p:cNvGrpSpPr/>
         <p:nvPr/>
       </p:nvGrpSpPr>
       <p:grpSpPr>
         <a:xfrm>
           <a:off x="0" y="0"/>
-          <a:ext cx="0" cy="0"/>
+          <a:ext cx="1" cy="1"/>
           <a:chOff x="0" y="0"/>
-          <a:chExt cx="0" cy="0"/>
+          <a:chExt cx="1" cy="1"/>
         </a:xfrm>
       </p:grpSpPr>
       <p:sp>
         <p:nvSpPr>
-          <p:cNvPr id="3" name="TextBox 2"/>
-          <p:cNvSpPr txBox="1"/>
-          <p:nvPr/>
-        </p:nvSpPr>
-        <p:spPr>
-          <a:xfrm>
-            <a:off x="1" y="2182278"/>
-            <a:ext cx="9293041" cy="1015663"/>
-          </a:xfrm>
-          <a:prstGeom prst="rect">
-            <a:avLst/>
-          </a:prstGeom>
-          <a:noFill/>
-        </p:spPr>
-        <p:txBody>
-          <a:bodyPr wrap="square">
-            <a:spAutoFit/>
+          <p:cNvPr id="4" name="Text Placeholder 3">
+            <a:extLst>
+              <a:ext uri="{FF2B5EF4-FFF2-40B4-BE49-F238E27FC236}">
+                <a16:creationId xmlns:a16="http://schemas.microsoft.com/office/drawing/2014/main" id="{6E7679F6-231F-0020-C3F7-A5630B868B27}"/>
+              </a:ext>
+            </a:extLst>
+          </p:cNvPr>
+          <p:cNvSpPr>
+            <a:spLocks noGrp="1"/>
+          </p:cNvSpPr>
+          <p:nvPr>
+            <p:ph type="body" sz="quarter" idx="10"/>
+          </p:nvPr>
+        </p:nvSpPr>
+        <p:spPr>
+          <a:xfrm>
+            <a:off x="833750" y="2448100"/>
+            <a:ext cx="6072018" cy="980901"/>
+          </a:xfrm>
+        </p:spPr>
+        <p:txBody>
+          <a:bodyPr>
+            <a:normAutofit fontScale="92500"/>
           </a:bodyPr>
           <a:lstStyle/>
           <a:p>
             <a:pPr algn="ctr"/>
             <a:r>
-              <a:rPr lang="en-US" sz="6000" b="1" i="0" dirty="0">
-                <a:solidFill>
-                  <a:srgbClr val="FFFFFF"/>
-                </a:solidFill>
-              </a:rPr>
-              <a:t>App Architecture </a:t>
-            </a:r>
-            <a:r>
-              <a:rPr sz="6000" b="1" i="0" dirty="0">
-                <a:solidFill>
-                  <a:srgbClr val="FFFFFF"/>
-                </a:solidFill>
-              </a:rPr>
-              <a:t>Layers </a:t>
-            </a:r>
-          </a:p>
-        </p:txBody>
-      </p:sp>
-      <p:sp>
-        <p:nvSpPr>
-          <p:cNvPr id="4" name="TextBox 3"/>
-          <p:cNvSpPr txBox="1"/>
-          <p:nvPr/>
-        </p:nvSpPr>
-        <p:spPr>
-          <a:xfrm>
-            <a:off x="201017" y="3462437"/>
-            <a:ext cx="9293041" cy="523220"/>
+              <a:rPr lang="en-US" sz="4800" b="1" dirty="0"/>
+              <a:t>App Architecture Layers</a:t>
+            </a:r>
+          </a:p>
+        </p:txBody>
+      </p:sp>
+      <p:sp>
+        <p:nvSpPr>
+          <p:cNvPr id="3" name="TextBox 2">
+            <a:extLst>
+              <a:ext uri="{FF2B5EF4-FFF2-40B4-BE49-F238E27FC236}">
+                <a16:creationId xmlns:a16="http://schemas.microsoft.com/office/drawing/2014/main" id="{CA927E41-2B2D-715F-C307-D0BE8E1D59BB}"/>
+              </a:ext>
+            </a:extLst>
+          </p:cNvPr>
+          <p:cNvSpPr txBox="1"/>
+          <p:nvPr/>
+        </p:nvSpPr>
+        <p:spPr>
+          <a:xfrm>
+            <a:off x="833748" y="3410831"/>
+            <a:ext cx="6072019" cy="954107"/>
           </a:xfrm>
           <a:prstGeom prst="rect">
             <a:avLst/>
@@ -49869,9 +50334,9 @@
           <a:p>
             <a:pPr algn="ctr"/>
             <a:r>
-              <a:rPr sz="2800" b="0" i="0" dirty="0">
-                <a:solidFill>
-                  <a:srgbClr val="BFDBFF"/>
+              <a:rPr lang="en-US" sz="2800" b="1" dirty="0">
+                <a:solidFill>
+                  <a:srgbClr val="1527D7"/>
                 </a:solidFill>
               </a:rPr>
               <a:t>Part 2 . Every mobile app is built from the same few layers</a:t>
@@ -49881,10 +50346,10 @@
       </p:sp>
       <p:pic>
         <p:nvPicPr>
-          <p:cNvPr id="6" name="Picture 5">
+          <p:cNvPr id="5" name="Picture 4">
             <a:extLst>
               <a:ext uri="{FF2B5EF4-FFF2-40B4-BE49-F238E27FC236}">
-                <a16:creationId xmlns:a16="http://schemas.microsoft.com/office/drawing/2014/main" id="{0CC8EE1A-2463-21FD-76B9-904EC9D770F2}"/>
+                <a16:creationId xmlns:a16="http://schemas.microsoft.com/office/drawing/2014/main" id="{50B4915B-1202-DAED-F3C0-CE8FEE3790F5}"/>
               </a:ext>
             </a:extLst>
           </p:cNvPr>
@@ -49894,15 +50359,15 @@
           <p:nvPr/>
         </p:nvPicPr>
         <p:blipFill>
-          <a:blip r:embed="rId2"/>
+          <a:blip r:embed="rId3"/>
           <a:stretch>
             <a:fillRect/>
           </a:stretch>
         </p:blipFill>
         <p:spPr>
           <a:xfrm>
-            <a:off x="9695979" y="1241034"/>
-            <a:ext cx="2290925" cy="4442805"/>
+            <a:off x="8106770" y="232012"/>
+            <a:ext cx="3880135" cy="6414448"/>
           </a:xfrm>
           <a:prstGeom prst="rect">
             <a:avLst/>
@@ -49910,6 +50375,11 @@
         </p:spPr>
       </p:pic>
     </p:spTree>
+    <p:extLst>
+      <p:ext uri="{BB962C8B-B14F-4D97-AF65-F5344CB8AC3E}">
+        <p14:creationId xmlns:p14="http://schemas.microsoft.com/office/powerpoint/2010/main" val="987322021"/>
+      </p:ext>
+    </p:extLst>
   </p:cSld>
   <p:clrMapOvr>
     <a:masterClrMapping/>
@@ -50356,50 +50826,6 @@
       </p:sp>
       <p:sp>
         <p:nvSpPr>
-          <p:cNvPr id="12" name="Down Arrow 11"/>
-          <p:cNvSpPr/>
-          <p:nvPr/>
-        </p:nvSpPr>
-        <p:spPr>
-          <a:xfrm>
-            <a:off x="1737360" y="2572472"/>
-            <a:ext cx="274320" cy="219456"/>
-          </a:xfrm>
-          <a:prstGeom prst="downArrow">
-            <a:avLst/>
-          </a:prstGeom>
-          <a:solidFill>
-            <a:srgbClr val="E5E7EB"/>
-          </a:solidFill>
-          <a:ln>
-            <a:noFill/>
-          </a:ln>
-        </p:spPr>
-        <p:style>
-          <a:lnRef idx="1">
-            <a:schemeClr val="accent1"/>
-          </a:lnRef>
-          <a:fillRef idx="3">
-            <a:schemeClr val="accent1"/>
-          </a:fillRef>
-          <a:effectRef idx="2">
-            <a:schemeClr val="accent1"/>
-          </a:effectRef>
-          <a:fontRef idx="minor">
-            <a:schemeClr val="lt1"/>
-          </a:fontRef>
-        </p:style>
-        <p:txBody>
-          <a:bodyPr rtlCol="0" anchor="ctr"/>
-          <a:lstStyle/>
-          <a:p>
-            <a:pPr algn="ctr"/>
-            <a:endParaRPr sz="2400"/>
-          </a:p>
-        </p:txBody>
-      </p:sp>
-      <p:sp>
-        <p:nvSpPr>
           <p:cNvPr id="13" name="Rounded Rectangle 12"/>
           <p:cNvSpPr/>
           <p:nvPr/>
@@ -50635,50 +51061,6 @@
       </p:sp>
       <p:sp>
         <p:nvSpPr>
-          <p:cNvPr id="19" name="Down Arrow 18"/>
-          <p:cNvSpPr/>
-          <p:nvPr/>
-        </p:nvSpPr>
-        <p:spPr>
-          <a:xfrm>
-            <a:off x="1737360" y="3870919"/>
-            <a:ext cx="274320" cy="219456"/>
-          </a:xfrm>
-          <a:prstGeom prst="downArrow">
-            <a:avLst/>
-          </a:prstGeom>
-          <a:solidFill>
-            <a:srgbClr val="E5E7EB"/>
-          </a:solidFill>
-          <a:ln>
-            <a:noFill/>
-          </a:ln>
-        </p:spPr>
-        <p:style>
-          <a:lnRef idx="1">
-            <a:schemeClr val="accent1"/>
-          </a:lnRef>
-          <a:fillRef idx="3">
-            <a:schemeClr val="accent1"/>
-          </a:fillRef>
-          <a:effectRef idx="2">
-            <a:schemeClr val="accent1"/>
-          </a:effectRef>
-          <a:fontRef idx="minor">
-            <a:schemeClr val="lt1"/>
-          </a:fontRef>
-        </p:style>
-        <p:txBody>
-          <a:bodyPr rtlCol="0" anchor="ctr"/>
-          <a:lstStyle/>
-          <a:p>
-            <a:pPr algn="ctr"/>
-            <a:endParaRPr sz="2400"/>
-          </a:p>
-        </p:txBody>
-      </p:sp>
-      <p:sp>
-        <p:nvSpPr>
           <p:cNvPr id="20" name="Rounded Rectangle 19"/>
           <p:cNvSpPr/>
           <p:nvPr/>
@@ -50914,50 +51296,6 @@
       </p:sp>
       <p:sp>
         <p:nvSpPr>
-          <p:cNvPr id="26" name="Down Arrow 25"/>
-          <p:cNvSpPr/>
-          <p:nvPr/>
-        </p:nvSpPr>
-        <p:spPr>
-          <a:xfrm>
-            <a:off x="1737360" y="5169368"/>
-            <a:ext cx="274320" cy="219456"/>
-          </a:xfrm>
-          <a:prstGeom prst="downArrow">
-            <a:avLst/>
-          </a:prstGeom>
-          <a:solidFill>
-            <a:srgbClr val="E5E7EB"/>
-          </a:solidFill>
-          <a:ln>
-            <a:noFill/>
-          </a:ln>
-        </p:spPr>
-        <p:style>
-          <a:lnRef idx="1">
-            <a:schemeClr val="accent1"/>
-          </a:lnRef>
-          <a:fillRef idx="3">
-            <a:schemeClr val="accent1"/>
-          </a:fillRef>
-          <a:effectRef idx="2">
-            <a:schemeClr val="accent1"/>
-          </a:effectRef>
-          <a:fontRef idx="minor">
-            <a:schemeClr val="lt1"/>
-          </a:fontRef>
-        </p:style>
-        <p:txBody>
-          <a:bodyPr rtlCol="0" anchor="ctr"/>
-          <a:lstStyle/>
-          <a:p>
-            <a:pPr algn="ctr"/>
-            <a:endParaRPr sz="2400"/>
-          </a:p>
-        </p:txBody>
-      </p:sp>
-      <p:sp>
-        <p:nvSpPr>
           <p:cNvPr id="27" name="Rounded Rectangle 26"/>
           <p:cNvSpPr/>
           <p:nvPr/>
@@ -51178,14 +51516,22 @@
           <a:p>
             <a:pPr algn="l"/>
             <a:r>
-              <a:rPr sz="2200" b="0" i="0"/>
-              <a:t>Server, database, auth provider. Example: Supabase in W12.</a:t>
+              <a:rPr sz="2200" b="0" i="0" dirty="0"/>
+              <a:t>Server, database, auth provider. Example: </a:t>
+            </a:r>
+            <a:r>
+              <a:rPr sz="2200" b="0" i="0" dirty="0" err="1"/>
+              <a:t>Supabase</a:t>
+            </a:r>
+            <a:r>
+              <a:rPr sz="2200" b="0" i="0" dirty="0"/>
+              <a:t>.</a:t>
             </a:r>
           </a:p>
           <a:p>
             <a:pPr algn="l"/>
             <a:r>
-              <a:rPr sz="2200" b="0" i="0"/>
+              <a:rPr sz="2200" b="0" i="0" dirty="0"/>
               <a:t>Shared by every user; the app is just one client of it.</a:t>
             </a:r>
           </a:p>
@@ -51199,8 +51545,8 @@
         </p:nvSpPr>
         <p:spPr>
           <a:xfrm>
-            <a:off x="10515600" y="6510528"/>
-            <a:ext cx="1280160" cy="274320"/>
+            <a:off x="10515600" y="6630848"/>
+            <a:ext cx="1280160" cy="230832"/>
           </a:xfrm>
           <a:prstGeom prst="rect">
             <a:avLst/>
@@ -51215,13 +51561,195 @@
           <a:p>
             <a:pPr algn="r"/>
             <a:r>
-              <a:rPr sz="900" b="0" i="0">
-                <a:solidFill>
-                  <a:srgbClr val="6B7280"/>
+              <a:rPr sz="900" b="1" i="0" dirty="0">
+                <a:solidFill>
+                  <a:srgbClr val="FFC000"/>
                 </a:solidFill>
               </a:rPr>
               <a:t>10 / 46</a:t>
             </a:r>
+          </a:p>
+        </p:txBody>
+      </p:sp>
+      <p:sp>
+        <p:nvSpPr>
+          <p:cNvPr id="35" name="Shape 18">
+            <a:extLst>
+              <a:ext uri="{FF2B5EF4-FFF2-40B4-BE49-F238E27FC236}">
+                <a16:creationId xmlns:a16="http://schemas.microsoft.com/office/drawing/2014/main" id="{CB67E06C-6AC0-3247-1465-D99F7ECEE8B3}"/>
+              </a:ext>
+            </a:extLst>
+          </p:cNvPr>
+          <p:cNvSpPr/>
+          <p:nvPr/>
+        </p:nvSpPr>
+        <p:spPr>
+          <a:xfrm flipH="1">
+            <a:off x="11947382" y="1492999"/>
+            <a:ext cx="9625" cy="4859675"/>
+          </a:xfrm>
+          <a:prstGeom prst="line">
+            <a:avLst/>
+          </a:prstGeom>
+          <a:noFill/>
+          <a:ln w="60325">
+            <a:solidFill>
+              <a:srgbClr val="FF0000"/>
+            </a:solidFill>
+            <a:prstDash val="solid"/>
+            <a:headEnd type="none"/>
+            <a:tailEnd type="triangle"/>
+          </a:ln>
+        </p:spPr>
+        <p:txBody>
+          <a:bodyPr/>
+          <a:lstStyle/>
+          <a:p>
+            <a:endParaRPr lang="en-US"/>
+          </a:p>
+        </p:txBody>
+      </p:sp>
+      <p:sp>
+        <p:nvSpPr>
+          <p:cNvPr id="12" name="Down Arrow 11"/>
+          <p:cNvSpPr/>
+          <p:nvPr/>
+        </p:nvSpPr>
+        <p:spPr>
+          <a:xfrm>
+            <a:off x="1674854" y="2078696"/>
+            <a:ext cx="336826" cy="868680"/>
+          </a:xfrm>
+          <a:prstGeom prst="downArrow">
+            <a:avLst/>
+          </a:prstGeom>
+          <a:solidFill>
+            <a:srgbClr val="FF0000"/>
+          </a:solidFill>
+          <a:ln>
+            <a:noFill/>
+          </a:ln>
+        </p:spPr>
+        <p:style>
+          <a:lnRef idx="1">
+            <a:schemeClr val="accent1"/>
+          </a:lnRef>
+          <a:fillRef idx="3">
+            <a:schemeClr val="accent1"/>
+          </a:fillRef>
+          <a:effectRef idx="2">
+            <a:schemeClr val="accent1"/>
+          </a:effectRef>
+          <a:fontRef idx="minor">
+            <a:schemeClr val="lt1"/>
+          </a:fontRef>
+        </p:style>
+        <p:txBody>
+          <a:bodyPr rtlCol="0" anchor="ctr"/>
+          <a:lstStyle/>
+          <a:p>
+            <a:pPr algn="ctr"/>
+            <a:endParaRPr sz="2400"/>
+          </a:p>
+        </p:txBody>
+      </p:sp>
+      <p:sp>
+        <p:nvSpPr>
+          <p:cNvPr id="37" name="Down Arrow 11">
+            <a:extLst>
+              <a:ext uri="{FF2B5EF4-FFF2-40B4-BE49-F238E27FC236}">
+                <a16:creationId xmlns:a16="http://schemas.microsoft.com/office/drawing/2014/main" id="{E44224F6-9256-A709-7C4E-B5902E92C712}"/>
+              </a:ext>
+            </a:extLst>
+          </p:cNvPr>
+          <p:cNvSpPr/>
+          <p:nvPr/>
+        </p:nvSpPr>
+        <p:spPr>
+          <a:xfrm>
+            <a:off x="1685155" y="3365786"/>
+            <a:ext cx="336826" cy="868680"/>
+          </a:xfrm>
+          <a:prstGeom prst="downArrow">
+            <a:avLst/>
+          </a:prstGeom>
+          <a:solidFill>
+            <a:srgbClr val="FF0000"/>
+          </a:solidFill>
+          <a:ln>
+            <a:noFill/>
+          </a:ln>
+        </p:spPr>
+        <p:style>
+          <a:lnRef idx="1">
+            <a:schemeClr val="accent1"/>
+          </a:lnRef>
+          <a:fillRef idx="3">
+            <a:schemeClr val="accent1"/>
+          </a:fillRef>
+          <a:effectRef idx="2">
+            <a:schemeClr val="accent1"/>
+          </a:effectRef>
+          <a:fontRef idx="minor">
+            <a:schemeClr val="lt1"/>
+          </a:fontRef>
+        </p:style>
+        <p:txBody>
+          <a:bodyPr rtlCol="0" anchor="ctr"/>
+          <a:lstStyle/>
+          <a:p>
+            <a:pPr algn="ctr"/>
+            <a:endParaRPr sz="2400"/>
+          </a:p>
+        </p:txBody>
+      </p:sp>
+      <p:sp>
+        <p:nvSpPr>
+          <p:cNvPr id="39" name="Down Arrow 11">
+            <a:extLst>
+              <a:ext uri="{FF2B5EF4-FFF2-40B4-BE49-F238E27FC236}">
+                <a16:creationId xmlns:a16="http://schemas.microsoft.com/office/drawing/2014/main" id="{081F7A7B-EB52-20C1-9447-85B131AB63EE}"/>
+              </a:ext>
+            </a:extLst>
+          </p:cNvPr>
+          <p:cNvSpPr/>
+          <p:nvPr/>
+        </p:nvSpPr>
+        <p:spPr>
+          <a:xfrm>
+            <a:off x="1666461" y="4674289"/>
+            <a:ext cx="336826" cy="868680"/>
+          </a:xfrm>
+          <a:prstGeom prst="downArrow">
+            <a:avLst/>
+          </a:prstGeom>
+          <a:solidFill>
+            <a:srgbClr val="FF0000"/>
+          </a:solidFill>
+          <a:ln>
+            <a:noFill/>
+          </a:ln>
+        </p:spPr>
+        <p:style>
+          <a:lnRef idx="1">
+            <a:schemeClr val="accent1"/>
+          </a:lnRef>
+          <a:fillRef idx="3">
+            <a:schemeClr val="accent1"/>
+          </a:fillRef>
+          <a:effectRef idx="2">
+            <a:schemeClr val="accent1"/>
+          </a:effectRef>
+          <a:fontRef idx="minor">
+            <a:schemeClr val="lt1"/>
+          </a:fontRef>
+        </p:style>
+        <p:txBody>
+          <a:bodyPr rtlCol="0" anchor="ctr"/>
+          <a:lstStyle/>
+          <a:p>
+            <a:pPr algn="ctr"/>
+            <a:endParaRPr sz="2400"/>
           </a:p>
         </p:txBody>
       </p:sp>
